--- a/Lectures/Slides/L8-9.pptx
+++ b/Lectures/Slides/L8-9.pptx
@@ -5,7 +5,7 @@
     <p:sldMasterId id="2147483648" r:id="rId1"/>
   </p:sldMasterIdLst>
   <p:notesMasterIdLst>
-    <p:notesMasterId r:id="rId21"/>
+    <p:notesMasterId r:id="rId24"/>
   </p:notesMasterIdLst>
   <p:sldIdLst>
     <p:sldId id="256" r:id="rId2"/>
@@ -14,19 +14,22 @@
     <p:sldId id="258" r:id="rId5"/>
     <p:sldId id="311" r:id="rId6"/>
     <p:sldId id="312" r:id="rId7"/>
-    <p:sldId id="259" r:id="rId8"/>
-    <p:sldId id="260" r:id="rId9"/>
-    <p:sldId id="261" r:id="rId10"/>
-    <p:sldId id="262" r:id="rId11"/>
-    <p:sldId id="263" r:id="rId12"/>
-    <p:sldId id="264" r:id="rId13"/>
-    <p:sldId id="265" r:id="rId14"/>
-    <p:sldId id="266" r:id="rId15"/>
-    <p:sldId id="267" r:id="rId16"/>
-    <p:sldId id="268" r:id="rId17"/>
-    <p:sldId id="269" r:id="rId18"/>
-    <p:sldId id="271" r:id="rId19"/>
-    <p:sldId id="270" r:id="rId20"/>
+    <p:sldId id="313" r:id="rId8"/>
+    <p:sldId id="314" r:id="rId9"/>
+    <p:sldId id="315" r:id="rId10"/>
+    <p:sldId id="259" r:id="rId11"/>
+    <p:sldId id="260" r:id="rId12"/>
+    <p:sldId id="261" r:id="rId13"/>
+    <p:sldId id="262" r:id="rId14"/>
+    <p:sldId id="263" r:id="rId15"/>
+    <p:sldId id="264" r:id="rId16"/>
+    <p:sldId id="265" r:id="rId17"/>
+    <p:sldId id="266" r:id="rId18"/>
+    <p:sldId id="267" r:id="rId19"/>
+    <p:sldId id="268" r:id="rId20"/>
+    <p:sldId id="269" r:id="rId21"/>
+    <p:sldId id="271" r:id="rId22"/>
+    <p:sldId id="270" r:id="rId23"/>
   </p:sldIdLst>
   <p:sldSz cx="12192000" cy="6858000"/>
   <p:notesSz cx="6858000" cy="9144000"/>
@@ -264,7 +267,7 @@
       <p15:sldGuideLst xmlns:p15="http://schemas.microsoft.com/office/powerpoint/2012/main"/>
     </p:ext>
     <p:ext uri="http://customooxmlschemas.google.com/">
-      <go:slidesCustomData xmlns:go="http://customooxmlschemas.google.com/" xmlns:ahyp="http://schemas.microsoft.com/office/drawing/2018/hyperlinkcolor" xmlns:p15="http://schemas.microsoft.com/office/powerpoint/2012/main" xmlns:p14="http://schemas.microsoft.com/office/powerpoint/2010/main" xmlns:com="http://schemas.openxmlformats.org/drawingml/2006/compatibility" xmlns:pvml="urn:schemas-microsoft-com:office:powerpoint" xmlns:v="urn:schemas-microsoft-com:vml" xmlns:o="urn:schemas-microsoft-com:office:office" xmlns:dgm="http://schemas.openxmlformats.org/drawingml/2006/diagram" xmlns:c="http://schemas.openxmlformats.org/drawingml/2006/chart" xmlns:mv="urn:schemas-microsoft-com:mac:vml" xmlns:mc="http://schemas.openxmlformats.org/markup-compatibility/2006" xmlns="" r:id="rId22" roundtripDataSignature="AMtx7mjKkk5wOoQj6sDPPETbbKgHU96Dzg=="/>
+      <go:slidesCustomData xmlns="" xmlns:mc="http://schemas.openxmlformats.org/markup-compatibility/2006" xmlns:mv="urn:schemas-microsoft-com:mac:vml" xmlns:c="http://schemas.openxmlformats.org/drawingml/2006/chart" xmlns:dgm="http://schemas.openxmlformats.org/drawingml/2006/diagram" xmlns:o="urn:schemas-microsoft-com:office:office" xmlns:v="urn:schemas-microsoft-com:vml" xmlns:pvml="urn:schemas-microsoft-com:office:powerpoint" xmlns:com="http://schemas.openxmlformats.org/drawingml/2006/compatibility" xmlns:p14="http://schemas.microsoft.com/office/powerpoint/2010/main" xmlns:p15="http://schemas.microsoft.com/office/powerpoint/2012/main" xmlns:ahyp="http://schemas.microsoft.com/office/drawing/2018/hyperlinkcolor" xmlns:go="http://customooxmlschemas.google.com/" r:id="rId25" roundtripDataSignature="AMtx7mjKkk5wOoQj6sDPPETbbKgHU96Dzg=="/>
     </p:ext>
   </p:extLst>
 </p:presentation>
@@ -1832,6 +1835,336 @@
   <p:cSld>
     <p:spTree>
       <p:nvGrpSpPr>
+        <p:cNvPr id="1" name="Shape 114"/>
+        <p:cNvGrpSpPr/>
+        <p:nvPr/>
+      </p:nvGrpSpPr>
+      <p:grpSpPr>
+        <a:xfrm>
+          <a:off x="0" y="0"/>
+          <a:ext cx="0" cy="0"/>
+          <a:chOff x="0" y="0"/>
+          <a:chExt cx="0" cy="0"/>
+        </a:xfrm>
+      </p:grpSpPr>
+      <p:sp>
+        <p:nvSpPr>
+          <p:cNvPr id="115" name="Google Shape;115;p29:notes"/>
+          <p:cNvSpPr txBox="1">
+            <a:spLocks noGrp="1"/>
+          </p:cNvSpPr>
+          <p:nvPr>
+            <p:ph type="body" idx="1"/>
+          </p:nvPr>
+        </p:nvSpPr>
+        <p:spPr>
+          <a:xfrm>
+            <a:off x="685800" y="4400550"/>
+            <a:ext cx="5486400" cy="3600450"/>
+          </a:xfrm>
+          <a:prstGeom prst="rect">
+            <a:avLst/>
+          </a:prstGeom>
+          <a:noFill/>
+          <a:ln>
+            <a:noFill/>
+          </a:ln>
+        </p:spPr>
+        <p:txBody>
+          <a:bodyPr spcFirstLastPara="1" wrap="square" lIns="91425" tIns="45700" rIns="91425" bIns="45700" anchor="t" anchorCtr="0">
+            <a:noAutofit/>
+          </a:bodyPr>
+          <a:lstStyle/>
+          <a:p>
+            <a:pPr marL="0" lvl="0" indent="0" algn="l" rtl="0">
+              <a:lnSpc>
+                <a:spcPct val="100000"/>
+              </a:lnSpc>
+              <a:spcBef>
+                <a:spcPts val="0"/>
+              </a:spcBef>
+              <a:spcAft>
+                <a:spcPts val="0"/>
+              </a:spcAft>
+              <a:buSzPts val="1400"/>
+              <a:buNone/>
+            </a:pPr>
+            <a:endParaRPr/>
+          </a:p>
+        </p:txBody>
+      </p:sp>
+      <p:sp>
+        <p:nvSpPr>
+          <p:cNvPr id="116" name="Google Shape;116;p29:notes"/>
+          <p:cNvSpPr>
+            <a:spLocks noGrp="1" noRot="1" noChangeAspect="1"/>
+          </p:cNvSpPr>
+          <p:nvPr>
+            <p:ph type="sldImg" idx="2"/>
+          </p:nvPr>
+        </p:nvSpPr>
+        <p:spPr>
+          <a:xfrm>
+            <a:off x="685800" y="1143000"/>
+            <a:ext cx="5486400" cy="3086100"/>
+          </a:xfrm>
+          <a:custGeom>
+            <a:avLst/>
+            <a:gdLst/>
+            <a:ahLst/>
+            <a:cxnLst/>
+            <a:rect l="l" t="t" r="r" b="b"/>
+            <a:pathLst>
+              <a:path w="120000" h="120000" extrusionOk="0">
+                <a:moveTo>
+                  <a:pt x="0" y="0"/>
+                </a:moveTo>
+                <a:lnTo>
+                  <a:pt x="120000" y="0"/>
+                </a:lnTo>
+                <a:lnTo>
+                  <a:pt x="120000" y="120000"/>
+                </a:lnTo>
+                <a:lnTo>
+                  <a:pt x="0" y="120000"/>
+                </a:lnTo>
+                <a:close/>
+              </a:path>
+            </a:pathLst>
+          </a:custGeom>
+          <a:noFill/>
+          <a:ln w="12700" cap="flat" cmpd="sng">
+            <a:solidFill>
+              <a:srgbClr val="000000"/>
+            </a:solidFill>
+            <a:prstDash val="solid"/>
+            <a:round/>
+            <a:headEnd type="none" w="sm" len="sm"/>
+            <a:tailEnd type="none" w="sm" len="sm"/>
+          </a:ln>
+        </p:spPr>
+      </p:sp>
+    </p:spTree>
+  </p:cSld>
+  <p:clrMapOvr>
+    <a:masterClrMapping/>
+  </p:clrMapOvr>
+</p:notes>
+</file>
+
+<file path=ppt/notesSlides/notesSlide11.xml><?xml version="1.0" encoding="utf-8"?>
+<p:notes xmlns:a="http://schemas.openxmlformats.org/drawingml/2006/main" xmlns:r="http://schemas.openxmlformats.org/officeDocument/2006/relationships" xmlns:p="http://schemas.openxmlformats.org/presentationml/2006/main" showMasterSp="0" showMasterPhAnim="0">
+  <p:cSld>
+    <p:spTree>
+      <p:nvGrpSpPr>
+        <p:cNvPr id="1" name="Shape 127"/>
+        <p:cNvGrpSpPr/>
+        <p:nvPr/>
+      </p:nvGrpSpPr>
+      <p:grpSpPr>
+        <a:xfrm>
+          <a:off x="0" y="0"/>
+          <a:ext cx="0" cy="0"/>
+          <a:chOff x="0" y="0"/>
+          <a:chExt cx="0" cy="0"/>
+        </a:xfrm>
+      </p:grpSpPr>
+      <p:sp>
+        <p:nvSpPr>
+          <p:cNvPr id="128" name="Google Shape;128;p30:notes"/>
+          <p:cNvSpPr txBox="1">
+            <a:spLocks noGrp="1"/>
+          </p:cNvSpPr>
+          <p:nvPr>
+            <p:ph type="body" idx="1"/>
+          </p:nvPr>
+        </p:nvSpPr>
+        <p:spPr>
+          <a:xfrm>
+            <a:off x="685800" y="4400550"/>
+            <a:ext cx="5486400" cy="3600450"/>
+          </a:xfrm>
+          <a:prstGeom prst="rect">
+            <a:avLst/>
+          </a:prstGeom>
+        </p:spPr>
+        <p:txBody>
+          <a:bodyPr spcFirstLastPara="1" wrap="square" lIns="91425" tIns="45700" rIns="91425" bIns="45700" anchor="t" anchorCtr="0">
+            <a:noAutofit/>
+          </a:bodyPr>
+          <a:lstStyle/>
+          <a:p>
+            <a:pPr marL="0" lvl="0" indent="0" algn="l" rtl="0">
+              <a:spcBef>
+                <a:spcPts val="0"/>
+              </a:spcBef>
+              <a:spcAft>
+                <a:spcPts val="0"/>
+              </a:spcAft>
+              <a:buNone/>
+            </a:pPr>
+            <a:endParaRPr/>
+          </a:p>
+        </p:txBody>
+      </p:sp>
+      <p:sp>
+        <p:nvSpPr>
+          <p:cNvPr id="129" name="Google Shape;129;p30:notes"/>
+          <p:cNvSpPr>
+            <a:spLocks noGrp="1" noRot="1" noChangeAspect="1"/>
+          </p:cNvSpPr>
+          <p:nvPr>
+            <p:ph type="sldImg" idx="2"/>
+          </p:nvPr>
+        </p:nvSpPr>
+        <p:spPr>
+          <a:xfrm>
+            <a:off x="685800" y="1143000"/>
+            <a:ext cx="5486400" cy="3086100"/>
+          </a:xfrm>
+          <a:custGeom>
+            <a:avLst/>
+            <a:gdLst/>
+            <a:ahLst/>
+            <a:cxnLst/>
+            <a:rect l="l" t="t" r="r" b="b"/>
+            <a:pathLst>
+              <a:path w="120000" h="120000" extrusionOk="0">
+                <a:moveTo>
+                  <a:pt x="0" y="0"/>
+                </a:moveTo>
+                <a:lnTo>
+                  <a:pt x="120000" y="0"/>
+                </a:lnTo>
+                <a:lnTo>
+                  <a:pt x="120000" y="120000"/>
+                </a:lnTo>
+                <a:lnTo>
+                  <a:pt x="0" y="120000"/>
+                </a:lnTo>
+                <a:close/>
+              </a:path>
+            </a:pathLst>
+          </a:custGeom>
+        </p:spPr>
+      </p:sp>
+    </p:spTree>
+  </p:cSld>
+  <p:clrMapOvr>
+    <a:masterClrMapping/>
+  </p:clrMapOvr>
+</p:notes>
+</file>
+
+<file path=ppt/notesSlides/notesSlide12.xml><?xml version="1.0" encoding="utf-8"?>
+<p:notes xmlns:a="http://schemas.openxmlformats.org/drawingml/2006/main" xmlns:r="http://schemas.openxmlformats.org/officeDocument/2006/relationships" xmlns:p="http://schemas.openxmlformats.org/presentationml/2006/main" showMasterSp="0" showMasterPhAnim="0">
+  <p:cSld>
+    <p:spTree>
+      <p:nvGrpSpPr>
+        <p:cNvPr id="1" name="Shape 141"/>
+        <p:cNvGrpSpPr/>
+        <p:nvPr/>
+      </p:nvGrpSpPr>
+      <p:grpSpPr>
+        <a:xfrm>
+          <a:off x="0" y="0"/>
+          <a:ext cx="0" cy="0"/>
+          <a:chOff x="0" y="0"/>
+          <a:chExt cx="0" cy="0"/>
+        </a:xfrm>
+      </p:grpSpPr>
+      <p:sp>
+        <p:nvSpPr>
+          <p:cNvPr id="142" name="Google Shape;142;p31:notes"/>
+          <p:cNvSpPr txBox="1">
+            <a:spLocks noGrp="1"/>
+          </p:cNvSpPr>
+          <p:nvPr>
+            <p:ph type="body" idx="1"/>
+          </p:nvPr>
+        </p:nvSpPr>
+        <p:spPr>
+          <a:xfrm>
+            <a:off x="685800" y="4400550"/>
+            <a:ext cx="5486400" cy="3600450"/>
+          </a:xfrm>
+          <a:prstGeom prst="rect">
+            <a:avLst/>
+          </a:prstGeom>
+        </p:spPr>
+        <p:txBody>
+          <a:bodyPr spcFirstLastPara="1" wrap="square" lIns="91425" tIns="45700" rIns="91425" bIns="45700" anchor="t" anchorCtr="0">
+            <a:noAutofit/>
+          </a:bodyPr>
+          <a:lstStyle/>
+          <a:p>
+            <a:pPr marL="0" lvl="0" indent="0" algn="l" rtl="0">
+              <a:spcBef>
+                <a:spcPts val="0"/>
+              </a:spcBef>
+              <a:spcAft>
+                <a:spcPts val="0"/>
+              </a:spcAft>
+              <a:buNone/>
+            </a:pPr>
+            <a:endParaRPr/>
+          </a:p>
+        </p:txBody>
+      </p:sp>
+      <p:sp>
+        <p:nvSpPr>
+          <p:cNvPr id="143" name="Google Shape;143;p31:notes"/>
+          <p:cNvSpPr>
+            <a:spLocks noGrp="1" noRot="1" noChangeAspect="1"/>
+          </p:cNvSpPr>
+          <p:nvPr>
+            <p:ph type="sldImg" idx="2"/>
+          </p:nvPr>
+        </p:nvSpPr>
+        <p:spPr>
+          <a:xfrm>
+            <a:off x="685800" y="1143000"/>
+            <a:ext cx="5486400" cy="3086100"/>
+          </a:xfrm>
+          <a:custGeom>
+            <a:avLst/>
+            <a:gdLst/>
+            <a:ahLst/>
+            <a:cxnLst/>
+            <a:rect l="l" t="t" r="r" b="b"/>
+            <a:pathLst>
+              <a:path w="120000" h="120000" extrusionOk="0">
+                <a:moveTo>
+                  <a:pt x="0" y="0"/>
+                </a:moveTo>
+                <a:lnTo>
+                  <a:pt x="120000" y="0"/>
+                </a:lnTo>
+                <a:lnTo>
+                  <a:pt x="120000" y="120000"/>
+                </a:lnTo>
+                <a:lnTo>
+                  <a:pt x="0" y="120000"/>
+                </a:lnTo>
+                <a:close/>
+              </a:path>
+            </a:pathLst>
+          </a:custGeom>
+        </p:spPr>
+      </p:sp>
+    </p:spTree>
+  </p:cSld>
+  <p:clrMapOvr>
+    <a:masterClrMapping/>
+  </p:clrMapOvr>
+</p:notes>
+</file>
+
+<file path=ppt/notesSlides/notesSlide13.xml><?xml version="1.0" encoding="utf-8"?>
+<p:notes xmlns:a="http://schemas.openxmlformats.org/drawingml/2006/main" xmlns:r="http://schemas.openxmlformats.org/officeDocument/2006/relationships" xmlns:p="http://schemas.openxmlformats.org/presentationml/2006/main" showMasterSp="0" showMasterPhAnim="0">
+  <p:cSld>
+    <p:spTree>
+      <p:nvGrpSpPr>
         <p:cNvPr id="1" name="Shape 158"/>
         <p:cNvGrpSpPr/>
         <p:nvPr/>
@@ -1949,7 +2282,7 @@
 </p:notes>
 </file>
 
-<file path=ppt/notesSlides/notesSlide11.xml><?xml version="1.0" encoding="utf-8"?>
+<file path=ppt/notesSlides/notesSlide14.xml><?xml version="1.0" encoding="utf-8"?>
 <p:notes xmlns:a="http://schemas.openxmlformats.org/drawingml/2006/main" xmlns:r="http://schemas.openxmlformats.org/officeDocument/2006/relationships" xmlns:p="http://schemas.openxmlformats.org/presentationml/2006/main" showMasterSp="0" showMasterPhAnim="0">
   <p:cSld>
     <p:spTree>
@@ -2053,7 +2386,7 @@
 </p:notes>
 </file>
 
-<file path=ppt/notesSlides/notesSlide12.xml><?xml version="1.0" encoding="utf-8"?>
+<file path=ppt/notesSlides/notesSlide15.xml><?xml version="1.0" encoding="utf-8"?>
 <p:notes xmlns:a="http://schemas.openxmlformats.org/drawingml/2006/main" xmlns:r="http://schemas.openxmlformats.org/officeDocument/2006/relationships" xmlns:p="http://schemas.openxmlformats.org/presentationml/2006/main" showMasterSp="0" showMasterPhAnim="0">
   <p:cSld>
     <p:spTree>
@@ -2157,7 +2490,7 @@
 </p:notes>
 </file>
 
-<file path=ppt/notesSlides/notesSlide13.xml><?xml version="1.0" encoding="utf-8"?>
+<file path=ppt/notesSlides/notesSlide16.xml><?xml version="1.0" encoding="utf-8"?>
 <p:notes xmlns:a="http://schemas.openxmlformats.org/drawingml/2006/main" xmlns:r="http://schemas.openxmlformats.org/officeDocument/2006/relationships" xmlns:p="http://schemas.openxmlformats.org/presentationml/2006/main" showMasterSp="0" showMasterPhAnim="0">
   <p:cSld>
     <p:spTree>
@@ -2279,7 +2612,7 @@
 </p:notes>
 </file>
 
-<file path=ppt/notesSlides/notesSlide14.xml><?xml version="1.0" encoding="utf-8"?>
+<file path=ppt/notesSlides/notesSlide17.xml><?xml version="1.0" encoding="utf-8"?>
 <p:notes xmlns:a="http://schemas.openxmlformats.org/drawingml/2006/main" xmlns:r="http://schemas.openxmlformats.org/officeDocument/2006/relationships" xmlns:p="http://schemas.openxmlformats.org/presentationml/2006/main" showMasterSp="0" showMasterPhAnim="0">
   <p:cSld>
     <p:spTree>
@@ -2383,7 +2716,7 @@
 </p:notes>
 </file>
 
-<file path=ppt/notesSlides/notesSlide15.xml><?xml version="1.0" encoding="utf-8"?>
+<file path=ppt/notesSlides/notesSlide18.xml><?xml version="1.0" encoding="utf-8"?>
 <p:notes xmlns:a="http://schemas.openxmlformats.org/drawingml/2006/main" xmlns:r="http://schemas.openxmlformats.org/officeDocument/2006/relationships" xmlns:p="http://schemas.openxmlformats.org/presentationml/2006/main" showMasterSp="0" showMasterPhAnim="0">
   <p:cSld>
     <p:spTree>
@@ -2487,7 +2820,7 @@
 </p:notes>
 </file>
 
-<file path=ppt/notesSlides/notesSlide16.xml><?xml version="1.0" encoding="utf-8"?>
+<file path=ppt/notesSlides/notesSlide19.xml><?xml version="1.0" encoding="utf-8"?>
 <p:notes xmlns:a="http://schemas.openxmlformats.org/drawingml/2006/main" xmlns:r="http://schemas.openxmlformats.org/officeDocument/2006/relationships" xmlns:p="http://schemas.openxmlformats.org/presentationml/2006/main" showMasterSp="0" showMasterPhAnim="0">
   <p:cSld>
     <p:spTree>
@@ -2545,341 +2878,6 @@
       <p:sp>
         <p:nvSpPr>
           <p:cNvPr id="248" name="Google Shape;248;p36:notes"/>
-          <p:cNvSpPr>
-            <a:spLocks noGrp="1" noRot="1" noChangeAspect="1"/>
-          </p:cNvSpPr>
-          <p:nvPr>
-            <p:ph type="sldImg" idx="2"/>
-          </p:nvPr>
-        </p:nvSpPr>
-        <p:spPr>
-          <a:xfrm>
-            <a:off x="685800" y="1143000"/>
-            <a:ext cx="5486400" cy="3086100"/>
-          </a:xfrm>
-          <a:custGeom>
-            <a:avLst/>
-            <a:gdLst/>
-            <a:ahLst/>
-            <a:cxnLst/>
-            <a:rect l="l" t="t" r="r" b="b"/>
-            <a:pathLst>
-              <a:path w="120000" h="120000" extrusionOk="0">
-                <a:moveTo>
-                  <a:pt x="0" y="0"/>
-                </a:moveTo>
-                <a:lnTo>
-                  <a:pt x="120000" y="0"/>
-                </a:lnTo>
-                <a:lnTo>
-                  <a:pt x="120000" y="120000"/>
-                </a:lnTo>
-                <a:lnTo>
-                  <a:pt x="0" y="120000"/>
-                </a:lnTo>
-                <a:close/>
-              </a:path>
-            </a:pathLst>
-          </a:custGeom>
-        </p:spPr>
-      </p:sp>
-    </p:spTree>
-  </p:cSld>
-  <p:clrMapOvr>
-    <a:masterClrMapping/>
-  </p:clrMapOvr>
-</p:notes>
-</file>
-
-<file path=ppt/notesSlides/notesSlide17.xml><?xml version="1.0" encoding="utf-8"?>
-<p:notes xmlns:a="http://schemas.openxmlformats.org/drawingml/2006/main" xmlns:r="http://schemas.openxmlformats.org/officeDocument/2006/relationships" xmlns:p="http://schemas.openxmlformats.org/presentationml/2006/main" showMasterSp="0" showMasterPhAnim="0">
-  <p:cSld>
-    <p:spTree>
-      <p:nvGrpSpPr>
-        <p:cNvPr id="1" name="Shape 260"/>
-        <p:cNvGrpSpPr/>
-        <p:nvPr/>
-      </p:nvGrpSpPr>
-      <p:grpSpPr>
-        <a:xfrm>
-          <a:off x="0" y="0"/>
-          <a:ext cx="0" cy="0"/>
-          <a:chOff x="0" y="0"/>
-          <a:chExt cx="0" cy="0"/>
-        </a:xfrm>
-      </p:grpSpPr>
-      <p:sp>
-        <p:nvSpPr>
-          <p:cNvPr id="261" name="Google Shape;261;p37:notes"/>
-          <p:cNvSpPr txBox="1">
-            <a:spLocks noGrp="1"/>
-          </p:cNvSpPr>
-          <p:nvPr>
-            <p:ph type="body" idx="1"/>
-          </p:nvPr>
-        </p:nvSpPr>
-        <p:spPr>
-          <a:xfrm>
-            <a:off x="685800" y="4400550"/>
-            <a:ext cx="5486400" cy="3600450"/>
-          </a:xfrm>
-          <a:prstGeom prst="rect">
-            <a:avLst/>
-          </a:prstGeom>
-        </p:spPr>
-        <p:txBody>
-          <a:bodyPr spcFirstLastPara="1" wrap="square" lIns="91425" tIns="45700" rIns="91425" bIns="45700" anchor="t" anchorCtr="0">
-            <a:noAutofit/>
-          </a:bodyPr>
-          <a:lstStyle/>
-          <a:p>
-            <a:pPr marL="0" lvl="0" indent="0" algn="l" rtl="0">
-              <a:spcBef>
-                <a:spcPts val="0"/>
-              </a:spcBef>
-              <a:spcAft>
-                <a:spcPts val="0"/>
-              </a:spcAft>
-              <a:buNone/>
-            </a:pPr>
-            <a:endParaRPr/>
-          </a:p>
-        </p:txBody>
-      </p:sp>
-      <p:sp>
-        <p:nvSpPr>
-          <p:cNvPr id="262" name="Google Shape;262;p37:notes"/>
-          <p:cNvSpPr>
-            <a:spLocks noGrp="1" noRot="1" noChangeAspect="1"/>
-          </p:cNvSpPr>
-          <p:nvPr>
-            <p:ph type="sldImg" idx="2"/>
-          </p:nvPr>
-        </p:nvSpPr>
-        <p:spPr>
-          <a:xfrm>
-            <a:off x="685800" y="1143000"/>
-            <a:ext cx="5486400" cy="3086100"/>
-          </a:xfrm>
-          <a:custGeom>
-            <a:avLst/>
-            <a:gdLst/>
-            <a:ahLst/>
-            <a:cxnLst/>
-            <a:rect l="l" t="t" r="r" b="b"/>
-            <a:pathLst>
-              <a:path w="120000" h="120000" extrusionOk="0">
-                <a:moveTo>
-                  <a:pt x="0" y="0"/>
-                </a:moveTo>
-                <a:lnTo>
-                  <a:pt x="120000" y="0"/>
-                </a:lnTo>
-                <a:lnTo>
-                  <a:pt x="120000" y="120000"/>
-                </a:lnTo>
-                <a:lnTo>
-                  <a:pt x="0" y="120000"/>
-                </a:lnTo>
-                <a:close/>
-              </a:path>
-            </a:pathLst>
-          </a:custGeom>
-        </p:spPr>
-      </p:sp>
-    </p:spTree>
-  </p:cSld>
-  <p:clrMapOvr>
-    <a:masterClrMapping/>
-  </p:clrMapOvr>
-</p:notes>
-</file>
-
-<file path=ppt/notesSlides/notesSlide18.xml><?xml version="1.0" encoding="utf-8"?>
-<p:notes xmlns:a="http://schemas.openxmlformats.org/drawingml/2006/main" xmlns:r="http://schemas.openxmlformats.org/officeDocument/2006/relationships" xmlns:p="http://schemas.openxmlformats.org/presentationml/2006/main" showMasterSp="0" showMasterPhAnim="0">
-  <p:cSld>
-    <p:spTree>
-      <p:nvGrpSpPr>
-        <p:cNvPr id="1" name="Shape 260">
-          <a:extLst>
-            <a:ext uri="{FF2B5EF4-FFF2-40B4-BE49-F238E27FC236}">
-              <a16:creationId xmlns:a16="http://schemas.microsoft.com/office/drawing/2014/main" id="{ED6D95D0-49C4-BE65-6DB0-A8408AD9A1A2}"/>
-            </a:ext>
-          </a:extLst>
-        </p:cNvPr>
-        <p:cNvGrpSpPr/>
-        <p:nvPr/>
-      </p:nvGrpSpPr>
-      <p:grpSpPr>
-        <a:xfrm>
-          <a:off x="0" y="0"/>
-          <a:ext cx="0" cy="0"/>
-          <a:chOff x="0" y="0"/>
-          <a:chExt cx="0" cy="0"/>
-        </a:xfrm>
-      </p:grpSpPr>
-      <p:sp>
-        <p:nvSpPr>
-          <p:cNvPr id="261" name="Google Shape;261;p37:notes">
-            <a:extLst>
-              <a:ext uri="{FF2B5EF4-FFF2-40B4-BE49-F238E27FC236}">
-                <a16:creationId xmlns:a16="http://schemas.microsoft.com/office/drawing/2014/main" id="{D5BF9D20-A937-E031-5ACD-4B566F245A56}"/>
-              </a:ext>
-            </a:extLst>
-          </p:cNvPr>
-          <p:cNvSpPr txBox="1">
-            <a:spLocks noGrp="1"/>
-          </p:cNvSpPr>
-          <p:nvPr>
-            <p:ph type="body" idx="1"/>
-          </p:nvPr>
-        </p:nvSpPr>
-        <p:spPr>
-          <a:xfrm>
-            <a:off x="685800" y="4400550"/>
-            <a:ext cx="5486400" cy="3600450"/>
-          </a:xfrm>
-          <a:prstGeom prst="rect">
-            <a:avLst/>
-          </a:prstGeom>
-        </p:spPr>
-        <p:txBody>
-          <a:bodyPr spcFirstLastPara="1" wrap="square" lIns="91425" tIns="45700" rIns="91425" bIns="45700" anchor="t" anchorCtr="0">
-            <a:noAutofit/>
-          </a:bodyPr>
-          <a:lstStyle/>
-          <a:p>
-            <a:pPr marL="0" lvl="0" indent="0" algn="l" rtl="0">
-              <a:spcBef>
-                <a:spcPts val="0"/>
-              </a:spcBef>
-              <a:spcAft>
-                <a:spcPts val="0"/>
-              </a:spcAft>
-              <a:buNone/>
-            </a:pPr>
-            <a:endParaRPr/>
-          </a:p>
-        </p:txBody>
-      </p:sp>
-      <p:sp>
-        <p:nvSpPr>
-          <p:cNvPr id="262" name="Google Shape;262;p37:notes">
-            <a:extLst>
-              <a:ext uri="{FF2B5EF4-FFF2-40B4-BE49-F238E27FC236}">
-                <a16:creationId xmlns:a16="http://schemas.microsoft.com/office/drawing/2014/main" id="{1666A96F-D523-1F0C-00D5-14D5F35E2C2F}"/>
-              </a:ext>
-            </a:extLst>
-          </p:cNvPr>
-          <p:cNvSpPr>
-            <a:spLocks noGrp="1" noRot="1" noChangeAspect="1"/>
-          </p:cNvSpPr>
-          <p:nvPr>
-            <p:ph type="sldImg" idx="2"/>
-          </p:nvPr>
-        </p:nvSpPr>
-        <p:spPr>
-          <a:xfrm>
-            <a:off x="685800" y="1143000"/>
-            <a:ext cx="5486400" cy="3086100"/>
-          </a:xfrm>
-          <a:custGeom>
-            <a:avLst/>
-            <a:gdLst/>
-            <a:ahLst/>
-            <a:cxnLst/>
-            <a:rect l="l" t="t" r="r" b="b"/>
-            <a:pathLst>
-              <a:path w="120000" h="120000" extrusionOk="0">
-                <a:moveTo>
-                  <a:pt x="0" y="0"/>
-                </a:moveTo>
-                <a:lnTo>
-                  <a:pt x="120000" y="0"/>
-                </a:lnTo>
-                <a:lnTo>
-                  <a:pt x="120000" y="120000"/>
-                </a:lnTo>
-                <a:lnTo>
-                  <a:pt x="0" y="120000"/>
-                </a:lnTo>
-                <a:close/>
-              </a:path>
-            </a:pathLst>
-          </a:custGeom>
-        </p:spPr>
-      </p:sp>
-    </p:spTree>
-    <p:extLst>
-      <p:ext uri="{BB962C8B-B14F-4D97-AF65-F5344CB8AC3E}">
-        <p14:creationId xmlns:p14="http://schemas.microsoft.com/office/powerpoint/2010/main" val="3888823651"/>
-      </p:ext>
-    </p:extLst>
-  </p:cSld>
-  <p:clrMapOvr>
-    <a:masterClrMapping/>
-  </p:clrMapOvr>
-</p:notes>
-</file>
-
-<file path=ppt/notesSlides/notesSlide19.xml><?xml version="1.0" encoding="utf-8"?>
-<p:notes xmlns:a="http://schemas.openxmlformats.org/drawingml/2006/main" xmlns:r="http://schemas.openxmlformats.org/officeDocument/2006/relationships" xmlns:p="http://schemas.openxmlformats.org/presentationml/2006/main" showMasterSp="0" showMasterPhAnim="0">
-  <p:cSld>
-    <p:spTree>
-      <p:nvGrpSpPr>
-        <p:cNvPr id="1" name="Shape 271"/>
-        <p:cNvGrpSpPr/>
-        <p:nvPr/>
-      </p:nvGrpSpPr>
-      <p:grpSpPr>
-        <a:xfrm>
-          <a:off x="0" y="0"/>
-          <a:ext cx="0" cy="0"/>
-          <a:chOff x="0" y="0"/>
-          <a:chExt cx="0" cy="0"/>
-        </a:xfrm>
-      </p:grpSpPr>
-      <p:sp>
-        <p:nvSpPr>
-          <p:cNvPr id="272" name="Google Shape;272;p38:notes"/>
-          <p:cNvSpPr txBox="1">
-            <a:spLocks noGrp="1"/>
-          </p:cNvSpPr>
-          <p:nvPr>
-            <p:ph type="body" idx="1"/>
-          </p:nvPr>
-        </p:nvSpPr>
-        <p:spPr>
-          <a:xfrm>
-            <a:off x="685800" y="4400550"/>
-            <a:ext cx="5486400" cy="3600450"/>
-          </a:xfrm>
-          <a:prstGeom prst="rect">
-            <a:avLst/>
-          </a:prstGeom>
-        </p:spPr>
-        <p:txBody>
-          <a:bodyPr spcFirstLastPara="1" wrap="square" lIns="91425" tIns="45700" rIns="91425" bIns="45700" anchor="t" anchorCtr="0">
-            <a:noAutofit/>
-          </a:bodyPr>
-          <a:lstStyle/>
-          <a:p>
-            <a:pPr marL="0" lvl="0" indent="0" algn="l" rtl="0">
-              <a:spcBef>
-                <a:spcPts val="0"/>
-              </a:spcBef>
-              <a:spcAft>
-                <a:spcPts val="0"/>
-              </a:spcAft>
-              <a:buNone/>
-            </a:pPr>
-            <a:endParaRPr/>
-          </a:p>
-        </p:txBody>
-      </p:sp>
-      <p:sp>
-        <p:nvSpPr>
-          <p:cNvPr id="273" name="Google Shape;273;p38:notes"/>
           <p:cNvSpPr>
             <a:spLocks noGrp="1" noRot="1" noChangeAspect="1"/>
           </p:cNvSpPr>
@@ -3064,6 +3062,341 @@
         <p14:creationId xmlns:p14="http://schemas.microsoft.com/office/powerpoint/2010/main" val="3499943449"/>
       </p:ext>
     </p:extLst>
+  </p:cSld>
+  <p:clrMapOvr>
+    <a:masterClrMapping/>
+  </p:clrMapOvr>
+</p:notes>
+</file>
+
+<file path=ppt/notesSlides/notesSlide20.xml><?xml version="1.0" encoding="utf-8"?>
+<p:notes xmlns:a="http://schemas.openxmlformats.org/drawingml/2006/main" xmlns:r="http://schemas.openxmlformats.org/officeDocument/2006/relationships" xmlns:p="http://schemas.openxmlformats.org/presentationml/2006/main" showMasterSp="0" showMasterPhAnim="0">
+  <p:cSld>
+    <p:spTree>
+      <p:nvGrpSpPr>
+        <p:cNvPr id="1" name="Shape 260"/>
+        <p:cNvGrpSpPr/>
+        <p:nvPr/>
+      </p:nvGrpSpPr>
+      <p:grpSpPr>
+        <a:xfrm>
+          <a:off x="0" y="0"/>
+          <a:ext cx="0" cy="0"/>
+          <a:chOff x="0" y="0"/>
+          <a:chExt cx="0" cy="0"/>
+        </a:xfrm>
+      </p:grpSpPr>
+      <p:sp>
+        <p:nvSpPr>
+          <p:cNvPr id="261" name="Google Shape;261;p37:notes"/>
+          <p:cNvSpPr txBox="1">
+            <a:spLocks noGrp="1"/>
+          </p:cNvSpPr>
+          <p:nvPr>
+            <p:ph type="body" idx="1"/>
+          </p:nvPr>
+        </p:nvSpPr>
+        <p:spPr>
+          <a:xfrm>
+            <a:off x="685800" y="4400550"/>
+            <a:ext cx="5486400" cy="3600450"/>
+          </a:xfrm>
+          <a:prstGeom prst="rect">
+            <a:avLst/>
+          </a:prstGeom>
+        </p:spPr>
+        <p:txBody>
+          <a:bodyPr spcFirstLastPara="1" wrap="square" lIns="91425" tIns="45700" rIns="91425" bIns="45700" anchor="t" anchorCtr="0">
+            <a:noAutofit/>
+          </a:bodyPr>
+          <a:lstStyle/>
+          <a:p>
+            <a:pPr marL="0" lvl="0" indent="0" algn="l" rtl="0">
+              <a:spcBef>
+                <a:spcPts val="0"/>
+              </a:spcBef>
+              <a:spcAft>
+                <a:spcPts val="0"/>
+              </a:spcAft>
+              <a:buNone/>
+            </a:pPr>
+            <a:endParaRPr/>
+          </a:p>
+        </p:txBody>
+      </p:sp>
+      <p:sp>
+        <p:nvSpPr>
+          <p:cNvPr id="262" name="Google Shape;262;p37:notes"/>
+          <p:cNvSpPr>
+            <a:spLocks noGrp="1" noRot="1" noChangeAspect="1"/>
+          </p:cNvSpPr>
+          <p:nvPr>
+            <p:ph type="sldImg" idx="2"/>
+          </p:nvPr>
+        </p:nvSpPr>
+        <p:spPr>
+          <a:xfrm>
+            <a:off x="685800" y="1143000"/>
+            <a:ext cx="5486400" cy="3086100"/>
+          </a:xfrm>
+          <a:custGeom>
+            <a:avLst/>
+            <a:gdLst/>
+            <a:ahLst/>
+            <a:cxnLst/>
+            <a:rect l="l" t="t" r="r" b="b"/>
+            <a:pathLst>
+              <a:path w="120000" h="120000" extrusionOk="0">
+                <a:moveTo>
+                  <a:pt x="0" y="0"/>
+                </a:moveTo>
+                <a:lnTo>
+                  <a:pt x="120000" y="0"/>
+                </a:lnTo>
+                <a:lnTo>
+                  <a:pt x="120000" y="120000"/>
+                </a:lnTo>
+                <a:lnTo>
+                  <a:pt x="0" y="120000"/>
+                </a:lnTo>
+                <a:close/>
+              </a:path>
+            </a:pathLst>
+          </a:custGeom>
+        </p:spPr>
+      </p:sp>
+    </p:spTree>
+  </p:cSld>
+  <p:clrMapOvr>
+    <a:masterClrMapping/>
+  </p:clrMapOvr>
+</p:notes>
+</file>
+
+<file path=ppt/notesSlides/notesSlide21.xml><?xml version="1.0" encoding="utf-8"?>
+<p:notes xmlns:a="http://schemas.openxmlformats.org/drawingml/2006/main" xmlns:r="http://schemas.openxmlformats.org/officeDocument/2006/relationships" xmlns:p="http://schemas.openxmlformats.org/presentationml/2006/main" showMasterSp="0" showMasterPhAnim="0">
+  <p:cSld>
+    <p:spTree>
+      <p:nvGrpSpPr>
+        <p:cNvPr id="1" name="Shape 260">
+          <a:extLst>
+            <a:ext uri="{FF2B5EF4-FFF2-40B4-BE49-F238E27FC236}">
+              <a16:creationId xmlns:a16="http://schemas.microsoft.com/office/drawing/2014/main" id="{ED6D95D0-49C4-BE65-6DB0-A8408AD9A1A2}"/>
+            </a:ext>
+          </a:extLst>
+        </p:cNvPr>
+        <p:cNvGrpSpPr/>
+        <p:nvPr/>
+      </p:nvGrpSpPr>
+      <p:grpSpPr>
+        <a:xfrm>
+          <a:off x="0" y="0"/>
+          <a:ext cx="0" cy="0"/>
+          <a:chOff x="0" y="0"/>
+          <a:chExt cx="0" cy="0"/>
+        </a:xfrm>
+      </p:grpSpPr>
+      <p:sp>
+        <p:nvSpPr>
+          <p:cNvPr id="261" name="Google Shape;261;p37:notes">
+            <a:extLst>
+              <a:ext uri="{FF2B5EF4-FFF2-40B4-BE49-F238E27FC236}">
+                <a16:creationId xmlns:a16="http://schemas.microsoft.com/office/drawing/2014/main" id="{D5BF9D20-A937-E031-5ACD-4B566F245A56}"/>
+              </a:ext>
+            </a:extLst>
+          </p:cNvPr>
+          <p:cNvSpPr txBox="1">
+            <a:spLocks noGrp="1"/>
+          </p:cNvSpPr>
+          <p:nvPr>
+            <p:ph type="body" idx="1"/>
+          </p:nvPr>
+        </p:nvSpPr>
+        <p:spPr>
+          <a:xfrm>
+            <a:off x="685800" y="4400550"/>
+            <a:ext cx="5486400" cy="3600450"/>
+          </a:xfrm>
+          <a:prstGeom prst="rect">
+            <a:avLst/>
+          </a:prstGeom>
+        </p:spPr>
+        <p:txBody>
+          <a:bodyPr spcFirstLastPara="1" wrap="square" lIns="91425" tIns="45700" rIns="91425" bIns="45700" anchor="t" anchorCtr="0">
+            <a:noAutofit/>
+          </a:bodyPr>
+          <a:lstStyle/>
+          <a:p>
+            <a:pPr marL="0" lvl="0" indent="0" algn="l" rtl="0">
+              <a:spcBef>
+                <a:spcPts val="0"/>
+              </a:spcBef>
+              <a:spcAft>
+                <a:spcPts val="0"/>
+              </a:spcAft>
+              <a:buNone/>
+            </a:pPr>
+            <a:endParaRPr/>
+          </a:p>
+        </p:txBody>
+      </p:sp>
+      <p:sp>
+        <p:nvSpPr>
+          <p:cNvPr id="262" name="Google Shape;262;p37:notes">
+            <a:extLst>
+              <a:ext uri="{FF2B5EF4-FFF2-40B4-BE49-F238E27FC236}">
+                <a16:creationId xmlns:a16="http://schemas.microsoft.com/office/drawing/2014/main" id="{1666A96F-D523-1F0C-00D5-14D5F35E2C2F}"/>
+              </a:ext>
+            </a:extLst>
+          </p:cNvPr>
+          <p:cNvSpPr>
+            <a:spLocks noGrp="1" noRot="1" noChangeAspect="1"/>
+          </p:cNvSpPr>
+          <p:nvPr>
+            <p:ph type="sldImg" idx="2"/>
+          </p:nvPr>
+        </p:nvSpPr>
+        <p:spPr>
+          <a:xfrm>
+            <a:off x="685800" y="1143000"/>
+            <a:ext cx="5486400" cy="3086100"/>
+          </a:xfrm>
+          <a:custGeom>
+            <a:avLst/>
+            <a:gdLst/>
+            <a:ahLst/>
+            <a:cxnLst/>
+            <a:rect l="l" t="t" r="r" b="b"/>
+            <a:pathLst>
+              <a:path w="120000" h="120000" extrusionOk="0">
+                <a:moveTo>
+                  <a:pt x="0" y="0"/>
+                </a:moveTo>
+                <a:lnTo>
+                  <a:pt x="120000" y="0"/>
+                </a:lnTo>
+                <a:lnTo>
+                  <a:pt x="120000" y="120000"/>
+                </a:lnTo>
+                <a:lnTo>
+                  <a:pt x="0" y="120000"/>
+                </a:lnTo>
+                <a:close/>
+              </a:path>
+            </a:pathLst>
+          </a:custGeom>
+        </p:spPr>
+      </p:sp>
+    </p:spTree>
+    <p:extLst>
+      <p:ext uri="{BB962C8B-B14F-4D97-AF65-F5344CB8AC3E}">
+        <p14:creationId xmlns:p14="http://schemas.microsoft.com/office/powerpoint/2010/main" val="3888823651"/>
+      </p:ext>
+    </p:extLst>
+  </p:cSld>
+  <p:clrMapOvr>
+    <a:masterClrMapping/>
+  </p:clrMapOvr>
+</p:notes>
+</file>
+
+<file path=ppt/notesSlides/notesSlide22.xml><?xml version="1.0" encoding="utf-8"?>
+<p:notes xmlns:a="http://schemas.openxmlformats.org/drawingml/2006/main" xmlns:r="http://schemas.openxmlformats.org/officeDocument/2006/relationships" xmlns:p="http://schemas.openxmlformats.org/presentationml/2006/main" showMasterSp="0" showMasterPhAnim="0">
+  <p:cSld>
+    <p:spTree>
+      <p:nvGrpSpPr>
+        <p:cNvPr id="1" name="Shape 271"/>
+        <p:cNvGrpSpPr/>
+        <p:nvPr/>
+      </p:nvGrpSpPr>
+      <p:grpSpPr>
+        <a:xfrm>
+          <a:off x="0" y="0"/>
+          <a:ext cx="0" cy="0"/>
+          <a:chOff x="0" y="0"/>
+          <a:chExt cx="0" cy="0"/>
+        </a:xfrm>
+      </p:grpSpPr>
+      <p:sp>
+        <p:nvSpPr>
+          <p:cNvPr id="272" name="Google Shape;272;p38:notes"/>
+          <p:cNvSpPr txBox="1">
+            <a:spLocks noGrp="1"/>
+          </p:cNvSpPr>
+          <p:nvPr>
+            <p:ph type="body" idx="1"/>
+          </p:nvPr>
+        </p:nvSpPr>
+        <p:spPr>
+          <a:xfrm>
+            <a:off x="685800" y="4400550"/>
+            <a:ext cx="5486400" cy="3600450"/>
+          </a:xfrm>
+          <a:prstGeom prst="rect">
+            <a:avLst/>
+          </a:prstGeom>
+        </p:spPr>
+        <p:txBody>
+          <a:bodyPr spcFirstLastPara="1" wrap="square" lIns="91425" tIns="45700" rIns="91425" bIns="45700" anchor="t" anchorCtr="0">
+            <a:noAutofit/>
+          </a:bodyPr>
+          <a:lstStyle/>
+          <a:p>
+            <a:pPr marL="0" lvl="0" indent="0" algn="l" rtl="0">
+              <a:spcBef>
+                <a:spcPts val="0"/>
+              </a:spcBef>
+              <a:spcAft>
+                <a:spcPts val="0"/>
+              </a:spcAft>
+              <a:buNone/>
+            </a:pPr>
+            <a:endParaRPr/>
+          </a:p>
+        </p:txBody>
+      </p:sp>
+      <p:sp>
+        <p:nvSpPr>
+          <p:cNvPr id="273" name="Google Shape;273;p38:notes"/>
+          <p:cNvSpPr>
+            <a:spLocks noGrp="1" noRot="1" noChangeAspect="1"/>
+          </p:cNvSpPr>
+          <p:nvPr>
+            <p:ph type="sldImg" idx="2"/>
+          </p:nvPr>
+        </p:nvSpPr>
+        <p:spPr>
+          <a:xfrm>
+            <a:off x="685800" y="1143000"/>
+            <a:ext cx="5486400" cy="3086100"/>
+          </a:xfrm>
+          <a:custGeom>
+            <a:avLst/>
+            <a:gdLst/>
+            <a:ahLst/>
+            <a:cxnLst/>
+            <a:rect l="l" t="t" r="r" b="b"/>
+            <a:pathLst>
+              <a:path w="120000" h="120000" extrusionOk="0">
+                <a:moveTo>
+                  <a:pt x="0" y="0"/>
+                </a:moveTo>
+                <a:lnTo>
+                  <a:pt x="120000" y="0"/>
+                </a:lnTo>
+                <a:lnTo>
+                  <a:pt x="120000" y="120000"/>
+                </a:lnTo>
+                <a:lnTo>
+                  <a:pt x="0" y="120000"/>
+                </a:lnTo>
+                <a:close/>
+              </a:path>
+            </a:pathLst>
+          </a:custGeom>
+        </p:spPr>
+      </p:sp>
+    </p:spTree>
   </p:cSld>
   <p:clrMapOvr>
     <a:masterClrMapping/>
@@ -3574,7 +3907,13 @@
   <p:cSld>
     <p:spTree>
       <p:nvGrpSpPr>
-        <p:cNvPr id="1" name="Shape 114"/>
+        <p:cNvPr id="1" name="Shape 100">
+          <a:extLst>
+            <a:ext uri="{FF2B5EF4-FFF2-40B4-BE49-F238E27FC236}">
+              <a16:creationId xmlns:a16="http://schemas.microsoft.com/office/drawing/2014/main" id="{6CDC9B3F-C73A-95F3-2C1C-D2A642FAB5BE}"/>
+            </a:ext>
+          </a:extLst>
+        </p:cNvPr>
         <p:cNvGrpSpPr/>
         <p:nvPr/>
       </p:nvGrpSpPr>
@@ -3588,7 +3927,140 @@
       </p:grpSpPr>
       <p:sp>
         <p:nvSpPr>
-          <p:cNvPr id="115" name="Google Shape;115;p29:notes"/>
+          <p:cNvPr id="101" name="Google Shape;101;p28:notes">
+            <a:extLst>
+              <a:ext uri="{FF2B5EF4-FFF2-40B4-BE49-F238E27FC236}">
+                <a16:creationId xmlns:a16="http://schemas.microsoft.com/office/drawing/2014/main" id="{1BB095F5-08F9-8747-B1EA-9E39CE7D1B4A}"/>
+              </a:ext>
+            </a:extLst>
+          </p:cNvPr>
+          <p:cNvSpPr txBox="1">
+            <a:spLocks noGrp="1"/>
+          </p:cNvSpPr>
+          <p:nvPr>
+            <p:ph type="body" idx="1"/>
+          </p:nvPr>
+        </p:nvSpPr>
+        <p:spPr>
+          <a:xfrm>
+            <a:off x="685800" y="4400550"/>
+            <a:ext cx="5486400" cy="3600450"/>
+          </a:xfrm>
+          <a:prstGeom prst="rect">
+            <a:avLst/>
+          </a:prstGeom>
+        </p:spPr>
+        <p:txBody>
+          <a:bodyPr spcFirstLastPara="1" wrap="square" lIns="91425" tIns="45700" rIns="91425" bIns="45700" anchor="t" anchorCtr="0">
+            <a:noAutofit/>
+          </a:bodyPr>
+          <a:lstStyle/>
+          <a:p>
+            <a:pPr marL="0" lvl="0" indent="0" algn="l" rtl="0">
+              <a:spcBef>
+                <a:spcPts val="0"/>
+              </a:spcBef>
+              <a:spcAft>
+                <a:spcPts val="0"/>
+              </a:spcAft>
+              <a:buNone/>
+            </a:pPr>
+            <a:endParaRPr/>
+          </a:p>
+        </p:txBody>
+      </p:sp>
+      <p:sp>
+        <p:nvSpPr>
+          <p:cNvPr id="102" name="Google Shape;102;p28:notes">
+            <a:extLst>
+              <a:ext uri="{FF2B5EF4-FFF2-40B4-BE49-F238E27FC236}">
+                <a16:creationId xmlns:a16="http://schemas.microsoft.com/office/drawing/2014/main" id="{EEADEE41-52C5-AA8E-E1F2-505D4239DDD2}"/>
+              </a:ext>
+            </a:extLst>
+          </p:cNvPr>
+          <p:cNvSpPr>
+            <a:spLocks noGrp="1" noRot="1" noChangeAspect="1"/>
+          </p:cNvSpPr>
+          <p:nvPr>
+            <p:ph type="sldImg" idx="2"/>
+          </p:nvPr>
+        </p:nvSpPr>
+        <p:spPr>
+          <a:xfrm>
+            <a:off x="685800" y="1143000"/>
+            <a:ext cx="5486400" cy="3086100"/>
+          </a:xfrm>
+          <a:custGeom>
+            <a:avLst/>
+            <a:gdLst/>
+            <a:ahLst/>
+            <a:cxnLst/>
+            <a:rect l="l" t="t" r="r" b="b"/>
+            <a:pathLst>
+              <a:path w="120000" h="120000" extrusionOk="0">
+                <a:moveTo>
+                  <a:pt x="0" y="0"/>
+                </a:moveTo>
+                <a:lnTo>
+                  <a:pt x="120000" y="0"/>
+                </a:lnTo>
+                <a:lnTo>
+                  <a:pt x="120000" y="120000"/>
+                </a:lnTo>
+                <a:lnTo>
+                  <a:pt x="0" y="120000"/>
+                </a:lnTo>
+                <a:close/>
+              </a:path>
+            </a:pathLst>
+          </a:custGeom>
+        </p:spPr>
+      </p:sp>
+    </p:spTree>
+    <p:extLst>
+      <p:ext uri="{BB962C8B-B14F-4D97-AF65-F5344CB8AC3E}">
+        <p14:creationId xmlns:p14="http://schemas.microsoft.com/office/powerpoint/2010/main" val="3266081579"/>
+      </p:ext>
+    </p:extLst>
+  </p:cSld>
+  <p:clrMapOvr>
+    <a:masterClrMapping/>
+  </p:clrMapOvr>
+</p:notes>
+</file>
+
+<file path=ppt/notesSlides/notesSlide8.xml><?xml version="1.0" encoding="utf-8"?>
+<p:notes xmlns:a="http://schemas.openxmlformats.org/drawingml/2006/main" xmlns:r="http://schemas.openxmlformats.org/officeDocument/2006/relationships" xmlns:p="http://schemas.openxmlformats.org/presentationml/2006/main" showMasterSp="0" showMasterPhAnim="0">
+  <p:cSld>
+    <p:spTree>
+      <p:nvGrpSpPr>
+        <p:cNvPr id="1" name="Shape 114">
+          <a:extLst>
+            <a:ext uri="{FF2B5EF4-FFF2-40B4-BE49-F238E27FC236}">
+              <a16:creationId xmlns:a16="http://schemas.microsoft.com/office/drawing/2014/main" id="{07A83C62-26BF-516E-C0AB-B981CCB01DD8}"/>
+            </a:ext>
+          </a:extLst>
+        </p:cNvPr>
+        <p:cNvGrpSpPr/>
+        <p:nvPr/>
+      </p:nvGrpSpPr>
+      <p:grpSpPr>
+        <a:xfrm>
+          <a:off x="0" y="0"/>
+          <a:ext cx="0" cy="0"/>
+          <a:chOff x="0" y="0"/>
+          <a:chExt cx="0" cy="0"/>
+        </a:xfrm>
+      </p:grpSpPr>
+      <p:sp>
+        <p:nvSpPr>
+          <p:cNvPr id="115" name="Google Shape;115;p29:notes">
+            <a:extLst>
+              <a:ext uri="{FF2B5EF4-FFF2-40B4-BE49-F238E27FC236}">
+                <a16:creationId xmlns:a16="http://schemas.microsoft.com/office/drawing/2014/main" id="{96337985-6CAC-D596-AA03-E910A6073805}"/>
+              </a:ext>
+            </a:extLst>
+          </p:cNvPr>
           <p:cNvSpPr txBox="1">
             <a:spLocks noGrp="1"/>
           </p:cNvSpPr>
@@ -3634,7 +4106,13 @@
       </p:sp>
       <p:sp>
         <p:nvSpPr>
-          <p:cNvPr id="116" name="Google Shape;116;p29:notes"/>
+          <p:cNvPr id="116" name="Google Shape;116;p29:notes">
+            <a:extLst>
+              <a:ext uri="{FF2B5EF4-FFF2-40B4-BE49-F238E27FC236}">
+                <a16:creationId xmlns:a16="http://schemas.microsoft.com/office/drawing/2014/main" id="{78E516BA-C090-7997-A0F7-FE0B8BECF129}"/>
+              </a:ext>
+            </a:extLst>
+          </p:cNvPr>
           <p:cNvSpPr>
             <a:spLocks noGrp="1" noRot="1" noChangeAspect="1"/>
           </p:cNvSpPr>
@@ -3684,6 +4162,11 @@
         </p:spPr>
       </p:sp>
     </p:spTree>
+    <p:extLst>
+      <p:ext uri="{BB962C8B-B14F-4D97-AF65-F5344CB8AC3E}">
+        <p14:creationId xmlns:p14="http://schemas.microsoft.com/office/powerpoint/2010/main" val="479403484"/>
+      </p:ext>
+    </p:extLst>
   </p:cSld>
   <p:clrMapOvr>
     <a:masterClrMapping/>
@@ -3691,12 +4174,18 @@
 </p:notes>
 </file>
 
-<file path=ppt/notesSlides/notesSlide8.xml><?xml version="1.0" encoding="utf-8"?>
+<file path=ppt/notesSlides/notesSlide9.xml><?xml version="1.0" encoding="utf-8"?>
 <p:notes xmlns:a="http://schemas.openxmlformats.org/drawingml/2006/main" xmlns:r="http://schemas.openxmlformats.org/officeDocument/2006/relationships" xmlns:p="http://schemas.openxmlformats.org/presentationml/2006/main" showMasterSp="0" showMasterPhAnim="0">
   <p:cSld>
     <p:spTree>
       <p:nvGrpSpPr>
-        <p:cNvPr id="1" name="Shape 127"/>
+        <p:cNvPr id="1" name="Shape 100">
+          <a:extLst>
+            <a:ext uri="{FF2B5EF4-FFF2-40B4-BE49-F238E27FC236}">
+              <a16:creationId xmlns:a16="http://schemas.microsoft.com/office/drawing/2014/main" id="{5C99B882-DD10-F4F8-7021-B7E39CBCF04E}"/>
+            </a:ext>
+          </a:extLst>
+        </p:cNvPr>
         <p:cNvGrpSpPr/>
         <p:nvPr/>
       </p:nvGrpSpPr>
@@ -3710,7 +4199,13 @@
       </p:grpSpPr>
       <p:sp>
         <p:nvSpPr>
-          <p:cNvPr id="128" name="Google Shape;128;p30:notes"/>
+          <p:cNvPr id="101" name="Google Shape;101;p28:notes">
+            <a:extLst>
+              <a:ext uri="{FF2B5EF4-FFF2-40B4-BE49-F238E27FC236}">
+                <a16:creationId xmlns:a16="http://schemas.microsoft.com/office/drawing/2014/main" id="{747E4E7F-92E3-FB0E-4C51-5C776484FDD8}"/>
+              </a:ext>
+            </a:extLst>
+          </p:cNvPr>
           <p:cNvSpPr txBox="1">
             <a:spLocks noGrp="1"/>
           </p:cNvSpPr>
@@ -3748,7 +4243,13 @@
       </p:sp>
       <p:sp>
         <p:nvSpPr>
-          <p:cNvPr id="129" name="Google Shape;129;p30:notes"/>
+          <p:cNvPr id="102" name="Google Shape;102;p28:notes">
+            <a:extLst>
+              <a:ext uri="{FF2B5EF4-FFF2-40B4-BE49-F238E27FC236}">
+                <a16:creationId xmlns:a16="http://schemas.microsoft.com/office/drawing/2014/main" id="{AA0C6B37-74E6-DF53-C525-EF360D352E45}"/>
+              </a:ext>
+            </a:extLst>
+          </p:cNvPr>
           <p:cNvSpPr>
             <a:spLocks noGrp="1" noRot="1" noChangeAspect="1"/>
           </p:cNvSpPr>
@@ -3788,110 +4289,11 @@
         </p:spPr>
       </p:sp>
     </p:spTree>
-  </p:cSld>
-  <p:clrMapOvr>
-    <a:masterClrMapping/>
-  </p:clrMapOvr>
-</p:notes>
-</file>
-
-<file path=ppt/notesSlides/notesSlide9.xml><?xml version="1.0" encoding="utf-8"?>
-<p:notes xmlns:a="http://schemas.openxmlformats.org/drawingml/2006/main" xmlns:r="http://schemas.openxmlformats.org/officeDocument/2006/relationships" xmlns:p="http://schemas.openxmlformats.org/presentationml/2006/main" showMasterSp="0" showMasterPhAnim="0">
-  <p:cSld>
-    <p:spTree>
-      <p:nvGrpSpPr>
-        <p:cNvPr id="1" name="Shape 141"/>
-        <p:cNvGrpSpPr/>
-        <p:nvPr/>
-      </p:nvGrpSpPr>
-      <p:grpSpPr>
-        <a:xfrm>
-          <a:off x="0" y="0"/>
-          <a:ext cx="0" cy="0"/>
-          <a:chOff x="0" y="0"/>
-          <a:chExt cx="0" cy="0"/>
-        </a:xfrm>
-      </p:grpSpPr>
-      <p:sp>
-        <p:nvSpPr>
-          <p:cNvPr id="142" name="Google Shape;142;p31:notes"/>
-          <p:cNvSpPr txBox="1">
-            <a:spLocks noGrp="1"/>
-          </p:cNvSpPr>
-          <p:nvPr>
-            <p:ph type="body" idx="1"/>
-          </p:nvPr>
-        </p:nvSpPr>
-        <p:spPr>
-          <a:xfrm>
-            <a:off x="685800" y="4400550"/>
-            <a:ext cx="5486400" cy="3600450"/>
-          </a:xfrm>
-          <a:prstGeom prst="rect">
-            <a:avLst/>
-          </a:prstGeom>
-        </p:spPr>
-        <p:txBody>
-          <a:bodyPr spcFirstLastPara="1" wrap="square" lIns="91425" tIns="45700" rIns="91425" bIns="45700" anchor="t" anchorCtr="0">
-            <a:noAutofit/>
-          </a:bodyPr>
-          <a:lstStyle/>
-          <a:p>
-            <a:pPr marL="0" lvl="0" indent="0" algn="l" rtl="0">
-              <a:spcBef>
-                <a:spcPts val="0"/>
-              </a:spcBef>
-              <a:spcAft>
-                <a:spcPts val="0"/>
-              </a:spcAft>
-              <a:buNone/>
-            </a:pPr>
-            <a:endParaRPr/>
-          </a:p>
-        </p:txBody>
-      </p:sp>
-      <p:sp>
-        <p:nvSpPr>
-          <p:cNvPr id="143" name="Google Shape;143;p31:notes"/>
-          <p:cNvSpPr>
-            <a:spLocks noGrp="1" noRot="1" noChangeAspect="1"/>
-          </p:cNvSpPr>
-          <p:nvPr>
-            <p:ph type="sldImg" idx="2"/>
-          </p:nvPr>
-        </p:nvSpPr>
-        <p:spPr>
-          <a:xfrm>
-            <a:off x="685800" y="1143000"/>
-            <a:ext cx="5486400" cy="3086100"/>
-          </a:xfrm>
-          <a:custGeom>
-            <a:avLst/>
-            <a:gdLst/>
-            <a:ahLst/>
-            <a:cxnLst/>
-            <a:rect l="l" t="t" r="r" b="b"/>
-            <a:pathLst>
-              <a:path w="120000" h="120000" extrusionOk="0">
-                <a:moveTo>
-                  <a:pt x="0" y="0"/>
-                </a:moveTo>
-                <a:lnTo>
-                  <a:pt x="120000" y="0"/>
-                </a:lnTo>
-                <a:lnTo>
-                  <a:pt x="120000" y="120000"/>
-                </a:lnTo>
-                <a:lnTo>
-                  <a:pt x="0" y="120000"/>
-                </a:lnTo>
-                <a:close/>
-              </a:path>
-            </a:pathLst>
-          </a:custGeom>
-        </p:spPr>
-      </p:sp>
-    </p:spTree>
+    <p:extLst>
+      <p:ext uri="{BB962C8B-B14F-4D97-AF65-F5344CB8AC3E}">
+        <p14:creationId xmlns:p14="http://schemas.microsoft.com/office/powerpoint/2010/main" val="3975208153"/>
+      </p:ext>
+    </p:extLst>
   </p:cSld>
   <p:clrMapOvr>
     <a:masterClrMapping/>
@@ -16490,6 +16892,1924 @@
   <p:cSld>
     <p:spTree>
       <p:nvGrpSpPr>
+        <p:cNvPr id="1" name="Shape 117"/>
+        <p:cNvGrpSpPr/>
+        <p:nvPr/>
+      </p:nvGrpSpPr>
+      <p:grpSpPr>
+        <a:xfrm>
+          <a:off x="0" y="0"/>
+          <a:ext cx="0" cy="0"/>
+          <a:chOff x="0" y="0"/>
+          <a:chExt cx="0" cy="0"/>
+        </a:xfrm>
+      </p:grpSpPr>
+      <p:sp>
+        <p:nvSpPr>
+          <p:cNvPr id="118" name="Google Shape;118;p29"/>
+          <p:cNvSpPr txBox="1">
+            <a:spLocks noGrp="1"/>
+          </p:cNvSpPr>
+          <p:nvPr>
+            <p:ph type="body" idx="1"/>
+          </p:nvPr>
+        </p:nvSpPr>
+        <p:spPr>
+          <a:xfrm>
+            <a:off x="376809" y="1334279"/>
+            <a:ext cx="11177401" cy="4821102"/>
+          </a:xfrm>
+          <a:prstGeom prst="rect">
+            <a:avLst/>
+          </a:prstGeom>
+          <a:noFill/>
+          <a:ln>
+            <a:noFill/>
+          </a:ln>
+        </p:spPr>
+        <p:txBody>
+          <a:bodyPr spcFirstLastPara="1" wrap="square" lIns="91425" tIns="45700" rIns="91425" bIns="45700" anchor="t" anchorCtr="0">
+            <a:noAutofit/>
+          </a:bodyPr>
+          <a:lstStyle/>
+          <a:p>
+            <a:pPr marL="0" lvl="0" indent="0" algn="l" rtl="0">
+              <a:lnSpc>
+                <a:spcPct val="100000"/>
+              </a:lnSpc>
+              <a:spcBef>
+                <a:spcPts val="0"/>
+              </a:spcBef>
+              <a:spcAft>
+                <a:spcPts val="0"/>
+              </a:spcAft>
+              <a:buSzPts val="3000"/>
+              <a:buNone/>
+            </a:pPr>
+            <a:r>
+              <a:rPr lang="en-US" sz="2600" b="1" dirty="0">
+                <a:solidFill>
+                  <a:srgbClr val="E84B36"/>
+                </a:solidFill>
+                <a:latin typeface="Arial"/>
+                <a:ea typeface="Arial"/>
+                <a:cs typeface="Arial"/>
+                <a:sym typeface="Arial"/>
+              </a:rPr>
+              <a:t>How to implement filters in code, current and past states, keep track of states. Don’t need to keep all the information, just the number of state that the filter needs</a:t>
+            </a:r>
+          </a:p>
+          <a:p>
+            <a:pPr marL="0" lvl="0" indent="0" algn="l" rtl="0">
+              <a:lnSpc>
+                <a:spcPct val="100000"/>
+              </a:lnSpc>
+              <a:spcBef>
+                <a:spcPts val="0"/>
+              </a:spcBef>
+              <a:spcAft>
+                <a:spcPts val="0"/>
+              </a:spcAft>
+              <a:buSzPts val="3000"/>
+              <a:buNone/>
+            </a:pPr>
+            <a:endParaRPr lang="en-US" sz="2600" b="1" dirty="0">
+              <a:solidFill>
+                <a:srgbClr val="E84B36"/>
+              </a:solidFill>
+              <a:latin typeface="Arial"/>
+              <a:ea typeface="Arial"/>
+              <a:cs typeface="Arial"/>
+              <a:sym typeface="Arial"/>
+            </a:endParaRPr>
+          </a:p>
+          <a:p>
+            <a:pPr marL="0" lvl="0" indent="0" algn="l" rtl="0">
+              <a:lnSpc>
+                <a:spcPct val="100000"/>
+              </a:lnSpc>
+              <a:spcBef>
+                <a:spcPts val="0"/>
+              </a:spcBef>
+              <a:spcAft>
+                <a:spcPts val="0"/>
+              </a:spcAft>
+              <a:buSzPts val="3000"/>
+              <a:buNone/>
+            </a:pPr>
+            <a:endParaRPr sz="1800" b="1" dirty="0">
+              <a:solidFill>
+                <a:schemeClr val="dk1"/>
+              </a:solidFill>
+              <a:latin typeface="Arial"/>
+              <a:ea typeface="Arial"/>
+              <a:cs typeface="Arial"/>
+              <a:sym typeface="Arial"/>
+            </a:endParaRPr>
+          </a:p>
+        </p:txBody>
+      </p:sp>
+      <p:sp>
+        <p:nvSpPr>
+          <p:cNvPr id="119" name="Google Shape;119;p29"/>
+          <p:cNvSpPr/>
+          <p:nvPr/>
+        </p:nvSpPr>
+        <p:spPr>
+          <a:xfrm rot="10800000" flipH="1">
+            <a:off x="0" y="0"/>
+            <a:ext cx="12192000" cy="868220"/>
+          </a:xfrm>
+          <a:prstGeom prst="rect">
+            <a:avLst/>
+          </a:prstGeom>
+          <a:solidFill>
+            <a:srgbClr val="13294B"/>
+          </a:solidFill>
+          <a:ln>
+            <a:noFill/>
+          </a:ln>
+        </p:spPr>
+        <p:txBody>
+          <a:bodyPr spcFirstLastPara="1" wrap="square" lIns="91425" tIns="45700" rIns="91425" bIns="45700" anchor="ctr" anchorCtr="0">
+            <a:noAutofit/>
+          </a:bodyPr>
+          <a:lstStyle/>
+          <a:p>
+            <a:pPr marL="0" marR="0" lvl="0" indent="0" algn="ctr" rtl="0">
+              <a:lnSpc>
+                <a:spcPct val="100000"/>
+              </a:lnSpc>
+              <a:spcBef>
+                <a:spcPts val="0"/>
+              </a:spcBef>
+              <a:spcAft>
+                <a:spcPts val="0"/>
+              </a:spcAft>
+              <a:buClr>
+                <a:schemeClr val="lt1"/>
+              </a:buClr>
+              <a:buSzPts val="1800"/>
+              <a:buFont typeface="Calibri"/>
+              <a:buNone/>
+            </a:pPr>
+            <a:endParaRPr sz="1800" b="0" i="0" u="none" strike="noStrike" cap="none">
+              <a:solidFill>
+                <a:srgbClr val="13294B"/>
+              </a:solidFill>
+              <a:latin typeface="Calibri"/>
+              <a:ea typeface="Calibri"/>
+              <a:cs typeface="Calibri"/>
+              <a:sym typeface="Calibri"/>
+            </a:endParaRPr>
+          </a:p>
+        </p:txBody>
+      </p:sp>
+      <p:sp>
+        <p:nvSpPr>
+          <p:cNvPr id="120" name="Google Shape;120;p29"/>
+          <p:cNvSpPr txBox="1"/>
+          <p:nvPr/>
+        </p:nvSpPr>
+        <p:spPr>
+          <a:xfrm>
+            <a:off x="376810" y="204051"/>
+            <a:ext cx="10910026" cy="461624"/>
+          </a:xfrm>
+          <a:prstGeom prst="rect">
+            <a:avLst/>
+          </a:prstGeom>
+          <a:noFill/>
+          <a:ln>
+            <a:noFill/>
+          </a:ln>
+        </p:spPr>
+        <p:txBody>
+          <a:bodyPr spcFirstLastPara="1" wrap="square" lIns="91425" tIns="45700" rIns="91425" bIns="45700" anchor="t" anchorCtr="0">
+            <a:spAutoFit/>
+          </a:bodyPr>
+          <a:lstStyle/>
+          <a:p>
+            <a:pPr marL="0" marR="0" lvl="0" indent="0" algn="l" rtl="0">
+              <a:lnSpc>
+                <a:spcPct val="100000"/>
+              </a:lnSpc>
+              <a:spcBef>
+                <a:spcPts val="0"/>
+              </a:spcBef>
+              <a:spcAft>
+                <a:spcPts val="0"/>
+              </a:spcAft>
+              <a:buClr>
+                <a:srgbClr val="000000"/>
+              </a:buClr>
+              <a:buSzPts val="2400"/>
+              <a:buFont typeface="Arial"/>
+              <a:buNone/>
+            </a:pPr>
+            <a:r>
+              <a:rPr lang="en-US" sz="2400" b="0" i="0" u="none" strike="noStrike" cap="none">
+                <a:solidFill>
+                  <a:schemeClr val="lt1"/>
+                </a:solidFill>
+                <a:latin typeface="Arial"/>
+                <a:ea typeface="Arial"/>
+                <a:cs typeface="Arial"/>
+                <a:sym typeface="Arial"/>
+              </a:rPr>
+              <a:t>Slide Title</a:t>
+            </a:r>
+            <a:endParaRPr sz="2400" b="0" i="0" u="none" strike="noStrike" cap="none">
+              <a:solidFill>
+                <a:schemeClr val="lt1"/>
+              </a:solidFill>
+              <a:latin typeface="Arial"/>
+              <a:ea typeface="Arial"/>
+              <a:cs typeface="Arial"/>
+              <a:sym typeface="Arial"/>
+            </a:endParaRPr>
+          </a:p>
+        </p:txBody>
+      </p:sp>
+      <p:pic>
+        <p:nvPicPr>
+          <p:cNvPr id="121" name="Google Shape;121;p29"/>
+          <p:cNvPicPr preferRelativeResize="0"/>
+          <p:nvPr/>
+        </p:nvPicPr>
+        <p:blipFill rotWithShape="1">
+          <a:blip r:embed="rId3">
+            <a:alphaModFix/>
+          </a:blip>
+          <a:srcRect/>
+          <a:stretch/>
+        </p:blipFill>
+        <p:spPr>
+          <a:xfrm>
+            <a:off x="11557509" y="233819"/>
+            <a:ext cx="271308" cy="389810"/>
+          </a:xfrm>
+          <a:prstGeom prst="rect">
+            <a:avLst/>
+          </a:prstGeom>
+          <a:noFill/>
+          <a:ln>
+            <a:noFill/>
+          </a:ln>
+        </p:spPr>
+      </p:pic>
+      <p:sp>
+        <p:nvSpPr>
+          <p:cNvPr id="122" name="Google Shape;122;p29"/>
+          <p:cNvSpPr txBox="1"/>
+          <p:nvPr/>
+        </p:nvSpPr>
+        <p:spPr>
+          <a:xfrm>
+            <a:off x="9335597" y="6524381"/>
+            <a:ext cx="2473415" cy="230792"/>
+          </a:xfrm>
+          <a:prstGeom prst="rect">
+            <a:avLst/>
+          </a:prstGeom>
+          <a:noFill/>
+          <a:ln>
+            <a:noFill/>
+          </a:ln>
+        </p:spPr>
+        <p:txBody>
+          <a:bodyPr spcFirstLastPara="1" wrap="square" lIns="91425" tIns="45700" rIns="91425" bIns="45700" anchor="t" anchorCtr="0">
+            <a:spAutoFit/>
+          </a:bodyPr>
+          <a:lstStyle/>
+          <a:p>
+            <a:pPr marL="0" marR="0" lvl="0" indent="0" algn="r" rtl="0">
+              <a:lnSpc>
+                <a:spcPct val="100000"/>
+              </a:lnSpc>
+              <a:spcBef>
+                <a:spcPts val="0"/>
+              </a:spcBef>
+              <a:spcAft>
+                <a:spcPts val="0"/>
+              </a:spcAft>
+              <a:buNone/>
+            </a:pPr>
+            <a:r>
+              <a:rPr lang="en-US" sz="900" b="0" i="0" u="none" strike="noStrike" cap="none">
+                <a:solidFill>
+                  <a:srgbClr val="13294B"/>
+                </a:solidFill>
+                <a:latin typeface="Arial"/>
+                <a:ea typeface="Arial"/>
+                <a:cs typeface="Arial"/>
+                <a:sym typeface="Arial"/>
+              </a:rPr>
+              <a:t>GRAINGER ENGINEERING</a:t>
+            </a:r>
+            <a:endParaRPr/>
+          </a:p>
+        </p:txBody>
+      </p:sp>
+      <p:sp>
+        <p:nvSpPr>
+          <p:cNvPr id="123" name="Google Shape;123;p29"/>
+          <p:cNvSpPr txBox="1"/>
+          <p:nvPr/>
+        </p:nvSpPr>
+        <p:spPr>
+          <a:xfrm>
+            <a:off x="376807" y="6524381"/>
+            <a:ext cx="7991337" cy="230792"/>
+          </a:xfrm>
+          <a:prstGeom prst="rect">
+            <a:avLst/>
+          </a:prstGeom>
+          <a:noFill/>
+          <a:ln>
+            <a:noFill/>
+          </a:ln>
+        </p:spPr>
+        <p:txBody>
+          <a:bodyPr spcFirstLastPara="1" wrap="square" lIns="91425" tIns="45700" rIns="91425" bIns="45700" anchor="t" anchorCtr="0">
+            <a:spAutoFit/>
+          </a:bodyPr>
+          <a:lstStyle/>
+          <a:p>
+            <a:pPr marL="0" marR="0" lvl="0" indent="0" algn="l" rtl="0">
+              <a:lnSpc>
+                <a:spcPct val="100000"/>
+              </a:lnSpc>
+              <a:spcBef>
+                <a:spcPts val="0"/>
+              </a:spcBef>
+              <a:spcAft>
+                <a:spcPts val="0"/>
+              </a:spcAft>
+              <a:buNone/>
+            </a:pPr>
+            <a:r>
+              <a:rPr lang="en-US" sz="900" dirty="0">
+                <a:solidFill>
+                  <a:srgbClr val="13294B"/>
+                </a:solidFill>
+              </a:rPr>
+              <a:t>SYSTEMS ENGINEERING </a:t>
+            </a:r>
+            <a:endParaRPr dirty="0"/>
+          </a:p>
+        </p:txBody>
+      </p:sp>
+      <p:grpSp>
+        <p:nvGrpSpPr>
+          <p:cNvPr id="124" name="Google Shape;124;p29"/>
+          <p:cNvGrpSpPr/>
+          <p:nvPr/>
+        </p:nvGrpSpPr>
+        <p:grpSpPr>
+          <a:xfrm>
+            <a:off x="4066674" y="6601537"/>
+            <a:ext cx="5233412" cy="70446"/>
+            <a:chOff x="4033424" y="6601537"/>
+            <a:chExt cx="5233412" cy="70446"/>
+          </a:xfrm>
+        </p:grpSpPr>
+        <p:cxnSp>
+          <p:nvCxnSpPr>
+            <p:cNvPr id="125" name="Google Shape;125;p29"/>
+            <p:cNvCxnSpPr/>
+            <p:nvPr/>
+          </p:nvCxnSpPr>
+          <p:spPr>
+            <a:xfrm rot="10800000">
+              <a:off x="4033424" y="6639606"/>
+              <a:ext cx="5164651" cy="0"/>
+            </a:xfrm>
+            <a:prstGeom prst="straightConnector1">
+              <a:avLst/>
+            </a:prstGeom>
+            <a:noFill/>
+            <a:ln w="9525" cap="flat" cmpd="sng">
+              <a:solidFill>
+                <a:srgbClr val="13294B"/>
+              </a:solidFill>
+              <a:prstDash val="solid"/>
+              <a:round/>
+              <a:headEnd type="none" w="sm" len="sm"/>
+              <a:tailEnd type="none" w="sm" len="sm"/>
+            </a:ln>
+          </p:spPr>
+        </p:cxnSp>
+        <p:sp>
+          <p:nvSpPr>
+            <p:cNvPr id="126" name="Google Shape;126;p29"/>
+            <p:cNvSpPr/>
+            <p:nvPr/>
+          </p:nvSpPr>
+          <p:spPr>
+            <a:xfrm>
+              <a:off x="9196390" y="6601537"/>
+              <a:ext cx="70446" cy="70446"/>
+            </a:xfrm>
+            <a:prstGeom prst="ellipse">
+              <a:avLst/>
+            </a:prstGeom>
+            <a:solidFill>
+              <a:srgbClr val="13294B"/>
+            </a:solidFill>
+            <a:ln>
+              <a:noFill/>
+            </a:ln>
+          </p:spPr>
+          <p:txBody>
+            <a:bodyPr spcFirstLastPara="1" wrap="square" lIns="91425" tIns="45700" rIns="91425" bIns="45700" anchor="ctr" anchorCtr="0">
+              <a:noAutofit/>
+            </a:bodyPr>
+            <a:lstStyle/>
+            <a:p>
+              <a:pPr marL="0" marR="0" lvl="0" indent="0" algn="ctr" rtl="0">
+                <a:lnSpc>
+                  <a:spcPct val="100000"/>
+                </a:lnSpc>
+                <a:spcBef>
+                  <a:spcPts val="0"/>
+                </a:spcBef>
+                <a:spcAft>
+                  <a:spcPts val="0"/>
+                </a:spcAft>
+                <a:buNone/>
+              </a:pPr>
+              <a:endParaRPr sz="1400" b="0" i="0" u="none" strike="noStrike" cap="none">
+                <a:solidFill>
+                  <a:srgbClr val="13294B"/>
+                </a:solidFill>
+                <a:latin typeface="Arial"/>
+                <a:ea typeface="Arial"/>
+                <a:cs typeface="Arial"/>
+                <a:sym typeface="Arial"/>
+              </a:endParaRPr>
+            </a:p>
+          </p:txBody>
+        </p:sp>
+      </p:grpSp>
+    </p:spTree>
+  </p:cSld>
+  <p:clrMapOvr>
+    <a:masterClrMapping/>
+  </p:clrMapOvr>
+</p:sld>
+</file>
+
+<file path=ppt/slides/slide11.xml><?xml version="1.0" encoding="utf-8"?>
+<p:sld xmlns:a="http://schemas.openxmlformats.org/drawingml/2006/main" xmlns:r="http://schemas.openxmlformats.org/officeDocument/2006/relationships" xmlns:p="http://schemas.openxmlformats.org/presentationml/2006/main">
+  <p:cSld>
+    <p:spTree>
+      <p:nvGrpSpPr>
+        <p:cNvPr id="1" name="Shape 130"/>
+        <p:cNvGrpSpPr/>
+        <p:nvPr/>
+      </p:nvGrpSpPr>
+      <p:grpSpPr>
+        <a:xfrm>
+          <a:off x="0" y="0"/>
+          <a:ext cx="0" cy="0"/>
+          <a:chOff x="0" y="0"/>
+          <a:chExt cx="0" cy="0"/>
+        </a:xfrm>
+      </p:grpSpPr>
+      <p:sp>
+        <p:nvSpPr>
+          <p:cNvPr id="131" name="Google Shape;131;p30"/>
+          <p:cNvSpPr/>
+          <p:nvPr/>
+        </p:nvSpPr>
+        <p:spPr>
+          <a:xfrm rot="10800000" flipH="1">
+            <a:off x="0" y="0"/>
+            <a:ext cx="12192000" cy="868220"/>
+          </a:xfrm>
+          <a:prstGeom prst="rect">
+            <a:avLst/>
+          </a:prstGeom>
+          <a:solidFill>
+            <a:srgbClr val="13294B"/>
+          </a:solidFill>
+          <a:ln>
+            <a:noFill/>
+          </a:ln>
+        </p:spPr>
+        <p:txBody>
+          <a:bodyPr spcFirstLastPara="1" wrap="square" lIns="91425" tIns="45700" rIns="91425" bIns="45700" anchor="ctr" anchorCtr="0">
+            <a:noAutofit/>
+          </a:bodyPr>
+          <a:lstStyle/>
+          <a:p>
+            <a:pPr marL="0" marR="0" lvl="0" indent="0" algn="ctr" rtl="0">
+              <a:lnSpc>
+                <a:spcPct val="100000"/>
+              </a:lnSpc>
+              <a:spcBef>
+                <a:spcPts val="0"/>
+              </a:spcBef>
+              <a:spcAft>
+                <a:spcPts val="0"/>
+              </a:spcAft>
+              <a:buClr>
+                <a:schemeClr val="lt1"/>
+              </a:buClr>
+              <a:buSzPts val="1800"/>
+              <a:buFont typeface="Calibri"/>
+              <a:buNone/>
+            </a:pPr>
+            <a:endParaRPr sz="1800" b="0" i="0" u="none" strike="noStrike" cap="none">
+              <a:solidFill>
+                <a:srgbClr val="13294B"/>
+              </a:solidFill>
+              <a:latin typeface="Calibri"/>
+              <a:ea typeface="Calibri"/>
+              <a:cs typeface="Calibri"/>
+              <a:sym typeface="Calibri"/>
+            </a:endParaRPr>
+          </a:p>
+        </p:txBody>
+      </p:sp>
+      <p:sp>
+        <p:nvSpPr>
+          <p:cNvPr id="132" name="Google Shape;132;p30"/>
+          <p:cNvSpPr txBox="1"/>
+          <p:nvPr/>
+        </p:nvSpPr>
+        <p:spPr>
+          <a:xfrm>
+            <a:off x="376810" y="1334279"/>
+            <a:ext cx="5442100" cy="4821102"/>
+          </a:xfrm>
+          <a:prstGeom prst="rect">
+            <a:avLst/>
+          </a:prstGeom>
+          <a:noFill/>
+          <a:ln>
+            <a:noFill/>
+          </a:ln>
+        </p:spPr>
+        <p:txBody>
+          <a:bodyPr spcFirstLastPara="1" wrap="square" lIns="91425" tIns="45700" rIns="91425" bIns="45700" anchor="t" anchorCtr="0">
+            <a:noAutofit/>
+          </a:bodyPr>
+          <a:lstStyle/>
+          <a:p>
+            <a:pPr marL="0" marR="0" lvl="0" indent="0" algn="l" rtl="0">
+              <a:lnSpc>
+                <a:spcPct val="100000"/>
+              </a:lnSpc>
+              <a:spcBef>
+                <a:spcPts val="0"/>
+              </a:spcBef>
+              <a:spcAft>
+                <a:spcPts val="0"/>
+              </a:spcAft>
+              <a:buNone/>
+            </a:pPr>
+            <a:r>
+              <a:rPr lang="en-US" sz="2600" b="1" i="0" u="none" strike="noStrike" cap="none">
+                <a:solidFill>
+                  <a:srgbClr val="E84B36"/>
+                </a:solidFill>
+                <a:latin typeface="Arial"/>
+                <a:ea typeface="Arial"/>
+                <a:cs typeface="Arial"/>
+                <a:sym typeface="Arial"/>
+              </a:rPr>
+              <a:t>Lorem Ipsum Dolor Sit Amet Consectetur Adipiscing</a:t>
+            </a:r>
+            <a:endParaRPr sz="2600" b="1" i="0" u="none" strike="noStrike" cap="none">
+              <a:solidFill>
+                <a:srgbClr val="E84B36"/>
+              </a:solidFill>
+              <a:latin typeface="Arial"/>
+              <a:ea typeface="Arial"/>
+              <a:cs typeface="Arial"/>
+              <a:sym typeface="Arial"/>
+            </a:endParaRPr>
+          </a:p>
+          <a:p>
+            <a:pPr marL="0" marR="0" lvl="0" indent="0" algn="l" rtl="0">
+              <a:lnSpc>
+                <a:spcPct val="100000"/>
+              </a:lnSpc>
+              <a:spcBef>
+                <a:spcPts val="0"/>
+              </a:spcBef>
+              <a:spcAft>
+                <a:spcPts val="0"/>
+              </a:spcAft>
+              <a:buNone/>
+            </a:pPr>
+            <a:endParaRPr sz="1800" b="0" i="0" u="none" strike="noStrike" cap="none">
+              <a:solidFill>
+                <a:schemeClr val="dk1"/>
+              </a:solidFill>
+              <a:latin typeface="Arial"/>
+              <a:ea typeface="Arial"/>
+              <a:cs typeface="Arial"/>
+              <a:sym typeface="Arial"/>
+            </a:endParaRPr>
+          </a:p>
+          <a:p>
+            <a:pPr marL="0" marR="0" lvl="0" indent="0" algn="l" rtl="0">
+              <a:lnSpc>
+                <a:spcPct val="100000"/>
+              </a:lnSpc>
+              <a:spcBef>
+                <a:spcPts val="0"/>
+              </a:spcBef>
+              <a:spcAft>
+                <a:spcPts val="0"/>
+              </a:spcAft>
+              <a:buNone/>
+            </a:pPr>
+            <a:r>
+              <a:rPr lang="en-US" sz="1800" b="0" i="0" u="none" strike="noStrike" cap="none">
+                <a:solidFill>
+                  <a:srgbClr val="000000"/>
+                </a:solidFill>
+                <a:latin typeface="Arial"/>
+                <a:ea typeface="Arial"/>
+                <a:cs typeface="Arial"/>
+                <a:sym typeface="Arial"/>
+              </a:rPr>
+              <a:t>Lorem ipsum dolor sit amet, consectetur adipiscing elit, sed do eiusmod tempor incididunt ut labore et dolore magna aliqua. Ut enim ad minim veniam, quis nostrud exercitation ullamco laboris nisi ut aliquip ex ea commodo consequat. Duis aute irure dolor in reprehenderit in voluptate velit esse cillum dolore eu fugiat nulla pariatur. Excepteur sint occaecat cupidatat non proident, sunt in culpa qui officia deserunt mollit anim id est laborum.</a:t>
+            </a:r>
+            <a:endParaRPr sz="1800" b="1" i="0" u="none" strike="noStrike" cap="none">
+              <a:solidFill>
+                <a:schemeClr val="dk1"/>
+              </a:solidFill>
+              <a:latin typeface="Arial"/>
+              <a:ea typeface="Arial"/>
+              <a:cs typeface="Arial"/>
+              <a:sym typeface="Arial"/>
+            </a:endParaRPr>
+          </a:p>
+        </p:txBody>
+      </p:sp>
+      <p:sp>
+        <p:nvSpPr>
+          <p:cNvPr id="133" name="Google Shape;133;p30"/>
+          <p:cNvSpPr txBox="1"/>
+          <p:nvPr/>
+        </p:nvSpPr>
+        <p:spPr>
+          <a:xfrm>
+            <a:off x="6158774" y="1334279"/>
+            <a:ext cx="5442100" cy="4821102"/>
+          </a:xfrm>
+          <a:prstGeom prst="rect">
+            <a:avLst/>
+          </a:prstGeom>
+          <a:noFill/>
+          <a:ln>
+            <a:noFill/>
+          </a:ln>
+        </p:spPr>
+        <p:txBody>
+          <a:bodyPr spcFirstLastPara="1" wrap="square" lIns="91425" tIns="45700" rIns="91425" bIns="45700" anchor="t" anchorCtr="0">
+            <a:noAutofit/>
+          </a:bodyPr>
+          <a:lstStyle/>
+          <a:p>
+            <a:pPr marL="0" marR="0" lvl="0" indent="0" algn="l" rtl="0">
+              <a:lnSpc>
+                <a:spcPct val="100000"/>
+              </a:lnSpc>
+              <a:spcBef>
+                <a:spcPts val="0"/>
+              </a:spcBef>
+              <a:spcAft>
+                <a:spcPts val="0"/>
+              </a:spcAft>
+              <a:buNone/>
+            </a:pPr>
+            <a:r>
+              <a:rPr lang="en-US" sz="2000" b="1" i="0" u="none" strike="noStrike" cap="none">
+                <a:solidFill>
+                  <a:srgbClr val="15264B"/>
+                </a:solidFill>
+                <a:latin typeface="Arial"/>
+                <a:ea typeface="Arial"/>
+                <a:cs typeface="Arial"/>
+                <a:sym typeface="Arial"/>
+              </a:rPr>
+              <a:t>Lorem Ipsum Dolor Sit Amet Consectetur Adipiscing</a:t>
+            </a:r>
+            <a:endParaRPr sz="2000" b="1" i="0" u="none" strike="noStrike" cap="none">
+              <a:solidFill>
+                <a:srgbClr val="15264B"/>
+              </a:solidFill>
+              <a:latin typeface="Arial"/>
+              <a:ea typeface="Arial"/>
+              <a:cs typeface="Arial"/>
+              <a:sym typeface="Arial"/>
+            </a:endParaRPr>
+          </a:p>
+          <a:p>
+            <a:pPr marL="0" marR="0" lvl="0" indent="0" algn="l" rtl="0">
+              <a:lnSpc>
+                <a:spcPct val="100000"/>
+              </a:lnSpc>
+              <a:spcBef>
+                <a:spcPts val="0"/>
+              </a:spcBef>
+              <a:spcAft>
+                <a:spcPts val="0"/>
+              </a:spcAft>
+              <a:buNone/>
+            </a:pPr>
+            <a:endParaRPr sz="1800" b="0" i="0" u="none" strike="noStrike" cap="none">
+              <a:solidFill>
+                <a:schemeClr val="dk1"/>
+              </a:solidFill>
+              <a:latin typeface="Arial"/>
+              <a:ea typeface="Arial"/>
+              <a:cs typeface="Arial"/>
+              <a:sym typeface="Arial"/>
+            </a:endParaRPr>
+          </a:p>
+          <a:p>
+            <a:pPr marL="0" marR="0" lvl="0" indent="0" algn="l" rtl="0">
+              <a:lnSpc>
+                <a:spcPct val="100000"/>
+              </a:lnSpc>
+              <a:spcBef>
+                <a:spcPts val="0"/>
+              </a:spcBef>
+              <a:spcAft>
+                <a:spcPts val="0"/>
+              </a:spcAft>
+              <a:buNone/>
+            </a:pPr>
+            <a:r>
+              <a:rPr lang="en-US" sz="1800" b="0" i="0" u="none" strike="noStrike" cap="none">
+                <a:solidFill>
+                  <a:srgbClr val="000000"/>
+                </a:solidFill>
+                <a:latin typeface="Arial"/>
+                <a:ea typeface="Arial"/>
+                <a:cs typeface="Arial"/>
+                <a:sym typeface="Arial"/>
+              </a:rPr>
+              <a:t>Lorem ipsum dolor sit amet, consectetur adipiscing elit, sed do eiusmod tempor incididunt ut labore et dolore magna aliqua. Ut enim ad minim veniam, quis nostrud exercitation ullamco laboris nisi ut aliquip ex ea commodo consequat. Duis aute irure dolor in reprehenderit in voluptate velit esse cillum dolore eu fugiat nulla pariatur. Excepteur sint occaecat cupidatat non proident, sunt in culpa qui officia deserunt mollit anim id est laborum.</a:t>
+            </a:r>
+            <a:endParaRPr sz="1800" b="1" i="0" u="none" strike="noStrike" cap="none">
+              <a:solidFill>
+                <a:schemeClr val="dk1"/>
+              </a:solidFill>
+              <a:latin typeface="Arial"/>
+              <a:ea typeface="Arial"/>
+              <a:cs typeface="Arial"/>
+              <a:sym typeface="Arial"/>
+            </a:endParaRPr>
+          </a:p>
+        </p:txBody>
+      </p:sp>
+      <p:sp>
+        <p:nvSpPr>
+          <p:cNvPr id="134" name="Google Shape;134;p30"/>
+          <p:cNvSpPr txBox="1"/>
+          <p:nvPr/>
+        </p:nvSpPr>
+        <p:spPr>
+          <a:xfrm>
+            <a:off x="376810" y="204051"/>
+            <a:ext cx="10910026" cy="461624"/>
+          </a:xfrm>
+          <a:prstGeom prst="rect">
+            <a:avLst/>
+          </a:prstGeom>
+          <a:noFill/>
+          <a:ln>
+            <a:noFill/>
+          </a:ln>
+        </p:spPr>
+        <p:txBody>
+          <a:bodyPr spcFirstLastPara="1" wrap="square" lIns="91425" tIns="45700" rIns="91425" bIns="45700" anchor="t" anchorCtr="0">
+            <a:spAutoFit/>
+          </a:bodyPr>
+          <a:lstStyle/>
+          <a:p>
+            <a:pPr marL="0" marR="0" lvl="0" indent="0" algn="l" rtl="0">
+              <a:lnSpc>
+                <a:spcPct val="100000"/>
+              </a:lnSpc>
+              <a:spcBef>
+                <a:spcPts val="0"/>
+              </a:spcBef>
+              <a:spcAft>
+                <a:spcPts val="0"/>
+              </a:spcAft>
+              <a:buClr>
+                <a:srgbClr val="000000"/>
+              </a:buClr>
+              <a:buSzPts val="2400"/>
+              <a:buFont typeface="Arial"/>
+              <a:buNone/>
+            </a:pPr>
+            <a:r>
+              <a:rPr lang="en-US" sz="2400" b="0" i="0" u="none" strike="noStrike" cap="none">
+                <a:solidFill>
+                  <a:schemeClr val="lt1"/>
+                </a:solidFill>
+                <a:latin typeface="Arial"/>
+                <a:ea typeface="Arial"/>
+                <a:cs typeface="Arial"/>
+                <a:sym typeface="Arial"/>
+              </a:rPr>
+              <a:t>Slide Title</a:t>
+            </a:r>
+            <a:endParaRPr sz="2400" b="0" i="0" u="none" strike="noStrike" cap="none">
+              <a:solidFill>
+                <a:schemeClr val="lt1"/>
+              </a:solidFill>
+              <a:latin typeface="Arial"/>
+              <a:ea typeface="Arial"/>
+              <a:cs typeface="Arial"/>
+              <a:sym typeface="Arial"/>
+            </a:endParaRPr>
+          </a:p>
+        </p:txBody>
+      </p:sp>
+      <p:pic>
+        <p:nvPicPr>
+          <p:cNvPr id="135" name="Google Shape;135;p30"/>
+          <p:cNvPicPr preferRelativeResize="0"/>
+          <p:nvPr/>
+        </p:nvPicPr>
+        <p:blipFill rotWithShape="1">
+          <a:blip r:embed="rId3">
+            <a:alphaModFix/>
+          </a:blip>
+          <a:srcRect/>
+          <a:stretch/>
+        </p:blipFill>
+        <p:spPr>
+          <a:xfrm>
+            <a:off x="11557509" y="233819"/>
+            <a:ext cx="271308" cy="389810"/>
+          </a:xfrm>
+          <a:prstGeom prst="rect">
+            <a:avLst/>
+          </a:prstGeom>
+          <a:noFill/>
+          <a:ln>
+            <a:noFill/>
+          </a:ln>
+        </p:spPr>
+      </p:pic>
+      <p:sp>
+        <p:nvSpPr>
+          <p:cNvPr id="136" name="Google Shape;136;p30"/>
+          <p:cNvSpPr txBox="1"/>
+          <p:nvPr/>
+        </p:nvSpPr>
+        <p:spPr>
+          <a:xfrm>
+            <a:off x="9335597" y="6524381"/>
+            <a:ext cx="2473415" cy="230792"/>
+          </a:xfrm>
+          <a:prstGeom prst="rect">
+            <a:avLst/>
+          </a:prstGeom>
+          <a:noFill/>
+          <a:ln>
+            <a:noFill/>
+          </a:ln>
+        </p:spPr>
+        <p:txBody>
+          <a:bodyPr spcFirstLastPara="1" wrap="square" lIns="91425" tIns="45700" rIns="91425" bIns="45700" anchor="t" anchorCtr="0">
+            <a:spAutoFit/>
+          </a:bodyPr>
+          <a:lstStyle/>
+          <a:p>
+            <a:pPr marL="0" marR="0" lvl="0" indent="0" algn="r" rtl="0">
+              <a:lnSpc>
+                <a:spcPct val="100000"/>
+              </a:lnSpc>
+              <a:spcBef>
+                <a:spcPts val="0"/>
+              </a:spcBef>
+              <a:spcAft>
+                <a:spcPts val="0"/>
+              </a:spcAft>
+              <a:buNone/>
+            </a:pPr>
+            <a:r>
+              <a:rPr lang="en-US" sz="900" b="0" i="0" u="none" strike="noStrike" cap="none">
+                <a:solidFill>
+                  <a:srgbClr val="13294B"/>
+                </a:solidFill>
+                <a:latin typeface="Arial"/>
+                <a:ea typeface="Arial"/>
+                <a:cs typeface="Arial"/>
+                <a:sym typeface="Arial"/>
+              </a:rPr>
+              <a:t>GRAINGER ENGINEERING</a:t>
+            </a:r>
+            <a:endParaRPr/>
+          </a:p>
+        </p:txBody>
+      </p:sp>
+      <p:sp>
+        <p:nvSpPr>
+          <p:cNvPr id="137" name="Google Shape;137;p30"/>
+          <p:cNvSpPr txBox="1"/>
+          <p:nvPr/>
+        </p:nvSpPr>
+        <p:spPr>
+          <a:xfrm>
+            <a:off x="376807" y="6524381"/>
+            <a:ext cx="7991337" cy="230792"/>
+          </a:xfrm>
+          <a:prstGeom prst="rect">
+            <a:avLst/>
+          </a:prstGeom>
+          <a:noFill/>
+          <a:ln>
+            <a:noFill/>
+          </a:ln>
+        </p:spPr>
+        <p:txBody>
+          <a:bodyPr spcFirstLastPara="1" wrap="square" lIns="91425" tIns="45700" rIns="91425" bIns="45700" anchor="t" anchorCtr="0">
+            <a:spAutoFit/>
+          </a:bodyPr>
+          <a:lstStyle/>
+          <a:p>
+            <a:pPr marL="0" marR="0" lvl="0" indent="0" algn="l" rtl="0">
+              <a:lnSpc>
+                <a:spcPct val="100000"/>
+              </a:lnSpc>
+              <a:spcBef>
+                <a:spcPts val="0"/>
+              </a:spcBef>
+              <a:spcAft>
+                <a:spcPts val="0"/>
+              </a:spcAft>
+              <a:buNone/>
+            </a:pPr>
+            <a:r>
+              <a:rPr lang="en-US" sz="900" dirty="0">
+                <a:solidFill>
+                  <a:srgbClr val="13294B"/>
+                </a:solidFill>
+              </a:rPr>
+              <a:t>SYSTEMS ENGINEERING</a:t>
+            </a:r>
+            <a:endParaRPr dirty="0"/>
+          </a:p>
+        </p:txBody>
+      </p:sp>
+      <p:grpSp>
+        <p:nvGrpSpPr>
+          <p:cNvPr id="138" name="Google Shape;138;p30"/>
+          <p:cNvGrpSpPr/>
+          <p:nvPr/>
+        </p:nvGrpSpPr>
+        <p:grpSpPr>
+          <a:xfrm>
+            <a:off x="4066674" y="6601537"/>
+            <a:ext cx="5233412" cy="70446"/>
+            <a:chOff x="4033424" y="6601537"/>
+            <a:chExt cx="5233412" cy="70446"/>
+          </a:xfrm>
+        </p:grpSpPr>
+        <p:cxnSp>
+          <p:nvCxnSpPr>
+            <p:cNvPr id="139" name="Google Shape;139;p30"/>
+            <p:cNvCxnSpPr/>
+            <p:nvPr/>
+          </p:nvCxnSpPr>
+          <p:spPr>
+            <a:xfrm rot="10800000">
+              <a:off x="4033424" y="6639606"/>
+              <a:ext cx="5164651" cy="0"/>
+            </a:xfrm>
+            <a:prstGeom prst="straightConnector1">
+              <a:avLst/>
+            </a:prstGeom>
+            <a:noFill/>
+            <a:ln w="9525" cap="flat" cmpd="sng">
+              <a:solidFill>
+                <a:srgbClr val="13294B"/>
+              </a:solidFill>
+              <a:prstDash val="solid"/>
+              <a:round/>
+              <a:headEnd type="none" w="sm" len="sm"/>
+              <a:tailEnd type="none" w="sm" len="sm"/>
+            </a:ln>
+          </p:spPr>
+        </p:cxnSp>
+        <p:sp>
+          <p:nvSpPr>
+            <p:cNvPr id="140" name="Google Shape;140;p30"/>
+            <p:cNvSpPr/>
+            <p:nvPr/>
+          </p:nvSpPr>
+          <p:spPr>
+            <a:xfrm>
+              <a:off x="9196390" y="6601537"/>
+              <a:ext cx="70446" cy="70446"/>
+            </a:xfrm>
+            <a:prstGeom prst="ellipse">
+              <a:avLst/>
+            </a:prstGeom>
+            <a:solidFill>
+              <a:srgbClr val="13294B"/>
+            </a:solidFill>
+            <a:ln>
+              <a:noFill/>
+            </a:ln>
+          </p:spPr>
+          <p:txBody>
+            <a:bodyPr spcFirstLastPara="1" wrap="square" lIns="91425" tIns="45700" rIns="91425" bIns="45700" anchor="ctr" anchorCtr="0">
+              <a:noAutofit/>
+            </a:bodyPr>
+            <a:lstStyle/>
+            <a:p>
+              <a:pPr marL="0" marR="0" lvl="0" indent="0" algn="ctr" rtl="0">
+                <a:lnSpc>
+                  <a:spcPct val="100000"/>
+                </a:lnSpc>
+                <a:spcBef>
+                  <a:spcPts val="0"/>
+                </a:spcBef>
+                <a:spcAft>
+                  <a:spcPts val="0"/>
+                </a:spcAft>
+                <a:buNone/>
+              </a:pPr>
+              <a:endParaRPr sz="1400" b="0" i="0" u="none" strike="noStrike" cap="none">
+                <a:solidFill>
+                  <a:srgbClr val="13294B"/>
+                </a:solidFill>
+                <a:latin typeface="Arial"/>
+                <a:ea typeface="Arial"/>
+                <a:cs typeface="Arial"/>
+                <a:sym typeface="Arial"/>
+              </a:endParaRPr>
+            </a:p>
+          </p:txBody>
+        </p:sp>
+      </p:grpSp>
+    </p:spTree>
+  </p:cSld>
+  <p:clrMapOvr>
+    <a:masterClrMapping/>
+  </p:clrMapOvr>
+</p:sld>
+</file>
+
+<file path=ppt/slides/slide12.xml><?xml version="1.0" encoding="utf-8"?>
+<p:sld xmlns:a="http://schemas.openxmlformats.org/drawingml/2006/main" xmlns:r="http://schemas.openxmlformats.org/officeDocument/2006/relationships" xmlns:p="http://schemas.openxmlformats.org/presentationml/2006/main">
+  <p:cSld>
+    <p:spTree>
+      <p:nvGrpSpPr>
+        <p:cNvPr id="1" name="Shape 144"/>
+        <p:cNvGrpSpPr/>
+        <p:nvPr/>
+      </p:nvGrpSpPr>
+      <p:grpSpPr>
+        <a:xfrm>
+          <a:off x="0" y="0"/>
+          <a:ext cx="0" cy="0"/>
+          <a:chOff x="0" y="0"/>
+          <a:chExt cx="0" cy="0"/>
+        </a:xfrm>
+      </p:grpSpPr>
+      <p:sp>
+        <p:nvSpPr>
+          <p:cNvPr id="145" name="Google Shape;145;p31"/>
+          <p:cNvSpPr/>
+          <p:nvPr/>
+        </p:nvSpPr>
+        <p:spPr>
+          <a:xfrm>
+            <a:off x="475566" y="1263717"/>
+            <a:ext cx="4356660" cy="2315647"/>
+          </a:xfrm>
+          <a:prstGeom prst="rect">
+            <a:avLst/>
+          </a:prstGeom>
+          <a:solidFill>
+            <a:srgbClr val="D8D8D8"/>
+          </a:solidFill>
+          <a:ln>
+            <a:noFill/>
+          </a:ln>
+        </p:spPr>
+        <p:txBody>
+          <a:bodyPr spcFirstLastPara="1" wrap="square" lIns="91425" tIns="45700" rIns="91425" bIns="45700" anchor="ctr" anchorCtr="0">
+            <a:noAutofit/>
+          </a:bodyPr>
+          <a:lstStyle/>
+          <a:p>
+            <a:pPr marL="0" marR="0" lvl="0" indent="0" algn="ctr" rtl="0">
+              <a:lnSpc>
+                <a:spcPct val="100000"/>
+              </a:lnSpc>
+              <a:spcBef>
+                <a:spcPts val="0"/>
+              </a:spcBef>
+              <a:spcAft>
+                <a:spcPts val="0"/>
+              </a:spcAft>
+              <a:buClr>
+                <a:srgbClr val="000000"/>
+              </a:buClr>
+              <a:buSzPts val="1800"/>
+              <a:buFont typeface="Arial"/>
+              <a:buNone/>
+            </a:pPr>
+            <a:endParaRPr sz="1800" b="0" i="0" u="none" strike="noStrike" cap="none">
+              <a:solidFill>
+                <a:schemeClr val="lt1"/>
+              </a:solidFill>
+              <a:latin typeface="Calibri"/>
+              <a:ea typeface="Calibri"/>
+              <a:cs typeface="Calibri"/>
+              <a:sym typeface="Calibri"/>
+            </a:endParaRPr>
+          </a:p>
+        </p:txBody>
+      </p:sp>
+      <p:sp>
+        <p:nvSpPr>
+          <p:cNvPr id="146" name="Google Shape;146;p31"/>
+          <p:cNvSpPr txBox="1"/>
+          <p:nvPr/>
+        </p:nvSpPr>
+        <p:spPr>
+          <a:xfrm>
+            <a:off x="1494115" y="2239572"/>
+            <a:ext cx="2280491" cy="369332"/>
+          </a:xfrm>
+          <a:prstGeom prst="rect">
+            <a:avLst/>
+          </a:prstGeom>
+          <a:noFill/>
+          <a:ln>
+            <a:noFill/>
+          </a:ln>
+        </p:spPr>
+        <p:txBody>
+          <a:bodyPr spcFirstLastPara="1" wrap="square" lIns="91425" tIns="45700" rIns="91425" bIns="45700" anchor="t" anchorCtr="0">
+            <a:spAutoFit/>
+          </a:bodyPr>
+          <a:lstStyle/>
+          <a:p>
+            <a:pPr marL="0" marR="0" lvl="0" indent="0" algn="ctr" rtl="0">
+              <a:lnSpc>
+                <a:spcPct val="100000"/>
+              </a:lnSpc>
+              <a:spcBef>
+                <a:spcPts val="0"/>
+              </a:spcBef>
+              <a:spcAft>
+                <a:spcPts val="0"/>
+              </a:spcAft>
+              <a:buClr>
+                <a:srgbClr val="000000"/>
+              </a:buClr>
+              <a:buSzPts val="1800"/>
+              <a:buFont typeface="Arial"/>
+              <a:buNone/>
+            </a:pPr>
+            <a:r>
+              <a:rPr lang="en-US" sz="1800" b="0" i="0" u="none" strike="noStrike" cap="none">
+                <a:solidFill>
+                  <a:srgbClr val="A5A5A5"/>
+                </a:solidFill>
+                <a:latin typeface="Arial"/>
+                <a:ea typeface="Arial"/>
+                <a:cs typeface="Arial"/>
+                <a:sym typeface="Arial"/>
+              </a:rPr>
+              <a:t>IMAGE / GRAPHIC</a:t>
+            </a:r>
+            <a:endParaRPr sz="1400" b="0" i="0" u="none" strike="noStrike" cap="none">
+              <a:solidFill>
+                <a:srgbClr val="000000"/>
+              </a:solidFill>
+              <a:latin typeface="Arial"/>
+              <a:ea typeface="Arial"/>
+              <a:cs typeface="Arial"/>
+              <a:sym typeface="Arial"/>
+            </a:endParaRPr>
+          </a:p>
+        </p:txBody>
+      </p:sp>
+      <p:sp>
+        <p:nvSpPr>
+          <p:cNvPr id="147" name="Google Shape;147;p31"/>
+          <p:cNvSpPr/>
+          <p:nvPr/>
+        </p:nvSpPr>
+        <p:spPr>
+          <a:xfrm>
+            <a:off x="475566" y="3774068"/>
+            <a:ext cx="4356660" cy="2315647"/>
+          </a:xfrm>
+          <a:prstGeom prst="rect">
+            <a:avLst/>
+          </a:prstGeom>
+          <a:solidFill>
+            <a:srgbClr val="D8D8D8"/>
+          </a:solidFill>
+          <a:ln>
+            <a:noFill/>
+          </a:ln>
+        </p:spPr>
+        <p:txBody>
+          <a:bodyPr spcFirstLastPara="1" wrap="square" lIns="91425" tIns="45700" rIns="91425" bIns="45700" anchor="ctr" anchorCtr="0">
+            <a:noAutofit/>
+          </a:bodyPr>
+          <a:lstStyle/>
+          <a:p>
+            <a:pPr marL="0" marR="0" lvl="0" indent="0" algn="ctr" rtl="0">
+              <a:lnSpc>
+                <a:spcPct val="100000"/>
+              </a:lnSpc>
+              <a:spcBef>
+                <a:spcPts val="0"/>
+              </a:spcBef>
+              <a:spcAft>
+                <a:spcPts val="0"/>
+              </a:spcAft>
+              <a:buClr>
+                <a:srgbClr val="000000"/>
+              </a:buClr>
+              <a:buSzPts val="1800"/>
+              <a:buFont typeface="Arial"/>
+              <a:buNone/>
+            </a:pPr>
+            <a:endParaRPr sz="1800" b="0" i="0" u="none" strike="noStrike" cap="none">
+              <a:solidFill>
+                <a:schemeClr val="lt1"/>
+              </a:solidFill>
+              <a:latin typeface="Calibri"/>
+              <a:ea typeface="Calibri"/>
+              <a:cs typeface="Calibri"/>
+              <a:sym typeface="Calibri"/>
+            </a:endParaRPr>
+          </a:p>
+        </p:txBody>
+      </p:sp>
+      <p:sp>
+        <p:nvSpPr>
+          <p:cNvPr id="148" name="Google Shape;148;p31"/>
+          <p:cNvSpPr txBox="1"/>
+          <p:nvPr/>
+        </p:nvSpPr>
+        <p:spPr>
+          <a:xfrm>
+            <a:off x="1494115" y="4747225"/>
+            <a:ext cx="2280491" cy="369332"/>
+          </a:xfrm>
+          <a:prstGeom prst="rect">
+            <a:avLst/>
+          </a:prstGeom>
+          <a:noFill/>
+          <a:ln>
+            <a:noFill/>
+          </a:ln>
+        </p:spPr>
+        <p:txBody>
+          <a:bodyPr spcFirstLastPara="1" wrap="square" lIns="91425" tIns="45700" rIns="91425" bIns="45700" anchor="t" anchorCtr="0">
+            <a:spAutoFit/>
+          </a:bodyPr>
+          <a:lstStyle/>
+          <a:p>
+            <a:pPr marL="0" marR="0" lvl="0" indent="0" algn="ctr" rtl="0">
+              <a:lnSpc>
+                <a:spcPct val="100000"/>
+              </a:lnSpc>
+              <a:spcBef>
+                <a:spcPts val="0"/>
+              </a:spcBef>
+              <a:spcAft>
+                <a:spcPts val="0"/>
+              </a:spcAft>
+              <a:buClr>
+                <a:srgbClr val="000000"/>
+              </a:buClr>
+              <a:buSzPts val="1800"/>
+              <a:buFont typeface="Arial"/>
+              <a:buNone/>
+            </a:pPr>
+            <a:r>
+              <a:rPr lang="en-US" sz="1800" b="0" i="0" u="none" strike="noStrike" cap="none">
+                <a:solidFill>
+                  <a:srgbClr val="A5A5A5"/>
+                </a:solidFill>
+                <a:latin typeface="Arial"/>
+                <a:ea typeface="Arial"/>
+                <a:cs typeface="Arial"/>
+                <a:sym typeface="Arial"/>
+              </a:rPr>
+              <a:t>IMAGE / GRAPHIC</a:t>
+            </a:r>
+            <a:endParaRPr sz="1400" b="0" i="0" u="none" strike="noStrike" cap="none">
+              <a:solidFill>
+                <a:srgbClr val="000000"/>
+              </a:solidFill>
+              <a:latin typeface="Arial"/>
+              <a:ea typeface="Arial"/>
+              <a:cs typeface="Arial"/>
+              <a:sym typeface="Arial"/>
+            </a:endParaRPr>
+          </a:p>
+        </p:txBody>
+      </p:sp>
+      <p:sp>
+        <p:nvSpPr>
+          <p:cNvPr id="149" name="Google Shape;149;p31"/>
+          <p:cNvSpPr txBox="1"/>
+          <p:nvPr/>
+        </p:nvSpPr>
+        <p:spPr>
+          <a:xfrm>
+            <a:off x="5122548" y="1334279"/>
+            <a:ext cx="6686464" cy="4821102"/>
+          </a:xfrm>
+          <a:prstGeom prst="rect">
+            <a:avLst/>
+          </a:prstGeom>
+          <a:noFill/>
+          <a:ln>
+            <a:noFill/>
+          </a:ln>
+        </p:spPr>
+        <p:txBody>
+          <a:bodyPr spcFirstLastPara="1" wrap="square" lIns="91425" tIns="45700" rIns="91425" bIns="45700" anchor="t" anchorCtr="0">
+            <a:noAutofit/>
+          </a:bodyPr>
+          <a:lstStyle/>
+          <a:p>
+            <a:pPr marL="0" marR="0" lvl="0" indent="0" algn="l" rtl="0">
+              <a:lnSpc>
+                <a:spcPct val="100000"/>
+              </a:lnSpc>
+              <a:spcBef>
+                <a:spcPts val="0"/>
+              </a:spcBef>
+              <a:spcAft>
+                <a:spcPts val="0"/>
+              </a:spcAft>
+              <a:buNone/>
+            </a:pPr>
+            <a:r>
+              <a:rPr lang="en-US" sz="2600" b="1" i="0" u="none" strike="noStrike" cap="none">
+                <a:solidFill>
+                  <a:srgbClr val="E84B36"/>
+                </a:solidFill>
+                <a:latin typeface="Arial"/>
+                <a:ea typeface="Arial"/>
+                <a:cs typeface="Arial"/>
+                <a:sym typeface="Arial"/>
+              </a:rPr>
+              <a:t>Lorem Ipsum Dolor Sit Amet Consectetur Adipiscing</a:t>
+            </a:r>
+            <a:endParaRPr sz="2600" b="1" i="0" u="none" strike="noStrike" cap="none">
+              <a:solidFill>
+                <a:srgbClr val="E84B36"/>
+              </a:solidFill>
+              <a:latin typeface="Arial"/>
+              <a:ea typeface="Arial"/>
+              <a:cs typeface="Arial"/>
+              <a:sym typeface="Arial"/>
+            </a:endParaRPr>
+          </a:p>
+          <a:p>
+            <a:pPr marL="0" marR="0" lvl="0" indent="0" algn="l" rtl="0">
+              <a:lnSpc>
+                <a:spcPct val="100000"/>
+              </a:lnSpc>
+              <a:spcBef>
+                <a:spcPts val="0"/>
+              </a:spcBef>
+              <a:spcAft>
+                <a:spcPts val="0"/>
+              </a:spcAft>
+              <a:buNone/>
+            </a:pPr>
+            <a:endParaRPr sz="1800" b="0" i="0" u="none" strike="noStrike" cap="none">
+              <a:solidFill>
+                <a:schemeClr val="dk1"/>
+              </a:solidFill>
+              <a:latin typeface="Arial"/>
+              <a:ea typeface="Arial"/>
+              <a:cs typeface="Arial"/>
+              <a:sym typeface="Arial"/>
+            </a:endParaRPr>
+          </a:p>
+          <a:p>
+            <a:pPr marL="0" marR="0" lvl="0" indent="0" algn="l" rtl="0">
+              <a:lnSpc>
+                <a:spcPct val="100000"/>
+              </a:lnSpc>
+              <a:spcBef>
+                <a:spcPts val="0"/>
+              </a:spcBef>
+              <a:spcAft>
+                <a:spcPts val="0"/>
+              </a:spcAft>
+              <a:buNone/>
+            </a:pPr>
+            <a:r>
+              <a:rPr lang="en-US" sz="1800" b="0" i="0" u="none" strike="noStrike" cap="none">
+                <a:solidFill>
+                  <a:srgbClr val="000000"/>
+                </a:solidFill>
+                <a:latin typeface="Arial"/>
+                <a:ea typeface="Arial"/>
+                <a:cs typeface="Arial"/>
+                <a:sym typeface="Arial"/>
+              </a:rPr>
+              <a:t>Lorem ipsum dolor sit amet, consectetur adipiscing elit, sed do eiusmod tempor incididunt ut labore et dolore magna aliqua. Ut enim ad minim veniam, quis nostrud exercitation ullamco laboris nisi ut aliquip ex ea commodo consequat. </a:t>
+            </a:r>
+            <a:endParaRPr/>
+          </a:p>
+          <a:p>
+            <a:pPr marL="0" marR="0" lvl="0" indent="0" algn="l" rtl="0">
+              <a:lnSpc>
+                <a:spcPct val="100000"/>
+              </a:lnSpc>
+              <a:spcBef>
+                <a:spcPts val="0"/>
+              </a:spcBef>
+              <a:spcAft>
+                <a:spcPts val="0"/>
+              </a:spcAft>
+              <a:buNone/>
+            </a:pPr>
+            <a:endParaRPr sz="1800" b="0" i="0" u="none" strike="noStrike" cap="none">
+              <a:solidFill>
+                <a:schemeClr val="dk1"/>
+              </a:solidFill>
+              <a:latin typeface="Arial"/>
+              <a:ea typeface="Arial"/>
+              <a:cs typeface="Arial"/>
+              <a:sym typeface="Arial"/>
+            </a:endParaRPr>
+          </a:p>
+          <a:p>
+            <a:pPr marL="0" marR="0" lvl="0" indent="0" algn="l" rtl="0">
+              <a:lnSpc>
+                <a:spcPct val="100000"/>
+              </a:lnSpc>
+              <a:spcBef>
+                <a:spcPts val="0"/>
+              </a:spcBef>
+              <a:spcAft>
+                <a:spcPts val="0"/>
+              </a:spcAft>
+              <a:buNone/>
+            </a:pPr>
+            <a:r>
+              <a:rPr lang="en-US" sz="2000" b="1" i="0" u="none" strike="noStrike" cap="none">
+                <a:solidFill>
+                  <a:srgbClr val="15264B"/>
+                </a:solidFill>
+                <a:latin typeface="Arial"/>
+                <a:ea typeface="Arial"/>
+                <a:cs typeface="Arial"/>
+                <a:sym typeface="Arial"/>
+              </a:rPr>
+              <a:t>Lorem Ipsum Dolor Sit Amet Consectetur Adipiscing</a:t>
+            </a:r>
+            <a:endParaRPr sz="2000" b="1" i="0" u="none" strike="noStrike" cap="none">
+              <a:solidFill>
+                <a:srgbClr val="15264B"/>
+              </a:solidFill>
+              <a:latin typeface="Arial"/>
+              <a:ea typeface="Arial"/>
+              <a:cs typeface="Arial"/>
+              <a:sym typeface="Arial"/>
+            </a:endParaRPr>
+          </a:p>
+          <a:p>
+            <a:pPr marL="0" marR="0" lvl="0" indent="0" algn="l" rtl="0">
+              <a:lnSpc>
+                <a:spcPct val="100000"/>
+              </a:lnSpc>
+              <a:spcBef>
+                <a:spcPts val="0"/>
+              </a:spcBef>
+              <a:spcAft>
+                <a:spcPts val="0"/>
+              </a:spcAft>
+              <a:buNone/>
+            </a:pPr>
+            <a:endParaRPr sz="1800" b="1" i="0" u="none" strike="noStrike" cap="none">
+              <a:solidFill>
+                <a:schemeClr val="dk1"/>
+              </a:solidFill>
+              <a:latin typeface="Arial"/>
+              <a:ea typeface="Arial"/>
+              <a:cs typeface="Arial"/>
+              <a:sym typeface="Arial"/>
+            </a:endParaRPr>
+          </a:p>
+          <a:p>
+            <a:pPr marL="0" marR="0" lvl="0" indent="0" algn="l" rtl="0">
+              <a:lnSpc>
+                <a:spcPct val="100000"/>
+              </a:lnSpc>
+              <a:spcBef>
+                <a:spcPts val="0"/>
+              </a:spcBef>
+              <a:spcAft>
+                <a:spcPts val="0"/>
+              </a:spcAft>
+              <a:buNone/>
+            </a:pPr>
+            <a:r>
+              <a:rPr lang="en-US" sz="1800" b="0" i="0" u="none" strike="noStrike" cap="none">
+                <a:solidFill>
+                  <a:srgbClr val="000000"/>
+                </a:solidFill>
+                <a:latin typeface="Arial"/>
+                <a:ea typeface="Arial"/>
+                <a:cs typeface="Arial"/>
+                <a:sym typeface="Arial"/>
+              </a:rPr>
+              <a:t>Lorem ipsum dolor sit amet, consectetur adipiscing elit, sed do eiusmod tempor incididunt ut labore et dolore magna aliqua.</a:t>
+            </a:r>
+            <a:endParaRPr sz="1800" b="1" i="0" u="none" strike="noStrike" cap="none">
+              <a:solidFill>
+                <a:schemeClr val="dk1"/>
+              </a:solidFill>
+              <a:latin typeface="Arial"/>
+              <a:ea typeface="Arial"/>
+              <a:cs typeface="Arial"/>
+              <a:sym typeface="Arial"/>
+            </a:endParaRPr>
+          </a:p>
+        </p:txBody>
+      </p:sp>
+      <p:sp>
+        <p:nvSpPr>
+          <p:cNvPr id="150" name="Google Shape;150;p31"/>
+          <p:cNvSpPr/>
+          <p:nvPr/>
+        </p:nvSpPr>
+        <p:spPr>
+          <a:xfrm rot="10800000" flipH="1">
+            <a:off x="0" y="0"/>
+            <a:ext cx="12192000" cy="868220"/>
+          </a:xfrm>
+          <a:prstGeom prst="rect">
+            <a:avLst/>
+          </a:prstGeom>
+          <a:solidFill>
+            <a:srgbClr val="13294B"/>
+          </a:solidFill>
+          <a:ln>
+            <a:noFill/>
+          </a:ln>
+        </p:spPr>
+        <p:txBody>
+          <a:bodyPr spcFirstLastPara="1" wrap="square" lIns="91425" tIns="45700" rIns="91425" bIns="45700" anchor="ctr" anchorCtr="0">
+            <a:noAutofit/>
+          </a:bodyPr>
+          <a:lstStyle/>
+          <a:p>
+            <a:pPr marL="0" marR="0" lvl="0" indent="0" algn="ctr" rtl="0">
+              <a:lnSpc>
+                <a:spcPct val="100000"/>
+              </a:lnSpc>
+              <a:spcBef>
+                <a:spcPts val="0"/>
+              </a:spcBef>
+              <a:spcAft>
+                <a:spcPts val="0"/>
+              </a:spcAft>
+              <a:buClr>
+                <a:schemeClr val="lt1"/>
+              </a:buClr>
+              <a:buSzPts val="1800"/>
+              <a:buFont typeface="Calibri"/>
+              <a:buNone/>
+            </a:pPr>
+            <a:endParaRPr sz="1800" b="0" i="0" u="none" strike="noStrike" cap="none">
+              <a:solidFill>
+                <a:srgbClr val="13294B"/>
+              </a:solidFill>
+              <a:latin typeface="Calibri"/>
+              <a:ea typeface="Calibri"/>
+              <a:cs typeface="Calibri"/>
+              <a:sym typeface="Calibri"/>
+            </a:endParaRPr>
+          </a:p>
+        </p:txBody>
+      </p:sp>
+      <p:sp>
+        <p:nvSpPr>
+          <p:cNvPr id="151" name="Google Shape;151;p31"/>
+          <p:cNvSpPr txBox="1"/>
+          <p:nvPr/>
+        </p:nvSpPr>
+        <p:spPr>
+          <a:xfrm>
+            <a:off x="376810" y="204051"/>
+            <a:ext cx="10910026" cy="461624"/>
+          </a:xfrm>
+          <a:prstGeom prst="rect">
+            <a:avLst/>
+          </a:prstGeom>
+          <a:noFill/>
+          <a:ln>
+            <a:noFill/>
+          </a:ln>
+        </p:spPr>
+        <p:txBody>
+          <a:bodyPr spcFirstLastPara="1" wrap="square" lIns="91425" tIns="45700" rIns="91425" bIns="45700" anchor="t" anchorCtr="0">
+            <a:spAutoFit/>
+          </a:bodyPr>
+          <a:lstStyle/>
+          <a:p>
+            <a:pPr marL="0" marR="0" lvl="0" indent="0" algn="l" rtl="0">
+              <a:lnSpc>
+                <a:spcPct val="100000"/>
+              </a:lnSpc>
+              <a:spcBef>
+                <a:spcPts val="0"/>
+              </a:spcBef>
+              <a:spcAft>
+                <a:spcPts val="0"/>
+              </a:spcAft>
+              <a:buClr>
+                <a:srgbClr val="000000"/>
+              </a:buClr>
+              <a:buSzPts val="2400"/>
+              <a:buFont typeface="Arial"/>
+              <a:buNone/>
+            </a:pPr>
+            <a:r>
+              <a:rPr lang="en-US" sz="2400" b="0" i="0" u="none" strike="noStrike" cap="none">
+                <a:solidFill>
+                  <a:schemeClr val="lt1"/>
+                </a:solidFill>
+                <a:latin typeface="Arial"/>
+                <a:ea typeface="Arial"/>
+                <a:cs typeface="Arial"/>
+                <a:sym typeface="Arial"/>
+              </a:rPr>
+              <a:t>Slide Title</a:t>
+            </a:r>
+            <a:endParaRPr sz="2400" b="0" i="0" u="none" strike="noStrike" cap="none">
+              <a:solidFill>
+                <a:schemeClr val="lt1"/>
+              </a:solidFill>
+              <a:latin typeface="Arial"/>
+              <a:ea typeface="Arial"/>
+              <a:cs typeface="Arial"/>
+              <a:sym typeface="Arial"/>
+            </a:endParaRPr>
+          </a:p>
+        </p:txBody>
+      </p:sp>
+      <p:pic>
+        <p:nvPicPr>
+          <p:cNvPr id="152" name="Google Shape;152;p31"/>
+          <p:cNvPicPr preferRelativeResize="0"/>
+          <p:nvPr/>
+        </p:nvPicPr>
+        <p:blipFill rotWithShape="1">
+          <a:blip r:embed="rId3">
+            <a:alphaModFix/>
+          </a:blip>
+          <a:srcRect/>
+          <a:stretch/>
+        </p:blipFill>
+        <p:spPr>
+          <a:xfrm>
+            <a:off x="11557509" y="233819"/>
+            <a:ext cx="271308" cy="389810"/>
+          </a:xfrm>
+          <a:prstGeom prst="rect">
+            <a:avLst/>
+          </a:prstGeom>
+          <a:noFill/>
+          <a:ln>
+            <a:noFill/>
+          </a:ln>
+        </p:spPr>
+      </p:pic>
+      <p:sp>
+        <p:nvSpPr>
+          <p:cNvPr id="153" name="Google Shape;153;p31"/>
+          <p:cNvSpPr txBox="1"/>
+          <p:nvPr/>
+        </p:nvSpPr>
+        <p:spPr>
+          <a:xfrm>
+            <a:off x="9335597" y="6524381"/>
+            <a:ext cx="2473415" cy="230792"/>
+          </a:xfrm>
+          <a:prstGeom prst="rect">
+            <a:avLst/>
+          </a:prstGeom>
+          <a:noFill/>
+          <a:ln>
+            <a:noFill/>
+          </a:ln>
+        </p:spPr>
+        <p:txBody>
+          <a:bodyPr spcFirstLastPara="1" wrap="square" lIns="91425" tIns="45700" rIns="91425" bIns="45700" anchor="t" anchorCtr="0">
+            <a:spAutoFit/>
+          </a:bodyPr>
+          <a:lstStyle/>
+          <a:p>
+            <a:pPr marL="0" marR="0" lvl="0" indent="0" algn="r" rtl="0">
+              <a:lnSpc>
+                <a:spcPct val="100000"/>
+              </a:lnSpc>
+              <a:spcBef>
+                <a:spcPts val="0"/>
+              </a:spcBef>
+              <a:spcAft>
+                <a:spcPts val="0"/>
+              </a:spcAft>
+              <a:buNone/>
+            </a:pPr>
+            <a:r>
+              <a:rPr lang="en-US" sz="900" b="0" i="0" u="none" strike="noStrike" cap="none">
+                <a:solidFill>
+                  <a:srgbClr val="13294B"/>
+                </a:solidFill>
+                <a:latin typeface="Arial"/>
+                <a:ea typeface="Arial"/>
+                <a:cs typeface="Arial"/>
+                <a:sym typeface="Arial"/>
+              </a:rPr>
+              <a:t>GRAINGER ENGINEERING</a:t>
+            </a:r>
+            <a:endParaRPr/>
+          </a:p>
+        </p:txBody>
+      </p:sp>
+      <p:sp>
+        <p:nvSpPr>
+          <p:cNvPr id="154" name="Google Shape;154;p31"/>
+          <p:cNvSpPr txBox="1"/>
+          <p:nvPr/>
+        </p:nvSpPr>
+        <p:spPr>
+          <a:xfrm>
+            <a:off x="376807" y="6524381"/>
+            <a:ext cx="7991400" cy="230700"/>
+          </a:xfrm>
+          <a:prstGeom prst="rect">
+            <a:avLst/>
+          </a:prstGeom>
+          <a:noFill/>
+          <a:ln>
+            <a:noFill/>
+          </a:ln>
+        </p:spPr>
+        <p:txBody>
+          <a:bodyPr spcFirstLastPara="1" wrap="square" lIns="91425" tIns="45700" rIns="91425" bIns="45700" anchor="t" anchorCtr="0">
+            <a:spAutoFit/>
+          </a:bodyPr>
+          <a:lstStyle/>
+          <a:p>
+            <a:pPr marL="0" marR="0" lvl="0" indent="0" algn="l" rtl="0">
+              <a:lnSpc>
+                <a:spcPct val="100000"/>
+              </a:lnSpc>
+              <a:spcBef>
+                <a:spcPts val="0"/>
+              </a:spcBef>
+              <a:spcAft>
+                <a:spcPts val="0"/>
+              </a:spcAft>
+              <a:buNone/>
+            </a:pPr>
+            <a:r>
+              <a:rPr lang="en-US" sz="900" dirty="0">
+                <a:solidFill>
+                  <a:srgbClr val="13294B"/>
+                </a:solidFill>
+              </a:rPr>
+              <a:t>SYSTEMS ENGINEERING</a:t>
+            </a:r>
+            <a:endParaRPr dirty="0"/>
+          </a:p>
+        </p:txBody>
+      </p:sp>
+      <p:grpSp>
+        <p:nvGrpSpPr>
+          <p:cNvPr id="155" name="Google Shape;155;p31"/>
+          <p:cNvGrpSpPr/>
+          <p:nvPr/>
+        </p:nvGrpSpPr>
+        <p:grpSpPr>
+          <a:xfrm>
+            <a:off x="4066674" y="6601537"/>
+            <a:ext cx="5233412" cy="70446"/>
+            <a:chOff x="4033424" y="6601537"/>
+            <a:chExt cx="5233412" cy="70446"/>
+          </a:xfrm>
+        </p:grpSpPr>
+        <p:cxnSp>
+          <p:nvCxnSpPr>
+            <p:cNvPr id="156" name="Google Shape;156;p31"/>
+            <p:cNvCxnSpPr/>
+            <p:nvPr/>
+          </p:nvCxnSpPr>
+          <p:spPr>
+            <a:xfrm rot="10800000">
+              <a:off x="4033424" y="6639606"/>
+              <a:ext cx="5164651" cy="0"/>
+            </a:xfrm>
+            <a:prstGeom prst="straightConnector1">
+              <a:avLst/>
+            </a:prstGeom>
+            <a:noFill/>
+            <a:ln w="9525" cap="flat" cmpd="sng">
+              <a:solidFill>
+                <a:srgbClr val="13294B"/>
+              </a:solidFill>
+              <a:prstDash val="solid"/>
+              <a:round/>
+              <a:headEnd type="none" w="sm" len="sm"/>
+              <a:tailEnd type="none" w="sm" len="sm"/>
+            </a:ln>
+          </p:spPr>
+        </p:cxnSp>
+        <p:sp>
+          <p:nvSpPr>
+            <p:cNvPr id="157" name="Google Shape;157;p31"/>
+            <p:cNvSpPr/>
+            <p:nvPr/>
+          </p:nvSpPr>
+          <p:spPr>
+            <a:xfrm>
+              <a:off x="9196390" y="6601537"/>
+              <a:ext cx="70446" cy="70446"/>
+            </a:xfrm>
+            <a:prstGeom prst="ellipse">
+              <a:avLst/>
+            </a:prstGeom>
+            <a:solidFill>
+              <a:srgbClr val="13294B"/>
+            </a:solidFill>
+            <a:ln>
+              <a:noFill/>
+            </a:ln>
+          </p:spPr>
+          <p:txBody>
+            <a:bodyPr spcFirstLastPara="1" wrap="square" lIns="91425" tIns="45700" rIns="91425" bIns="45700" anchor="ctr" anchorCtr="0">
+              <a:noAutofit/>
+            </a:bodyPr>
+            <a:lstStyle/>
+            <a:p>
+              <a:pPr marL="0" marR="0" lvl="0" indent="0" algn="ctr" rtl="0">
+                <a:lnSpc>
+                  <a:spcPct val="100000"/>
+                </a:lnSpc>
+                <a:spcBef>
+                  <a:spcPts val="0"/>
+                </a:spcBef>
+                <a:spcAft>
+                  <a:spcPts val="0"/>
+                </a:spcAft>
+                <a:buNone/>
+              </a:pPr>
+              <a:endParaRPr sz="1400" b="0" i="0" u="none" strike="noStrike" cap="none">
+                <a:solidFill>
+                  <a:srgbClr val="13294B"/>
+                </a:solidFill>
+                <a:latin typeface="Arial"/>
+                <a:ea typeface="Arial"/>
+                <a:cs typeface="Arial"/>
+                <a:sym typeface="Arial"/>
+              </a:endParaRPr>
+            </a:p>
+          </p:txBody>
+        </p:sp>
+      </p:grpSp>
+    </p:spTree>
+  </p:cSld>
+  <p:clrMapOvr>
+    <a:masterClrMapping/>
+  </p:clrMapOvr>
+</p:sld>
+</file>
+
+<file path=ppt/slides/slide13.xml><?xml version="1.0" encoding="utf-8"?>
+<p:sld xmlns:a="http://schemas.openxmlformats.org/drawingml/2006/main" xmlns:r="http://schemas.openxmlformats.org/officeDocument/2006/relationships" xmlns:p="http://schemas.openxmlformats.org/presentationml/2006/main">
+  <p:cSld>
+    <p:spTree>
+      <p:nvGrpSpPr>
         <p:cNvPr id="1" name="Shape 161"/>
         <p:cNvGrpSpPr/>
         <p:nvPr/>
@@ -17325,7 +19645,7 @@
 </p:sld>
 </file>
 
-<file path=ppt/slides/slide11.xml><?xml version="1.0" encoding="utf-8"?>
+<file path=ppt/slides/slide14.xml><?xml version="1.0" encoding="utf-8"?>
 <p:sld xmlns:a="http://schemas.openxmlformats.org/drawingml/2006/main" xmlns:r="http://schemas.openxmlformats.org/officeDocument/2006/relationships" xmlns:p="http://schemas.openxmlformats.org/presentationml/2006/main">
   <p:cSld>
     <p:spTree>
@@ -18042,7 +20362,7 @@
 </p:sld>
 </file>
 
-<file path=ppt/slides/slide12.xml><?xml version="1.0" encoding="utf-8"?>
+<file path=ppt/slides/slide15.xml><?xml version="1.0" encoding="utf-8"?>
 <p:sld xmlns:a="http://schemas.openxmlformats.org/drawingml/2006/main" xmlns:r="http://schemas.openxmlformats.org/officeDocument/2006/relationships" xmlns:p="http://schemas.openxmlformats.org/presentationml/2006/main">
   <p:cSld>
     <p:spTree>
@@ -18759,7 +21079,7 @@
 </p:sld>
 </file>
 
-<file path=ppt/slides/slide13.xml><?xml version="1.0" encoding="utf-8"?>
+<file path=ppt/slides/slide16.xml><?xml version="1.0" encoding="utf-8"?>
 <p:sld xmlns:a="http://schemas.openxmlformats.org/drawingml/2006/main" xmlns:r="http://schemas.openxmlformats.org/officeDocument/2006/relationships" xmlns:p="http://schemas.openxmlformats.org/presentationml/2006/main">
   <p:cSld>
     <p:spTree>
@@ -19315,7 +21635,7 @@
 </p:sld>
 </file>
 
-<file path=ppt/slides/slide14.xml><?xml version="1.0" encoding="utf-8"?>
+<file path=ppt/slides/slide17.xml><?xml version="1.0" encoding="utf-8"?>
 <p:sld xmlns:a="http://schemas.openxmlformats.org/drawingml/2006/main" xmlns:r="http://schemas.openxmlformats.org/officeDocument/2006/relationships" xmlns:p="http://schemas.openxmlformats.org/presentationml/2006/main">
   <p:cSld>
     <p:spTree>
@@ -19781,7 +22101,7 @@
 </p:sld>
 </file>
 
-<file path=ppt/slides/slide15.xml><?xml version="1.0" encoding="utf-8"?>
+<file path=ppt/slides/slide18.xml><?xml version="1.0" encoding="utf-8"?>
 <p:sld xmlns:a="http://schemas.openxmlformats.org/drawingml/2006/main" xmlns:r="http://schemas.openxmlformats.org/officeDocument/2006/relationships" xmlns:p="http://schemas.openxmlformats.org/presentationml/2006/main">
   <p:cSld>
     <p:bg>
@@ -20384,7 +22704,7 @@
 </p:sld>
 </file>
 
-<file path=ppt/slides/slide16.xml><?xml version="1.0" encoding="utf-8"?>
+<file path=ppt/slides/slide19.xml><?xml version="1.0" encoding="utf-8"?>
 <p:sld xmlns:a="http://schemas.openxmlformats.org/drawingml/2006/main" xmlns:r="http://schemas.openxmlformats.org/officeDocument/2006/relationships" xmlns:p="http://schemas.openxmlformats.org/presentationml/2006/main">
   <p:cSld>
     <p:spTree>
@@ -20958,7 +23278,1074 @@
 </p:sld>
 </file>
 
-<file path=ppt/slides/slide17.xml><?xml version="1.0" encoding="utf-8"?>
+<file path=ppt/slides/slide2.xml><?xml version="1.0" encoding="utf-8"?>
+<p:sld xmlns:a="http://schemas.openxmlformats.org/drawingml/2006/main" xmlns:r="http://schemas.openxmlformats.org/officeDocument/2006/relationships" xmlns:p="http://schemas.openxmlformats.org/presentationml/2006/main">
+  <p:cSld>
+    <p:spTree>
+      <p:nvGrpSpPr>
+        <p:cNvPr id="1" name="Shape 117">
+          <a:extLst>
+            <a:ext uri="{FF2B5EF4-FFF2-40B4-BE49-F238E27FC236}">
+              <a16:creationId xmlns:a16="http://schemas.microsoft.com/office/drawing/2014/main" id="{781D3E48-EB5B-86EE-C4D9-54116487B2DB}"/>
+            </a:ext>
+          </a:extLst>
+        </p:cNvPr>
+        <p:cNvGrpSpPr/>
+        <p:nvPr/>
+      </p:nvGrpSpPr>
+      <p:grpSpPr>
+        <a:xfrm>
+          <a:off x="0" y="0"/>
+          <a:ext cx="0" cy="0"/>
+          <a:chOff x="0" y="0"/>
+          <a:chExt cx="0" cy="0"/>
+        </a:xfrm>
+      </p:grpSpPr>
+      <p:sp>
+        <p:nvSpPr>
+          <p:cNvPr id="118" name="Google Shape;118;p29">
+            <a:extLst>
+              <a:ext uri="{FF2B5EF4-FFF2-40B4-BE49-F238E27FC236}">
+                <a16:creationId xmlns:a16="http://schemas.microsoft.com/office/drawing/2014/main" id="{3BCC2F8C-3A4A-AD98-3682-D9499379E419}"/>
+              </a:ext>
+            </a:extLst>
+          </p:cNvPr>
+          <p:cNvSpPr txBox="1">
+            <a:spLocks noGrp="1"/>
+          </p:cNvSpPr>
+          <p:nvPr>
+            <p:ph type="body" idx="1"/>
+          </p:nvPr>
+        </p:nvSpPr>
+        <p:spPr>
+          <a:xfrm>
+            <a:off x="376809" y="1334279"/>
+            <a:ext cx="11177401" cy="4821102"/>
+          </a:xfrm>
+          <a:prstGeom prst="rect">
+            <a:avLst/>
+          </a:prstGeom>
+          <a:noFill/>
+          <a:ln>
+            <a:noFill/>
+          </a:ln>
+        </p:spPr>
+        <p:txBody>
+          <a:bodyPr spcFirstLastPara="1" wrap="square" lIns="91425" tIns="45700" rIns="91425" bIns="45700" anchor="t" anchorCtr="0">
+            <a:noAutofit/>
+          </a:bodyPr>
+          <a:lstStyle/>
+          <a:p>
+            <a:pPr marL="0" lvl="0" indent="0" algn="l" rtl="0">
+              <a:lnSpc>
+                <a:spcPct val="100000"/>
+              </a:lnSpc>
+              <a:spcBef>
+                <a:spcPts val="0"/>
+              </a:spcBef>
+              <a:spcAft>
+                <a:spcPts val="0"/>
+              </a:spcAft>
+              <a:buSzPts val="3000"/>
+              <a:buNone/>
+            </a:pPr>
+            <a:r>
+              <a:rPr lang="en-US" sz="1800" b="1" dirty="0">
+                <a:solidFill>
+                  <a:srgbClr val="E84B36"/>
+                </a:solidFill>
+                <a:latin typeface="Arial"/>
+                <a:ea typeface="Arial"/>
+                <a:cs typeface="Arial"/>
+                <a:sym typeface="Arial"/>
+              </a:rPr>
+              <a:t>Office Hours:</a:t>
+            </a:r>
+            <a:endParaRPr lang="en-US" sz="2600" b="1" dirty="0">
+              <a:solidFill>
+                <a:srgbClr val="E84B36"/>
+              </a:solidFill>
+              <a:latin typeface="Arial"/>
+              <a:ea typeface="Arial"/>
+              <a:cs typeface="Arial"/>
+              <a:sym typeface="Arial"/>
+            </a:endParaRPr>
+          </a:p>
+          <a:p>
+            <a:pPr marL="285750" indent="-285750">
+              <a:lnSpc>
+                <a:spcPct val="100000"/>
+              </a:lnSpc>
+              <a:spcBef>
+                <a:spcPts val="0"/>
+              </a:spcBef>
+              <a:buSzPts val="3000"/>
+            </a:pPr>
+            <a:r>
+              <a:rPr lang="en-US" sz="1800" b="1" dirty="0">
+                <a:solidFill>
+                  <a:schemeClr val="dk1"/>
+                </a:solidFill>
+                <a:latin typeface="Arial"/>
+                <a:ea typeface="Arial"/>
+                <a:cs typeface="Arial"/>
+                <a:sym typeface="Arial"/>
+              </a:rPr>
+              <a:t>Monday: </a:t>
+            </a:r>
+            <a:r>
+              <a:rPr lang="en-US" sz="1800" dirty="0">
+                <a:solidFill>
+                  <a:schemeClr val="dk1"/>
+                </a:solidFill>
+                <a:latin typeface="Arial"/>
+                <a:ea typeface="Arial"/>
+                <a:cs typeface="Arial"/>
+                <a:sym typeface="Arial"/>
+              </a:rPr>
+              <a:t>4-6 PM</a:t>
+            </a:r>
+            <a:r>
+              <a:rPr lang="en-US" sz="1800" b="1" dirty="0">
+                <a:solidFill>
+                  <a:schemeClr val="dk1"/>
+                </a:solidFill>
+                <a:latin typeface="Arial"/>
+                <a:ea typeface="Arial"/>
+                <a:cs typeface="Arial"/>
+                <a:sym typeface="Arial"/>
+              </a:rPr>
+              <a:t>, </a:t>
+            </a:r>
+            <a:r>
+              <a:rPr lang="en-US" sz="1800" dirty="0">
+                <a:solidFill>
+                  <a:schemeClr val="dk1"/>
+                </a:solidFill>
+                <a:latin typeface="Arial"/>
+                <a:ea typeface="Arial"/>
+                <a:cs typeface="Arial"/>
+                <a:sym typeface="Arial"/>
+              </a:rPr>
+              <a:t>Neel</a:t>
+            </a:r>
+          </a:p>
+          <a:p>
+            <a:pPr marL="285750" indent="-285750">
+              <a:lnSpc>
+                <a:spcPct val="100000"/>
+              </a:lnSpc>
+              <a:spcBef>
+                <a:spcPts val="0"/>
+              </a:spcBef>
+              <a:buSzPts val="3000"/>
+            </a:pPr>
+            <a:r>
+              <a:rPr lang="en-US" sz="1800" b="1" dirty="0">
+                <a:latin typeface="Arial"/>
+                <a:ea typeface="Arial"/>
+                <a:cs typeface="Arial"/>
+                <a:sym typeface="Arial"/>
+              </a:rPr>
+              <a:t>Tuesday: </a:t>
+            </a:r>
+            <a:r>
+              <a:rPr lang="en-US" sz="1800" dirty="0">
+                <a:latin typeface="Arial"/>
+                <a:ea typeface="Arial"/>
+                <a:cs typeface="Arial"/>
+                <a:sym typeface="Arial"/>
+              </a:rPr>
+              <a:t>11-1 PM</a:t>
+            </a:r>
+            <a:r>
+              <a:rPr lang="en-US" sz="1800" b="1" dirty="0">
+                <a:latin typeface="Arial"/>
+                <a:ea typeface="Arial"/>
+                <a:cs typeface="Arial"/>
+                <a:sym typeface="Arial"/>
+              </a:rPr>
+              <a:t>, </a:t>
+            </a:r>
+            <a:r>
+              <a:rPr lang="en-US" sz="1800" dirty="0">
+                <a:latin typeface="Arial"/>
+                <a:ea typeface="Arial"/>
+                <a:cs typeface="Arial"/>
+                <a:sym typeface="Arial"/>
+              </a:rPr>
+              <a:t>Lakshmi</a:t>
+            </a:r>
+          </a:p>
+          <a:p>
+            <a:pPr marL="285750" indent="-285750">
+              <a:lnSpc>
+                <a:spcPct val="100000"/>
+              </a:lnSpc>
+              <a:spcBef>
+                <a:spcPts val="0"/>
+              </a:spcBef>
+              <a:buSzPts val="3000"/>
+            </a:pPr>
+            <a:r>
+              <a:rPr lang="en-US" sz="1800" b="1" dirty="0">
+                <a:solidFill>
+                  <a:schemeClr val="dk1"/>
+                </a:solidFill>
+                <a:latin typeface="Arial"/>
+                <a:ea typeface="Arial"/>
+                <a:cs typeface="Arial"/>
+                <a:sym typeface="Arial"/>
+              </a:rPr>
+              <a:t>Tuesday: </a:t>
+            </a:r>
+            <a:r>
+              <a:rPr lang="en-US" sz="1800" dirty="0">
+                <a:latin typeface="Arial"/>
+                <a:ea typeface="Arial"/>
+                <a:cs typeface="Arial"/>
+                <a:sym typeface="Arial"/>
+              </a:rPr>
+              <a:t>1-3 PM</a:t>
+            </a:r>
+            <a:r>
+              <a:rPr lang="en-US" sz="1800" b="1" dirty="0">
+                <a:latin typeface="Arial"/>
+                <a:ea typeface="Arial"/>
+                <a:cs typeface="Arial"/>
+                <a:sym typeface="Arial"/>
+              </a:rPr>
+              <a:t>, </a:t>
+            </a:r>
+            <a:r>
+              <a:rPr lang="en-US" sz="1800" dirty="0">
+                <a:latin typeface="Arial"/>
+                <a:ea typeface="Arial"/>
+                <a:cs typeface="Arial"/>
+                <a:sym typeface="Arial"/>
+              </a:rPr>
+              <a:t>Samuel</a:t>
+            </a:r>
+          </a:p>
+          <a:p>
+            <a:pPr marL="285750" indent="-285750">
+              <a:lnSpc>
+                <a:spcPct val="100000"/>
+              </a:lnSpc>
+              <a:spcBef>
+                <a:spcPts val="0"/>
+              </a:spcBef>
+              <a:buSzPts val="3000"/>
+            </a:pPr>
+            <a:r>
+              <a:rPr lang="en-US" sz="1800" b="1" dirty="0">
+                <a:solidFill>
+                  <a:schemeClr val="dk1"/>
+                </a:solidFill>
+                <a:latin typeface="Arial"/>
+                <a:ea typeface="Arial"/>
+                <a:cs typeface="Arial"/>
+                <a:sym typeface="Arial"/>
+              </a:rPr>
+              <a:t>Tuesday: </a:t>
+            </a:r>
+            <a:r>
+              <a:rPr lang="en-US" sz="1800" dirty="0">
+                <a:solidFill>
+                  <a:schemeClr val="dk1"/>
+                </a:solidFill>
+                <a:latin typeface="Arial"/>
+                <a:ea typeface="Arial"/>
+                <a:cs typeface="Arial"/>
+                <a:sym typeface="Arial"/>
+              </a:rPr>
+              <a:t>2-5 PM</a:t>
+            </a:r>
+            <a:r>
+              <a:rPr lang="en-US" sz="1800" b="1" dirty="0">
+                <a:solidFill>
+                  <a:schemeClr val="dk1"/>
+                </a:solidFill>
+                <a:latin typeface="Arial"/>
+                <a:ea typeface="Arial"/>
+                <a:cs typeface="Arial"/>
+                <a:sym typeface="Arial"/>
+              </a:rPr>
+              <a:t>, </a:t>
+            </a:r>
+            <a:r>
+              <a:rPr lang="en-US" sz="1800" dirty="0">
+                <a:solidFill>
+                  <a:schemeClr val="dk1"/>
+                </a:solidFill>
+                <a:latin typeface="Arial"/>
+                <a:ea typeface="Arial"/>
+                <a:cs typeface="Arial"/>
+                <a:sym typeface="Arial"/>
+              </a:rPr>
+              <a:t>Dan &amp; Marius</a:t>
+            </a:r>
+          </a:p>
+          <a:p>
+            <a:pPr marL="285750" indent="-285750">
+              <a:lnSpc>
+                <a:spcPct val="100000"/>
+              </a:lnSpc>
+              <a:spcBef>
+                <a:spcPts val="0"/>
+              </a:spcBef>
+              <a:buSzPts val="3000"/>
+            </a:pPr>
+            <a:endParaRPr lang="en-US" sz="1800" b="1" dirty="0">
+              <a:latin typeface="Arial"/>
+              <a:ea typeface="Arial"/>
+              <a:cs typeface="Arial"/>
+              <a:sym typeface="Arial"/>
+            </a:endParaRPr>
+          </a:p>
+          <a:p>
+            <a:pPr marL="0" indent="0">
+              <a:lnSpc>
+                <a:spcPct val="100000"/>
+              </a:lnSpc>
+              <a:spcBef>
+                <a:spcPts val="0"/>
+              </a:spcBef>
+              <a:buSzPts val="3000"/>
+              <a:buNone/>
+            </a:pPr>
+            <a:r>
+              <a:rPr lang="en-US" sz="1800" b="1" dirty="0">
+                <a:solidFill>
+                  <a:srgbClr val="E84B36"/>
+                </a:solidFill>
+                <a:latin typeface="Arial"/>
+                <a:ea typeface="Arial"/>
+                <a:cs typeface="Arial"/>
+                <a:sym typeface="Arial"/>
+              </a:rPr>
+              <a:t>Lab: </a:t>
+            </a:r>
+            <a:r>
+              <a:rPr lang="en-US" sz="1800" dirty="0">
+                <a:latin typeface="Arial"/>
+                <a:ea typeface="Arial"/>
+                <a:cs typeface="Arial"/>
+                <a:sym typeface="Arial"/>
+              </a:rPr>
+              <a:t>Starting Lab 3 this week. This a 2-week lab!</a:t>
+            </a:r>
+            <a:endParaRPr lang="en-US" sz="1800" dirty="0">
+              <a:solidFill>
+                <a:srgbClr val="E84B36"/>
+              </a:solidFill>
+              <a:latin typeface="Arial"/>
+              <a:ea typeface="Arial"/>
+              <a:cs typeface="Arial"/>
+              <a:sym typeface="Arial"/>
+            </a:endParaRPr>
+          </a:p>
+          <a:p>
+            <a:pPr marL="0" indent="0">
+              <a:lnSpc>
+                <a:spcPct val="100000"/>
+              </a:lnSpc>
+              <a:spcBef>
+                <a:spcPts val="0"/>
+              </a:spcBef>
+              <a:buSzPts val="3000"/>
+              <a:buNone/>
+            </a:pPr>
+            <a:endParaRPr lang="en-US" sz="1800" b="1" dirty="0">
+              <a:solidFill>
+                <a:srgbClr val="E84B36"/>
+              </a:solidFill>
+              <a:latin typeface="Arial"/>
+              <a:ea typeface="Arial"/>
+              <a:cs typeface="Arial"/>
+              <a:sym typeface="Arial"/>
+            </a:endParaRPr>
+          </a:p>
+          <a:p>
+            <a:pPr marL="0" indent="0">
+              <a:lnSpc>
+                <a:spcPct val="100000"/>
+              </a:lnSpc>
+              <a:spcBef>
+                <a:spcPts val="0"/>
+              </a:spcBef>
+              <a:buSzPts val="3000"/>
+              <a:buNone/>
+            </a:pPr>
+            <a:r>
+              <a:rPr lang="en-US" sz="1800" b="1" dirty="0" err="1">
+                <a:solidFill>
+                  <a:srgbClr val="E84B36"/>
+                </a:solidFill>
+                <a:latin typeface="Arial"/>
+                <a:ea typeface="Arial"/>
+                <a:cs typeface="Arial"/>
+                <a:sym typeface="Arial"/>
+              </a:rPr>
+              <a:t>Homeworks</a:t>
+            </a:r>
+            <a:r>
+              <a:rPr lang="en-US" sz="1800" b="1" dirty="0">
+                <a:solidFill>
+                  <a:srgbClr val="E84B36"/>
+                </a:solidFill>
+                <a:latin typeface="Arial"/>
+                <a:ea typeface="Arial"/>
+                <a:cs typeface="Arial"/>
+                <a:sym typeface="Arial"/>
+              </a:rPr>
+              <a:t>:</a:t>
+            </a:r>
+          </a:p>
+          <a:p>
+            <a:pPr marL="285750" indent="-285750">
+              <a:lnSpc>
+                <a:spcPct val="100000"/>
+              </a:lnSpc>
+              <a:spcBef>
+                <a:spcPts val="0"/>
+              </a:spcBef>
+              <a:buSzPts val="3000"/>
+            </a:pPr>
+            <a:r>
+              <a:rPr lang="en-US" sz="1800" dirty="0">
+                <a:latin typeface="Arial"/>
+                <a:ea typeface="Arial"/>
+                <a:cs typeface="Arial"/>
+                <a:sym typeface="Arial"/>
+              </a:rPr>
+              <a:t>Check-offs for </a:t>
+            </a:r>
+            <a:r>
+              <a:rPr lang="en-US" sz="1800" dirty="0">
+                <a:latin typeface="Arial"/>
+                <a:ea typeface="Arial"/>
+                <a:cs typeface="Arial"/>
+                <a:sym typeface="Arial"/>
+                <a:hlinkClick r:id="rId3"/>
+              </a:rPr>
+              <a:t>homework 2</a:t>
+            </a:r>
+            <a:r>
+              <a:rPr lang="en-US" sz="1800" dirty="0">
+                <a:latin typeface="Arial"/>
+                <a:ea typeface="Arial"/>
+                <a:cs typeface="Arial"/>
+                <a:sym typeface="Arial"/>
+              </a:rPr>
+              <a:t> Ex 1 &amp; 2 are due </a:t>
+            </a:r>
+            <a:r>
+              <a:rPr lang="en-US" sz="1800" b="1" dirty="0">
+                <a:latin typeface="Arial"/>
+                <a:ea typeface="Arial"/>
+                <a:cs typeface="Arial"/>
+                <a:sym typeface="Arial"/>
+              </a:rPr>
+              <a:t>February 17, 5PM (The end of office hours)</a:t>
+            </a:r>
+          </a:p>
+          <a:p>
+            <a:pPr marL="285750" indent="-285750">
+              <a:lnSpc>
+                <a:spcPct val="100000"/>
+              </a:lnSpc>
+              <a:spcBef>
+                <a:spcPts val="0"/>
+              </a:spcBef>
+              <a:buSzPts val="3000"/>
+            </a:pPr>
+            <a:r>
+              <a:rPr lang="en-US" sz="1800" dirty="0">
+                <a:latin typeface="Arial"/>
+                <a:ea typeface="Arial"/>
+                <a:cs typeface="Arial"/>
+                <a:sym typeface="Arial"/>
+              </a:rPr>
+              <a:t>Check-offs for </a:t>
+            </a:r>
+            <a:r>
+              <a:rPr lang="en-US" sz="1800" dirty="0">
+                <a:latin typeface="Arial"/>
+                <a:ea typeface="Arial"/>
+                <a:cs typeface="Arial"/>
+                <a:sym typeface="Arial"/>
+                <a:hlinkClick r:id="rId3"/>
+              </a:rPr>
+              <a:t>homework 2</a:t>
+            </a:r>
+            <a:r>
+              <a:rPr lang="en-US" sz="1800" dirty="0">
+                <a:latin typeface="Arial"/>
+                <a:ea typeface="Arial"/>
+                <a:cs typeface="Arial"/>
+                <a:sym typeface="Arial"/>
+              </a:rPr>
+              <a:t> Ex 3 &amp; 4 are due </a:t>
+            </a:r>
+            <a:r>
+              <a:rPr lang="en-US" sz="1800" b="1" dirty="0">
+                <a:latin typeface="Arial"/>
+                <a:ea typeface="Arial"/>
+                <a:cs typeface="Arial"/>
+                <a:sym typeface="Arial"/>
+              </a:rPr>
+              <a:t>February 24, 5PM (The end of office hours)</a:t>
+            </a:r>
+            <a:endParaRPr lang="en-US" sz="1800" dirty="0">
+              <a:latin typeface="Arial"/>
+              <a:ea typeface="Arial"/>
+              <a:cs typeface="Arial"/>
+              <a:sym typeface="Arial"/>
+            </a:endParaRPr>
+          </a:p>
+          <a:p>
+            <a:pPr marL="285750" indent="-285750">
+              <a:lnSpc>
+                <a:spcPct val="100000"/>
+              </a:lnSpc>
+              <a:spcBef>
+                <a:spcPts val="0"/>
+              </a:spcBef>
+              <a:buSzPts val="3000"/>
+            </a:pPr>
+            <a:r>
+              <a:rPr lang="en-US" sz="1800" dirty="0">
+                <a:latin typeface="Arial"/>
+                <a:ea typeface="Arial"/>
+                <a:cs typeface="Arial"/>
+                <a:sym typeface="Arial"/>
+              </a:rPr>
+              <a:t>Answers and code submissions for homework 2 are due </a:t>
+            </a:r>
+            <a:r>
+              <a:rPr lang="en-US" sz="1800" b="1" dirty="0">
+                <a:latin typeface="Arial"/>
+                <a:ea typeface="Arial"/>
+                <a:cs typeface="Arial"/>
+                <a:sym typeface="Arial"/>
+              </a:rPr>
+              <a:t>February 17, 9AM</a:t>
+            </a:r>
+          </a:p>
+          <a:p>
+            <a:pPr marL="285750" indent="-285750">
+              <a:lnSpc>
+                <a:spcPct val="100000"/>
+              </a:lnSpc>
+              <a:spcBef>
+                <a:spcPts val="0"/>
+              </a:spcBef>
+              <a:buSzPts val="3000"/>
+            </a:pPr>
+            <a:endParaRPr lang="en-US" sz="1800" dirty="0">
+              <a:latin typeface="Arial"/>
+              <a:ea typeface="Arial"/>
+              <a:cs typeface="Arial"/>
+              <a:sym typeface="Arial"/>
+            </a:endParaRPr>
+          </a:p>
+          <a:p>
+            <a:pPr marL="0" indent="0">
+              <a:lnSpc>
+                <a:spcPct val="100000"/>
+              </a:lnSpc>
+              <a:spcBef>
+                <a:spcPts val="0"/>
+              </a:spcBef>
+              <a:buSzPts val="3000"/>
+              <a:buNone/>
+            </a:pPr>
+            <a:r>
+              <a:rPr lang="en-US" sz="1800" b="1" dirty="0">
+                <a:solidFill>
+                  <a:srgbClr val="E84B36"/>
+                </a:solidFill>
+                <a:latin typeface="Arial"/>
+                <a:ea typeface="Arial"/>
+                <a:cs typeface="Arial"/>
+                <a:sym typeface="Arial"/>
+              </a:rPr>
+              <a:t>LabVIEW:</a:t>
+            </a:r>
+          </a:p>
+          <a:p>
+            <a:pPr marL="285750" indent="-285750">
+              <a:lnSpc>
+                <a:spcPct val="100000"/>
+              </a:lnSpc>
+              <a:spcBef>
+                <a:spcPts val="0"/>
+              </a:spcBef>
+              <a:buSzPts val="3000"/>
+            </a:pPr>
+            <a:r>
+              <a:rPr lang="en-US" sz="1800" dirty="0">
+                <a:latin typeface="Arial"/>
+                <a:ea typeface="Arial"/>
+                <a:cs typeface="Arial"/>
+                <a:sym typeface="Arial"/>
+              </a:rPr>
+              <a:t>All check-offs for </a:t>
+            </a:r>
+            <a:r>
+              <a:rPr lang="en-US" sz="1800" dirty="0">
+                <a:latin typeface="Arial"/>
+                <a:ea typeface="Arial"/>
+                <a:cs typeface="Arial"/>
+                <a:sym typeface="Arial"/>
+                <a:hlinkClick r:id="rId4"/>
+              </a:rPr>
+              <a:t>LabVIEW 2</a:t>
+            </a:r>
+            <a:r>
+              <a:rPr lang="en-US" sz="1800" dirty="0">
+                <a:latin typeface="Arial"/>
+                <a:ea typeface="Arial"/>
+                <a:cs typeface="Arial"/>
+                <a:sym typeface="Arial"/>
+              </a:rPr>
+              <a:t> are due </a:t>
+            </a:r>
+            <a:r>
+              <a:rPr lang="en-US" sz="1800" b="1" dirty="0">
+                <a:latin typeface="Arial"/>
+                <a:ea typeface="Arial"/>
+                <a:cs typeface="Arial"/>
+                <a:sym typeface="Arial"/>
+              </a:rPr>
+              <a:t>February 26, 5PM</a:t>
+            </a:r>
+          </a:p>
+          <a:p>
+            <a:pPr marL="285750" indent="-285750">
+              <a:lnSpc>
+                <a:spcPct val="100000"/>
+              </a:lnSpc>
+              <a:spcBef>
+                <a:spcPts val="0"/>
+              </a:spcBef>
+              <a:buSzPts val="3000"/>
+            </a:pPr>
+            <a:endParaRPr lang="en-US" sz="1800" b="1" dirty="0">
+              <a:latin typeface="Arial"/>
+              <a:ea typeface="Arial"/>
+              <a:cs typeface="Arial"/>
+              <a:sym typeface="Arial"/>
+            </a:endParaRPr>
+          </a:p>
+        </p:txBody>
+      </p:sp>
+      <p:sp>
+        <p:nvSpPr>
+          <p:cNvPr id="119" name="Google Shape;119;p29">
+            <a:extLst>
+              <a:ext uri="{FF2B5EF4-FFF2-40B4-BE49-F238E27FC236}">
+                <a16:creationId xmlns:a16="http://schemas.microsoft.com/office/drawing/2014/main" id="{19848B8C-9075-59EA-79FA-AF5B8BFAF8D4}"/>
+              </a:ext>
+            </a:extLst>
+          </p:cNvPr>
+          <p:cNvSpPr/>
+          <p:nvPr/>
+        </p:nvSpPr>
+        <p:spPr>
+          <a:xfrm rot="10800000" flipH="1">
+            <a:off x="0" y="0"/>
+            <a:ext cx="12192000" cy="868220"/>
+          </a:xfrm>
+          <a:prstGeom prst="rect">
+            <a:avLst/>
+          </a:prstGeom>
+          <a:solidFill>
+            <a:srgbClr val="13294B"/>
+          </a:solidFill>
+          <a:ln>
+            <a:noFill/>
+          </a:ln>
+        </p:spPr>
+        <p:txBody>
+          <a:bodyPr spcFirstLastPara="1" wrap="square" lIns="91425" tIns="45700" rIns="91425" bIns="45700" anchor="ctr" anchorCtr="0">
+            <a:noAutofit/>
+          </a:bodyPr>
+          <a:lstStyle/>
+          <a:p>
+            <a:pPr marL="0" marR="0" lvl="0" indent="0" algn="ctr" rtl="0">
+              <a:lnSpc>
+                <a:spcPct val="100000"/>
+              </a:lnSpc>
+              <a:spcBef>
+                <a:spcPts val="0"/>
+              </a:spcBef>
+              <a:spcAft>
+                <a:spcPts val="0"/>
+              </a:spcAft>
+              <a:buClr>
+                <a:schemeClr val="lt1"/>
+              </a:buClr>
+              <a:buSzPts val="1800"/>
+              <a:buFont typeface="Calibri"/>
+              <a:buNone/>
+            </a:pPr>
+            <a:endParaRPr sz="1800" b="0" i="0" u="none" strike="noStrike" cap="none">
+              <a:solidFill>
+                <a:srgbClr val="13294B"/>
+              </a:solidFill>
+              <a:latin typeface="Calibri"/>
+              <a:ea typeface="Calibri"/>
+              <a:cs typeface="Calibri"/>
+              <a:sym typeface="Calibri"/>
+            </a:endParaRPr>
+          </a:p>
+        </p:txBody>
+      </p:sp>
+      <p:sp>
+        <p:nvSpPr>
+          <p:cNvPr id="120" name="Google Shape;120;p29">
+            <a:extLst>
+              <a:ext uri="{FF2B5EF4-FFF2-40B4-BE49-F238E27FC236}">
+                <a16:creationId xmlns:a16="http://schemas.microsoft.com/office/drawing/2014/main" id="{6AE21486-AEEC-E367-96A5-81B49AD32D6A}"/>
+              </a:ext>
+            </a:extLst>
+          </p:cNvPr>
+          <p:cNvSpPr txBox="1"/>
+          <p:nvPr/>
+        </p:nvSpPr>
+        <p:spPr>
+          <a:xfrm>
+            <a:off x="376810" y="204051"/>
+            <a:ext cx="10910026" cy="461624"/>
+          </a:xfrm>
+          <a:prstGeom prst="rect">
+            <a:avLst/>
+          </a:prstGeom>
+          <a:noFill/>
+          <a:ln>
+            <a:noFill/>
+          </a:ln>
+        </p:spPr>
+        <p:txBody>
+          <a:bodyPr spcFirstLastPara="1" wrap="square" lIns="91425" tIns="45700" rIns="91425" bIns="45700" anchor="t" anchorCtr="0">
+            <a:spAutoFit/>
+          </a:bodyPr>
+          <a:lstStyle/>
+          <a:p>
+            <a:pPr marL="0" marR="0" lvl="0" indent="0" algn="l" rtl="0">
+              <a:lnSpc>
+                <a:spcPct val="100000"/>
+              </a:lnSpc>
+              <a:spcBef>
+                <a:spcPts val="0"/>
+              </a:spcBef>
+              <a:spcAft>
+                <a:spcPts val="0"/>
+              </a:spcAft>
+              <a:buClr>
+                <a:srgbClr val="000000"/>
+              </a:buClr>
+              <a:buSzPts val="2400"/>
+              <a:buFont typeface="Arial"/>
+              <a:buNone/>
+            </a:pPr>
+            <a:r>
+              <a:rPr lang="en-US" sz="2400" b="0" i="0" u="none" strike="noStrike" cap="none" dirty="0">
+                <a:solidFill>
+                  <a:schemeClr val="lt1"/>
+                </a:solidFill>
+                <a:latin typeface="Arial"/>
+                <a:ea typeface="Arial"/>
+                <a:cs typeface="Arial"/>
+                <a:sym typeface="Arial"/>
+              </a:rPr>
+              <a:t>Reminders</a:t>
+            </a:r>
+            <a:endParaRPr sz="2400" b="0" i="0" u="none" strike="noStrike" cap="none" dirty="0">
+              <a:solidFill>
+                <a:schemeClr val="lt1"/>
+              </a:solidFill>
+              <a:latin typeface="Arial"/>
+              <a:ea typeface="Arial"/>
+              <a:cs typeface="Arial"/>
+              <a:sym typeface="Arial"/>
+            </a:endParaRPr>
+          </a:p>
+        </p:txBody>
+      </p:sp>
+      <p:pic>
+        <p:nvPicPr>
+          <p:cNvPr id="121" name="Google Shape;121;p29">
+            <a:extLst>
+              <a:ext uri="{FF2B5EF4-FFF2-40B4-BE49-F238E27FC236}">
+                <a16:creationId xmlns:a16="http://schemas.microsoft.com/office/drawing/2014/main" id="{28CCE647-4D9B-354D-A2E9-718CA28CD750}"/>
+              </a:ext>
+            </a:extLst>
+          </p:cNvPr>
+          <p:cNvPicPr preferRelativeResize="0"/>
+          <p:nvPr/>
+        </p:nvPicPr>
+        <p:blipFill rotWithShape="1">
+          <a:blip r:embed="rId5">
+            <a:alphaModFix/>
+          </a:blip>
+          <a:srcRect/>
+          <a:stretch/>
+        </p:blipFill>
+        <p:spPr>
+          <a:xfrm>
+            <a:off x="11557509" y="233819"/>
+            <a:ext cx="271308" cy="389810"/>
+          </a:xfrm>
+          <a:prstGeom prst="rect">
+            <a:avLst/>
+          </a:prstGeom>
+          <a:noFill/>
+          <a:ln>
+            <a:noFill/>
+          </a:ln>
+        </p:spPr>
+      </p:pic>
+      <p:sp>
+        <p:nvSpPr>
+          <p:cNvPr id="122" name="Google Shape;122;p29">
+            <a:extLst>
+              <a:ext uri="{FF2B5EF4-FFF2-40B4-BE49-F238E27FC236}">
+                <a16:creationId xmlns:a16="http://schemas.microsoft.com/office/drawing/2014/main" id="{FAC87A64-580A-4863-38B3-4D1504C83F5F}"/>
+              </a:ext>
+            </a:extLst>
+          </p:cNvPr>
+          <p:cNvSpPr txBox="1"/>
+          <p:nvPr/>
+        </p:nvSpPr>
+        <p:spPr>
+          <a:xfrm>
+            <a:off x="9335597" y="6524381"/>
+            <a:ext cx="2473415" cy="230792"/>
+          </a:xfrm>
+          <a:prstGeom prst="rect">
+            <a:avLst/>
+          </a:prstGeom>
+          <a:noFill/>
+          <a:ln>
+            <a:noFill/>
+          </a:ln>
+        </p:spPr>
+        <p:txBody>
+          <a:bodyPr spcFirstLastPara="1" wrap="square" lIns="91425" tIns="45700" rIns="91425" bIns="45700" anchor="t" anchorCtr="0">
+            <a:spAutoFit/>
+          </a:bodyPr>
+          <a:lstStyle/>
+          <a:p>
+            <a:pPr marL="0" marR="0" lvl="0" indent="0" algn="r" rtl="0">
+              <a:lnSpc>
+                <a:spcPct val="100000"/>
+              </a:lnSpc>
+              <a:spcBef>
+                <a:spcPts val="0"/>
+              </a:spcBef>
+              <a:spcAft>
+                <a:spcPts val="0"/>
+              </a:spcAft>
+              <a:buNone/>
+            </a:pPr>
+            <a:r>
+              <a:rPr lang="en-US" sz="900" b="0" i="0" u="none" strike="noStrike" cap="none">
+                <a:solidFill>
+                  <a:srgbClr val="13294B"/>
+                </a:solidFill>
+                <a:latin typeface="Arial"/>
+                <a:ea typeface="Arial"/>
+                <a:cs typeface="Arial"/>
+                <a:sym typeface="Arial"/>
+              </a:rPr>
+              <a:t>GRAINGER ENGINEERING</a:t>
+            </a:r>
+            <a:endParaRPr/>
+          </a:p>
+        </p:txBody>
+      </p:sp>
+      <p:sp>
+        <p:nvSpPr>
+          <p:cNvPr id="123" name="Google Shape;123;p29">
+            <a:extLst>
+              <a:ext uri="{FF2B5EF4-FFF2-40B4-BE49-F238E27FC236}">
+                <a16:creationId xmlns:a16="http://schemas.microsoft.com/office/drawing/2014/main" id="{23649EAB-2DB3-2DA4-9AD9-5D94AEE695E1}"/>
+              </a:ext>
+            </a:extLst>
+          </p:cNvPr>
+          <p:cNvSpPr txBox="1"/>
+          <p:nvPr/>
+        </p:nvSpPr>
+        <p:spPr>
+          <a:xfrm>
+            <a:off x="376807" y="6524381"/>
+            <a:ext cx="7991337" cy="230792"/>
+          </a:xfrm>
+          <a:prstGeom prst="rect">
+            <a:avLst/>
+          </a:prstGeom>
+          <a:noFill/>
+          <a:ln>
+            <a:noFill/>
+          </a:ln>
+        </p:spPr>
+        <p:txBody>
+          <a:bodyPr spcFirstLastPara="1" wrap="square" lIns="91425" tIns="45700" rIns="91425" bIns="45700" anchor="t" anchorCtr="0">
+            <a:spAutoFit/>
+          </a:bodyPr>
+          <a:lstStyle/>
+          <a:p>
+            <a:pPr marL="0" marR="0" lvl="0" indent="0" algn="l" rtl="0">
+              <a:lnSpc>
+                <a:spcPct val="100000"/>
+              </a:lnSpc>
+              <a:spcBef>
+                <a:spcPts val="0"/>
+              </a:spcBef>
+              <a:spcAft>
+                <a:spcPts val="0"/>
+              </a:spcAft>
+              <a:buNone/>
+            </a:pPr>
+            <a:r>
+              <a:rPr lang="en-US" sz="900" dirty="0">
+                <a:solidFill>
+                  <a:srgbClr val="13294B"/>
+                </a:solidFill>
+              </a:rPr>
+              <a:t>SYSTEMS ENGINEERING </a:t>
+            </a:r>
+            <a:endParaRPr dirty="0"/>
+          </a:p>
+        </p:txBody>
+      </p:sp>
+      <p:grpSp>
+        <p:nvGrpSpPr>
+          <p:cNvPr id="124" name="Google Shape;124;p29">
+            <a:extLst>
+              <a:ext uri="{FF2B5EF4-FFF2-40B4-BE49-F238E27FC236}">
+                <a16:creationId xmlns:a16="http://schemas.microsoft.com/office/drawing/2014/main" id="{D41F8E2C-2780-2776-E8ED-542B082247FE}"/>
+              </a:ext>
+            </a:extLst>
+          </p:cNvPr>
+          <p:cNvGrpSpPr/>
+          <p:nvPr/>
+        </p:nvGrpSpPr>
+        <p:grpSpPr>
+          <a:xfrm>
+            <a:off x="4066674" y="6601537"/>
+            <a:ext cx="5233412" cy="70446"/>
+            <a:chOff x="4033424" y="6601537"/>
+            <a:chExt cx="5233412" cy="70446"/>
+          </a:xfrm>
+        </p:grpSpPr>
+        <p:cxnSp>
+          <p:nvCxnSpPr>
+            <p:cNvPr id="125" name="Google Shape;125;p29">
+              <a:extLst>
+                <a:ext uri="{FF2B5EF4-FFF2-40B4-BE49-F238E27FC236}">
+                  <a16:creationId xmlns:a16="http://schemas.microsoft.com/office/drawing/2014/main" id="{1D628D6E-10A9-03E9-659C-F8F2D0023C66}"/>
+                </a:ext>
+              </a:extLst>
+            </p:cNvPr>
+            <p:cNvCxnSpPr/>
+            <p:nvPr/>
+          </p:nvCxnSpPr>
+          <p:spPr>
+            <a:xfrm rot="10800000">
+              <a:off x="4033424" y="6639606"/>
+              <a:ext cx="5164651" cy="0"/>
+            </a:xfrm>
+            <a:prstGeom prst="straightConnector1">
+              <a:avLst/>
+            </a:prstGeom>
+            <a:noFill/>
+            <a:ln w="9525" cap="flat" cmpd="sng">
+              <a:solidFill>
+                <a:srgbClr val="13294B"/>
+              </a:solidFill>
+              <a:prstDash val="solid"/>
+              <a:round/>
+              <a:headEnd type="none" w="sm" len="sm"/>
+              <a:tailEnd type="none" w="sm" len="sm"/>
+            </a:ln>
+          </p:spPr>
+        </p:cxnSp>
+        <p:sp>
+          <p:nvSpPr>
+            <p:cNvPr id="126" name="Google Shape;126;p29">
+              <a:extLst>
+                <a:ext uri="{FF2B5EF4-FFF2-40B4-BE49-F238E27FC236}">
+                  <a16:creationId xmlns:a16="http://schemas.microsoft.com/office/drawing/2014/main" id="{7BEB3CD3-0F72-FD08-8FA5-00AD37965F20}"/>
+                </a:ext>
+              </a:extLst>
+            </p:cNvPr>
+            <p:cNvSpPr/>
+            <p:nvPr/>
+          </p:nvSpPr>
+          <p:spPr>
+            <a:xfrm>
+              <a:off x="9196390" y="6601537"/>
+              <a:ext cx="70446" cy="70446"/>
+            </a:xfrm>
+            <a:prstGeom prst="ellipse">
+              <a:avLst/>
+            </a:prstGeom>
+            <a:solidFill>
+              <a:srgbClr val="13294B"/>
+            </a:solidFill>
+            <a:ln>
+              <a:noFill/>
+            </a:ln>
+          </p:spPr>
+          <p:txBody>
+            <a:bodyPr spcFirstLastPara="1" wrap="square" lIns="91425" tIns="45700" rIns="91425" bIns="45700" anchor="ctr" anchorCtr="0">
+              <a:noAutofit/>
+            </a:bodyPr>
+            <a:lstStyle/>
+            <a:p>
+              <a:pPr marL="0" marR="0" lvl="0" indent="0" algn="ctr" rtl="0">
+                <a:lnSpc>
+                  <a:spcPct val="100000"/>
+                </a:lnSpc>
+                <a:spcBef>
+                  <a:spcPts val="0"/>
+                </a:spcBef>
+                <a:spcAft>
+                  <a:spcPts val="0"/>
+                </a:spcAft>
+                <a:buNone/>
+              </a:pPr>
+              <a:endParaRPr sz="1400" b="0" i="0" u="none" strike="noStrike" cap="none">
+                <a:solidFill>
+                  <a:srgbClr val="13294B"/>
+                </a:solidFill>
+                <a:latin typeface="Arial"/>
+                <a:ea typeface="Arial"/>
+                <a:cs typeface="Arial"/>
+                <a:sym typeface="Arial"/>
+              </a:endParaRPr>
+            </a:p>
+          </p:txBody>
+        </p:sp>
+      </p:grpSp>
+    </p:spTree>
+    <p:extLst>
+      <p:ext uri="{BB962C8B-B14F-4D97-AF65-F5344CB8AC3E}">
+        <p14:creationId xmlns:p14="http://schemas.microsoft.com/office/powerpoint/2010/main" val="3795841031"/>
+      </p:ext>
+    </p:extLst>
+  </p:cSld>
+  <p:clrMapOvr>
+    <a:masterClrMapping/>
+  </p:clrMapOvr>
+</p:sld>
+</file>
+
+<file path=ppt/slides/slide20.xml><?xml version="1.0" encoding="utf-8"?>
 <p:sld xmlns:a="http://schemas.openxmlformats.org/drawingml/2006/main" xmlns:r="http://schemas.openxmlformats.org/officeDocument/2006/relationships" xmlns:p="http://schemas.openxmlformats.org/presentationml/2006/main">
   <p:cSld>
     <p:bg>
@@ -21490,7 +24877,7 @@
 </p:sld>
 </file>
 
-<file path=ppt/slides/slide18.xml><?xml version="1.0" encoding="utf-8"?>
+<file path=ppt/slides/slide21.xml><?xml version="1.0" encoding="utf-8"?>
 <p:sld xmlns:a="http://schemas.openxmlformats.org/drawingml/2006/main" xmlns:r="http://schemas.openxmlformats.org/officeDocument/2006/relationships" xmlns:p="http://schemas.openxmlformats.org/presentationml/2006/main">
   <p:cSld>
     <p:bg>
@@ -21847,7 +25234,7 @@
 </p:sld>
 </file>
 
-<file path=ppt/slides/slide19.xml><?xml version="1.0" encoding="utf-8"?>
+<file path=ppt/slides/slide22.xml><?xml version="1.0" encoding="utf-8"?>
 <p:sld xmlns:a="http://schemas.openxmlformats.org/drawingml/2006/main" xmlns:r="http://schemas.openxmlformats.org/officeDocument/2006/relationships" xmlns:p="http://schemas.openxmlformats.org/presentationml/2006/main">
   <p:cSld>
     <p:bg>
@@ -21905,1073 +25292,6 @@
         </p:spPr>
       </p:pic>
     </p:spTree>
-  </p:cSld>
-  <p:clrMapOvr>
-    <a:masterClrMapping/>
-  </p:clrMapOvr>
-</p:sld>
-</file>
-
-<file path=ppt/slides/slide2.xml><?xml version="1.0" encoding="utf-8"?>
-<p:sld xmlns:a="http://schemas.openxmlformats.org/drawingml/2006/main" xmlns:r="http://schemas.openxmlformats.org/officeDocument/2006/relationships" xmlns:p="http://schemas.openxmlformats.org/presentationml/2006/main">
-  <p:cSld>
-    <p:spTree>
-      <p:nvGrpSpPr>
-        <p:cNvPr id="1" name="Shape 117">
-          <a:extLst>
-            <a:ext uri="{FF2B5EF4-FFF2-40B4-BE49-F238E27FC236}">
-              <a16:creationId xmlns:a16="http://schemas.microsoft.com/office/drawing/2014/main" id="{781D3E48-EB5B-86EE-C4D9-54116487B2DB}"/>
-            </a:ext>
-          </a:extLst>
-        </p:cNvPr>
-        <p:cNvGrpSpPr/>
-        <p:nvPr/>
-      </p:nvGrpSpPr>
-      <p:grpSpPr>
-        <a:xfrm>
-          <a:off x="0" y="0"/>
-          <a:ext cx="0" cy="0"/>
-          <a:chOff x="0" y="0"/>
-          <a:chExt cx="0" cy="0"/>
-        </a:xfrm>
-      </p:grpSpPr>
-      <p:sp>
-        <p:nvSpPr>
-          <p:cNvPr id="118" name="Google Shape;118;p29">
-            <a:extLst>
-              <a:ext uri="{FF2B5EF4-FFF2-40B4-BE49-F238E27FC236}">
-                <a16:creationId xmlns:a16="http://schemas.microsoft.com/office/drawing/2014/main" id="{3BCC2F8C-3A4A-AD98-3682-D9499379E419}"/>
-              </a:ext>
-            </a:extLst>
-          </p:cNvPr>
-          <p:cNvSpPr txBox="1">
-            <a:spLocks noGrp="1"/>
-          </p:cNvSpPr>
-          <p:nvPr>
-            <p:ph type="body" idx="1"/>
-          </p:nvPr>
-        </p:nvSpPr>
-        <p:spPr>
-          <a:xfrm>
-            <a:off x="376809" y="1334279"/>
-            <a:ext cx="11177401" cy="4821102"/>
-          </a:xfrm>
-          <a:prstGeom prst="rect">
-            <a:avLst/>
-          </a:prstGeom>
-          <a:noFill/>
-          <a:ln>
-            <a:noFill/>
-          </a:ln>
-        </p:spPr>
-        <p:txBody>
-          <a:bodyPr spcFirstLastPara="1" wrap="square" lIns="91425" tIns="45700" rIns="91425" bIns="45700" anchor="t" anchorCtr="0">
-            <a:noAutofit/>
-          </a:bodyPr>
-          <a:lstStyle/>
-          <a:p>
-            <a:pPr marL="0" lvl="0" indent="0" algn="l" rtl="0">
-              <a:lnSpc>
-                <a:spcPct val="100000"/>
-              </a:lnSpc>
-              <a:spcBef>
-                <a:spcPts val="0"/>
-              </a:spcBef>
-              <a:spcAft>
-                <a:spcPts val="0"/>
-              </a:spcAft>
-              <a:buSzPts val="3000"/>
-              <a:buNone/>
-            </a:pPr>
-            <a:r>
-              <a:rPr lang="en-US" sz="1800" b="1" dirty="0">
-                <a:solidFill>
-                  <a:srgbClr val="E84B36"/>
-                </a:solidFill>
-                <a:latin typeface="Arial"/>
-                <a:ea typeface="Arial"/>
-                <a:cs typeface="Arial"/>
-                <a:sym typeface="Arial"/>
-              </a:rPr>
-              <a:t>Office Hours:</a:t>
-            </a:r>
-            <a:endParaRPr lang="en-US" sz="2600" b="1" dirty="0">
-              <a:solidFill>
-                <a:srgbClr val="E84B36"/>
-              </a:solidFill>
-              <a:latin typeface="Arial"/>
-              <a:ea typeface="Arial"/>
-              <a:cs typeface="Arial"/>
-              <a:sym typeface="Arial"/>
-            </a:endParaRPr>
-          </a:p>
-          <a:p>
-            <a:pPr marL="285750" indent="-285750">
-              <a:lnSpc>
-                <a:spcPct val="100000"/>
-              </a:lnSpc>
-              <a:spcBef>
-                <a:spcPts val="0"/>
-              </a:spcBef>
-              <a:buSzPts val="3000"/>
-            </a:pPr>
-            <a:r>
-              <a:rPr lang="en-US" sz="1800" b="1" dirty="0">
-                <a:solidFill>
-                  <a:schemeClr val="dk1"/>
-                </a:solidFill>
-                <a:latin typeface="Arial"/>
-                <a:ea typeface="Arial"/>
-                <a:cs typeface="Arial"/>
-                <a:sym typeface="Arial"/>
-              </a:rPr>
-              <a:t>Monday: </a:t>
-            </a:r>
-            <a:r>
-              <a:rPr lang="en-US" sz="1800" dirty="0">
-                <a:solidFill>
-                  <a:schemeClr val="dk1"/>
-                </a:solidFill>
-                <a:latin typeface="Arial"/>
-                <a:ea typeface="Arial"/>
-                <a:cs typeface="Arial"/>
-                <a:sym typeface="Arial"/>
-              </a:rPr>
-              <a:t>4-6 PM</a:t>
-            </a:r>
-            <a:r>
-              <a:rPr lang="en-US" sz="1800" b="1" dirty="0">
-                <a:solidFill>
-                  <a:schemeClr val="dk1"/>
-                </a:solidFill>
-                <a:latin typeface="Arial"/>
-                <a:ea typeface="Arial"/>
-                <a:cs typeface="Arial"/>
-                <a:sym typeface="Arial"/>
-              </a:rPr>
-              <a:t>, </a:t>
-            </a:r>
-            <a:r>
-              <a:rPr lang="en-US" sz="1800" dirty="0">
-                <a:solidFill>
-                  <a:schemeClr val="dk1"/>
-                </a:solidFill>
-                <a:latin typeface="Arial"/>
-                <a:ea typeface="Arial"/>
-                <a:cs typeface="Arial"/>
-                <a:sym typeface="Arial"/>
-              </a:rPr>
-              <a:t>Neel</a:t>
-            </a:r>
-          </a:p>
-          <a:p>
-            <a:pPr marL="285750" indent="-285750">
-              <a:lnSpc>
-                <a:spcPct val="100000"/>
-              </a:lnSpc>
-              <a:spcBef>
-                <a:spcPts val="0"/>
-              </a:spcBef>
-              <a:buSzPts val="3000"/>
-            </a:pPr>
-            <a:r>
-              <a:rPr lang="en-US" sz="1800" b="1" dirty="0">
-                <a:latin typeface="Arial"/>
-                <a:ea typeface="Arial"/>
-                <a:cs typeface="Arial"/>
-                <a:sym typeface="Arial"/>
-              </a:rPr>
-              <a:t>Tuesday: </a:t>
-            </a:r>
-            <a:r>
-              <a:rPr lang="en-US" sz="1800" dirty="0">
-                <a:latin typeface="Arial"/>
-                <a:ea typeface="Arial"/>
-                <a:cs typeface="Arial"/>
-                <a:sym typeface="Arial"/>
-              </a:rPr>
-              <a:t>11-1 PM</a:t>
-            </a:r>
-            <a:r>
-              <a:rPr lang="en-US" sz="1800" b="1" dirty="0">
-                <a:latin typeface="Arial"/>
-                <a:ea typeface="Arial"/>
-                <a:cs typeface="Arial"/>
-                <a:sym typeface="Arial"/>
-              </a:rPr>
-              <a:t>, </a:t>
-            </a:r>
-            <a:r>
-              <a:rPr lang="en-US" sz="1800" dirty="0">
-                <a:latin typeface="Arial"/>
-                <a:ea typeface="Arial"/>
-                <a:cs typeface="Arial"/>
-                <a:sym typeface="Arial"/>
-              </a:rPr>
-              <a:t>Lakshmi</a:t>
-            </a:r>
-          </a:p>
-          <a:p>
-            <a:pPr marL="285750" indent="-285750">
-              <a:lnSpc>
-                <a:spcPct val="100000"/>
-              </a:lnSpc>
-              <a:spcBef>
-                <a:spcPts val="0"/>
-              </a:spcBef>
-              <a:buSzPts val="3000"/>
-            </a:pPr>
-            <a:r>
-              <a:rPr lang="en-US" sz="1800" b="1" dirty="0">
-                <a:solidFill>
-                  <a:schemeClr val="dk1"/>
-                </a:solidFill>
-                <a:latin typeface="Arial"/>
-                <a:ea typeface="Arial"/>
-                <a:cs typeface="Arial"/>
-                <a:sym typeface="Arial"/>
-              </a:rPr>
-              <a:t>Tuesday: </a:t>
-            </a:r>
-            <a:r>
-              <a:rPr lang="en-US" sz="1800" dirty="0">
-                <a:latin typeface="Arial"/>
-                <a:ea typeface="Arial"/>
-                <a:cs typeface="Arial"/>
-                <a:sym typeface="Arial"/>
-              </a:rPr>
-              <a:t>1-3 PM</a:t>
-            </a:r>
-            <a:r>
-              <a:rPr lang="en-US" sz="1800" b="1" dirty="0">
-                <a:latin typeface="Arial"/>
-                <a:ea typeface="Arial"/>
-                <a:cs typeface="Arial"/>
-                <a:sym typeface="Arial"/>
-              </a:rPr>
-              <a:t>, </a:t>
-            </a:r>
-            <a:r>
-              <a:rPr lang="en-US" sz="1800" dirty="0">
-                <a:latin typeface="Arial"/>
-                <a:ea typeface="Arial"/>
-                <a:cs typeface="Arial"/>
-                <a:sym typeface="Arial"/>
-              </a:rPr>
-              <a:t>Samuel</a:t>
-            </a:r>
-          </a:p>
-          <a:p>
-            <a:pPr marL="285750" indent="-285750">
-              <a:lnSpc>
-                <a:spcPct val="100000"/>
-              </a:lnSpc>
-              <a:spcBef>
-                <a:spcPts val="0"/>
-              </a:spcBef>
-              <a:buSzPts val="3000"/>
-            </a:pPr>
-            <a:r>
-              <a:rPr lang="en-US" sz="1800" b="1" dirty="0">
-                <a:solidFill>
-                  <a:schemeClr val="dk1"/>
-                </a:solidFill>
-                <a:latin typeface="Arial"/>
-                <a:ea typeface="Arial"/>
-                <a:cs typeface="Arial"/>
-                <a:sym typeface="Arial"/>
-              </a:rPr>
-              <a:t>Tuesday: </a:t>
-            </a:r>
-            <a:r>
-              <a:rPr lang="en-US" sz="1800" dirty="0">
-                <a:solidFill>
-                  <a:schemeClr val="dk1"/>
-                </a:solidFill>
-                <a:latin typeface="Arial"/>
-                <a:ea typeface="Arial"/>
-                <a:cs typeface="Arial"/>
-                <a:sym typeface="Arial"/>
-              </a:rPr>
-              <a:t>2-5 PM</a:t>
-            </a:r>
-            <a:r>
-              <a:rPr lang="en-US" sz="1800" b="1" dirty="0">
-                <a:solidFill>
-                  <a:schemeClr val="dk1"/>
-                </a:solidFill>
-                <a:latin typeface="Arial"/>
-                <a:ea typeface="Arial"/>
-                <a:cs typeface="Arial"/>
-                <a:sym typeface="Arial"/>
-              </a:rPr>
-              <a:t>, </a:t>
-            </a:r>
-            <a:r>
-              <a:rPr lang="en-US" sz="1800" dirty="0">
-                <a:solidFill>
-                  <a:schemeClr val="dk1"/>
-                </a:solidFill>
-                <a:latin typeface="Arial"/>
-                <a:ea typeface="Arial"/>
-                <a:cs typeface="Arial"/>
-                <a:sym typeface="Arial"/>
-              </a:rPr>
-              <a:t>Dan &amp; Marius</a:t>
-            </a:r>
-          </a:p>
-          <a:p>
-            <a:pPr marL="285750" indent="-285750">
-              <a:lnSpc>
-                <a:spcPct val="100000"/>
-              </a:lnSpc>
-              <a:spcBef>
-                <a:spcPts val="0"/>
-              </a:spcBef>
-              <a:buSzPts val="3000"/>
-            </a:pPr>
-            <a:endParaRPr lang="en-US" sz="1800" b="1" dirty="0">
-              <a:latin typeface="Arial"/>
-              <a:ea typeface="Arial"/>
-              <a:cs typeface="Arial"/>
-              <a:sym typeface="Arial"/>
-            </a:endParaRPr>
-          </a:p>
-          <a:p>
-            <a:pPr marL="0" indent="0">
-              <a:lnSpc>
-                <a:spcPct val="100000"/>
-              </a:lnSpc>
-              <a:spcBef>
-                <a:spcPts val="0"/>
-              </a:spcBef>
-              <a:buSzPts val="3000"/>
-              <a:buNone/>
-            </a:pPr>
-            <a:r>
-              <a:rPr lang="en-US" sz="1800" b="1" dirty="0">
-                <a:solidFill>
-                  <a:srgbClr val="E84B36"/>
-                </a:solidFill>
-                <a:latin typeface="Arial"/>
-                <a:ea typeface="Arial"/>
-                <a:cs typeface="Arial"/>
-                <a:sym typeface="Arial"/>
-              </a:rPr>
-              <a:t>Lab: </a:t>
-            </a:r>
-            <a:r>
-              <a:rPr lang="en-US" sz="1800" dirty="0">
-                <a:latin typeface="Arial"/>
-                <a:ea typeface="Arial"/>
-                <a:cs typeface="Arial"/>
-                <a:sym typeface="Arial"/>
-              </a:rPr>
-              <a:t>Starting Lab 3 this week. This a 2-week lab!</a:t>
-            </a:r>
-            <a:endParaRPr lang="en-US" sz="1800" dirty="0">
-              <a:solidFill>
-                <a:srgbClr val="E84B36"/>
-              </a:solidFill>
-              <a:latin typeface="Arial"/>
-              <a:ea typeface="Arial"/>
-              <a:cs typeface="Arial"/>
-              <a:sym typeface="Arial"/>
-            </a:endParaRPr>
-          </a:p>
-          <a:p>
-            <a:pPr marL="0" indent="0">
-              <a:lnSpc>
-                <a:spcPct val="100000"/>
-              </a:lnSpc>
-              <a:spcBef>
-                <a:spcPts val="0"/>
-              </a:spcBef>
-              <a:buSzPts val="3000"/>
-              <a:buNone/>
-            </a:pPr>
-            <a:endParaRPr lang="en-US" sz="1800" b="1" dirty="0">
-              <a:solidFill>
-                <a:srgbClr val="E84B36"/>
-              </a:solidFill>
-              <a:latin typeface="Arial"/>
-              <a:ea typeface="Arial"/>
-              <a:cs typeface="Arial"/>
-              <a:sym typeface="Arial"/>
-            </a:endParaRPr>
-          </a:p>
-          <a:p>
-            <a:pPr marL="0" indent="0">
-              <a:lnSpc>
-                <a:spcPct val="100000"/>
-              </a:lnSpc>
-              <a:spcBef>
-                <a:spcPts val="0"/>
-              </a:spcBef>
-              <a:buSzPts val="3000"/>
-              <a:buNone/>
-            </a:pPr>
-            <a:r>
-              <a:rPr lang="en-US" sz="1800" b="1" dirty="0" err="1">
-                <a:solidFill>
-                  <a:srgbClr val="E84B36"/>
-                </a:solidFill>
-                <a:latin typeface="Arial"/>
-                <a:ea typeface="Arial"/>
-                <a:cs typeface="Arial"/>
-                <a:sym typeface="Arial"/>
-              </a:rPr>
-              <a:t>Homeworks</a:t>
-            </a:r>
-            <a:r>
-              <a:rPr lang="en-US" sz="1800" b="1" dirty="0">
-                <a:solidFill>
-                  <a:srgbClr val="E84B36"/>
-                </a:solidFill>
-                <a:latin typeface="Arial"/>
-                <a:ea typeface="Arial"/>
-                <a:cs typeface="Arial"/>
-                <a:sym typeface="Arial"/>
-              </a:rPr>
-              <a:t>:</a:t>
-            </a:r>
-          </a:p>
-          <a:p>
-            <a:pPr marL="285750" indent="-285750">
-              <a:lnSpc>
-                <a:spcPct val="100000"/>
-              </a:lnSpc>
-              <a:spcBef>
-                <a:spcPts val="0"/>
-              </a:spcBef>
-              <a:buSzPts val="3000"/>
-            </a:pPr>
-            <a:r>
-              <a:rPr lang="en-US" sz="1800" dirty="0">
-                <a:latin typeface="Arial"/>
-                <a:ea typeface="Arial"/>
-                <a:cs typeface="Arial"/>
-                <a:sym typeface="Arial"/>
-              </a:rPr>
-              <a:t>Check-offs for </a:t>
-            </a:r>
-            <a:r>
-              <a:rPr lang="en-US" sz="1800" dirty="0">
-                <a:latin typeface="Arial"/>
-                <a:ea typeface="Arial"/>
-                <a:cs typeface="Arial"/>
-                <a:sym typeface="Arial"/>
-                <a:hlinkClick r:id="rId3"/>
-              </a:rPr>
-              <a:t>homework 2</a:t>
-            </a:r>
-            <a:r>
-              <a:rPr lang="en-US" sz="1800" dirty="0">
-                <a:latin typeface="Arial"/>
-                <a:ea typeface="Arial"/>
-                <a:cs typeface="Arial"/>
-                <a:sym typeface="Arial"/>
-              </a:rPr>
-              <a:t> Ex 1 &amp; 2 are due </a:t>
-            </a:r>
-            <a:r>
-              <a:rPr lang="en-US" sz="1800" b="1" dirty="0">
-                <a:latin typeface="Arial"/>
-                <a:ea typeface="Arial"/>
-                <a:cs typeface="Arial"/>
-                <a:sym typeface="Arial"/>
-              </a:rPr>
-              <a:t>February 17, 5PM (The end of office hours)</a:t>
-            </a:r>
-          </a:p>
-          <a:p>
-            <a:pPr marL="285750" indent="-285750">
-              <a:lnSpc>
-                <a:spcPct val="100000"/>
-              </a:lnSpc>
-              <a:spcBef>
-                <a:spcPts val="0"/>
-              </a:spcBef>
-              <a:buSzPts val="3000"/>
-            </a:pPr>
-            <a:r>
-              <a:rPr lang="en-US" sz="1800" dirty="0">
-                <a:latin typeface="Arial"/>
-                <a:ea typeface="Arial"/>
-                <a:cs typeface="Arial"/>
-                <a:sym typeface="Arial"/>
-              </a:rPr>
-              <a:t>Check-offs for </a:t>
-            </a:r>
-            <a:r>
-              <a:rPr lang="en-US" sz="1800" dirty="0">
-                <a:latin typeface="Arial"/>
-                <a:ea typeface="Arial"/>
-                <a:cs typeface="Arial"/>
-                <a:sym typeface="Arial"/>
-                <a:hlinkClick r:id="rId3"/>
-              </a:rPr>
-              <a:t>homework 2</a:t>
-            </a:r>
-            <a:r>
-              <a:rPr lang="en-US" sz="1800" dirty="0">
-                <a:latin typeface="Arial"/>
-                <a:ea typeface="Arial"/>
-                <a:cs typeface="Arial"/>
-                <a:sym typeface="Arial"/>
-              </a:rPr>
-              <a:t> Ex 3 &amp; 4 are due </a:t>
-            </a:r>
-            <a:r>
-              <a:rPr lang="en-US" sz="1800" b="1" dirty="0">
-                <a:latin typeface="Arial"/>
-                <a:ea typeface="Arial"/>
-                <a:cs typeface="Arial"/>
-                <a:sym typeface="Arial"/>
-              </a:rPr>
-              <a:t>February 24, 5PM (The end of office hours)</a:t>
-            </a:r>
-            <a:endParaRPr lang="en-US" sz="1800" dirty="0">
-              <a:latin typeface="Arial"/>
-              <a:ea typeface="Arial"/>
-              <a:cs typeface="Arial"/>
-              <a:sym typeface="Arial"/>
-            </a:endParaRPr>
-          </a:p>
-          <a:p>
-            <a:pPr marL="285750" indent="-285750">
-              <a:lnSpc>
-                <a:spcPct val="100000"/>
-              </a:lnSpc>
-              <a:spcBef>
-                <a:spcPts val="0"/>
-              </a:spcBef>
-              <a:buSzPts val="3000"/>
-            </a:pPr>
-            <a:r>
-              <a:rPr lang="en-US" sz="1800" dirty="0">
-                <a:latin typeface="Arial"/>
-                <a:ea typeface="Arial"/>
-                <a:cs typeface="Arial"/>
-                <a:sym typeface="Arial"/>
-              </a:rPr>
-              <a:t>Answers and code submissions for homework 2 are due </a:t>
-            </a:r>
-            <a:r>
-              <a:rPr lang="en-US" sz="1800" b="1" dirty="0">
-                <a:latin typeface="Arial"/>
-                <a:ea typeface="Arial"/>
-                <a:cs typeface="Arial"/>
-                <a:sym typeface="Arial"/>
-              </a:rPr>
-              <a:t>February 17, 9AM</a:t>
-            </a:r>
-          </a:p>
-          <a:p>
-            <a:pPr marL="285750" indent="-285750">
-              <a:lnSpc>
-                <a:spcPct val="100000"/>
-              </a:lnSpc>
-              <a:spcBef>
-                <a:spcPts val="0"/>
-              </a:spcBef>
-              <a:buSzPts val="3000"/>
-            </a:pPr>
-            <a:endParaRPr lang="en-US" sz="1800" dirty="0">
-              <a:latin typeface="Arial"/>
-              <a:ea typeface="Arial"/>
-              <a:cs typeface="Arial"/>
-              <a:sym typeface="Arial"/>
-            </a:endParaRPr>
-          </a:p>
-          <a:p>
-            <a:pPr marL="0" indent="0">
-              <a:lnSpc>
-                <a:spcPct val="100000"/>
-              </a:lnSpc>
-              <a:spcBef>
-                <a:spcPts val="0"/>
-              </a:spcBef>
-              <a:buSzPts val="3000"/>
-              <a:buNone/>
-            </a:pPr>
-            <a:r>
-              <a:rPr lang="en-US" sz="1800" b="1" dirty="0">
-                <a:solidFill>
-                  <a:srgbClr val="E84B36"/>
-                </a:solidFill>
-                <a:latin typeface="Arial"/>
-                <a:ea typeface="Arial"/>
-                <a:cs typeface="Arial"/>
-                <a:sym typeface="Arial"/>
-              </a:rPr>
-              <a:t>LabVIEW:</a:t>
-            </a:r>
-          </a:p>
-          <a:p>
-            <a:pPr marL="285750" indent="-285750">
-              <a:lnSpc>
-                <a:spcPct val="100000"/>
-              </a:lnSpc>
-              <a:spcBef>
-                <a:spcPts val="0"/>
-              </a:spcBef>
-              <a:buSzPts val="3000"/>
-            </a:pPr>
-            <a:r>
-              <a:rPr lang="en-US" sz="1800" dirty="0">
-                <a:latin typeface="Arial"/>
-                <a:ea typeface="Arial"/>
-                <a:cs typeface="Arial"/>
-                <a:sym typeface="Arial"/>
-              </a:rPr>
-              <a:t>All check-offs for </a:t>
-            </a:r>
-            <a:r>
-              <a:rPr lang="en-US" sz="1800" dirty="0">
-                <a:latin typeface="Arial"/>
-                <a:ea typeface="Arial"/>
-                <a:cs typeface="Arial"/>
-                <a:sym typeface="Arial"/>
-                <a:hlinkClick r:id="rId4"/>
-              </a:rPr>
-              <a:t>LabVIEW 2</a:t>
-            </a:r>
-            <a:r>
-              <a:rPr lang="en-US" sz="1800" dirty="0">
-                <a:latin typeface="Arial"/>
-                <a:ea typeface="Arial"/>
-                <a:cs typeface="Arial"/>
-                <a:sym typeface="Arial"/>
-              </a:rPr>
-              <a:t> are due </a:t>
-            </a:r>
-            <a:r>
-              <a:rPr lang="en-US" sz="1800" b="1" dirty="0">
-                <a:latin typeface="Arial"/>
-                <a:ea typeface="Arial"/>
-                <a:cs typeface="Arial"/>
-                <a:sym typeface="Arial"/>
-              </a:rPr>
-              <a:t>February 26, 5PM</a:t>
-            </a:r>
-          </a:p>
-          <a:p>
-            <a:pPr marL="285750" indent="-285750">
-              <a:lnSpc>
-                <a:spcPct val="100000"/>
-              </a:lnSpc>
-              <a:spcBef>
-                <a:spcPts val="0"/>
-              </a:spcBef>
-              <a:buSzPts val="3000"/>
-            </a:pPr>
-            <a:endParaRPr lang="en-US" sz="1800" b="1" dirty="0">
-              <a:latin typeface="Arial"/>
-              <a:ea typeface="Arial"/>
-              <a:cs typeface="Arial"/>
-              <a:sym typeface="Arial"/>
-            </a:endParaRPr>
-          </a:p>
-        </p:txBody>
-      </p:sp>
-      <p:sp>
-        <p:nvSpPr>
-          <p:cNvPr id="119" name="Google Shape;119;p29">
-            <a:extLst>
-              <a:ext uri="{FF2B5EF4-FFF2-40B4-BE49-F238E27FC236}">
-                <a16:creationId xmlns:a16="http://schemas.microsoft.com/office/drawing/2014/main" id="{19848B8C-9075-59EA-79FA-AF5B8BFAF8D4}"/>
-              </a:ext>
-            </a:extLst>
-          </p:cNvPr>
-          <p:cNvSpPr/>
-          <p:nvPr/>
-        </p:nvSpPr>
-        <p:spPr>
-          <a:xfrm rot="10800000" flipH="1">
-            <a:off x="0" y="0"/>
-            <a:ext cx="12192000" cy="868220"/>
-          </a:xfrm>
-          <a:prstGeom prst="rect">
-            <a:avLst/>
-          </a:prstGeom>
-          <a:solidFill>
-            <a:srgbClr val="13294B"/>
-          </a:solidFill>
-          <a:ln>
-            <a:noFill/>
-          </a:ln>
-        </p:spPr>
-        <p:txBody>
-          <a:bodyPr spcFirstLastPara="1" wrap="square" lIns="91425" tIns="45700" rIns="91425" bIns="45700" anchor="ctr" anchorCtr="0">
-            <a:noAutofit/>
-          </a:bodyPr>
-          <a:lstStyle/>
-          <a:p>
-            <a:pPr marL="0" marR="0" lvl="0" indent="0" algn="ctr" rtl="0">
-              <a:lnSpc>
-                <a:spcPct val="100000"/>
-              </a:lnSpc>
-              <a:spcBef>
-                <a:spcPts val="0"/>
-              </a:spcBef>
-              <a:spcAft>
-                <a:spcPts val="0"/>
-              </a:spcAft>
-              <a:buClr>
-                <a:schemeClr val="lt1"/>
-              </a:buClr>
-              <a:buSzPts val="1800"/>
-              <a:buFont typeface="Calibri"/>
-              <a:buNone/>
-            </a:pPr>
-            <a:endParaRPr sz="1800" b="0" i="0" u="none" strike="noStrike" cap="none">
-              <a:solidFill>
-                <a:srgbClr val="13294B"/>
-              </a:solidFill>
-              <a:latin typeface="Calibri"/>
-              <a:ea typeface="Calibri"/>
-              <a:cs typeface="Calibri"/>
-              <a:sym typeface="Calibri"/>
-            </a:endParaRPr>
-          </a:p>
-        </p:txBody>
-      </p:sp>
-      <p:sp>
-        <p:nvSpPr>
-          <p:cNvPr id="120" name="Google Shape;120;p29">
-            <a:extLst>
-              <a:ext uri="{FF2B5EF4-FFF2-40B4-BE49-F238E27FC236}">
-                <a16:creationId xmlns:a16="http://schemas.microsoft.com/office/drawing/2014/main" id="{6AE21486-AEEC-E367-96A5-81B49AD32D6A}"/>
-              </a:ext>
-            </a:extLst>
-          </p:cNvPr>
-          <p:cNvSpPr txBox="1"/>
-          <p:nvPr/>
-        </p:nvSpPr>
-        <p:spPr>
-          <a:xfrm>
-            <a:off x="376810" y="204051"/>
-            <a:ext cx="10910026" cy="461624"/>
-          </a:xfrm>
-          <a:prstGeom prst="rect">
-            <a:avLst/>
-          </a:prstGeom>
-          <a:noFill/>
-          <a:ln>
-            <a:noFill/>
-          </a:ln>
-        </p:spPr>
-        <p:txBody>
-          <a:bodyPr spcFirstLastPara="1" wrap="square" lIns="91425" tIns="45700" rIns="91425" bIns="45700" anchor="t" anchorCtr="0">
-            <a:spAutoFit/>
-          </a:bodyPr>
-          <a:lstStyle/>
-          <a:p>
-            <a:pPr marL="0" marR="0" lvl="0" indent="0" algn="l" rtl="0">
-              <a:lnSpc>
-                <a:spcPct val="100000"/>
-              </a:lnSpc>
-              <a:spcBef>
-                <a:spcPts val="0"/>
-              </a:spcBef>
-              <a:spcAft>
-                <a:spcPts val="0"/>
-              </a:spcAft>
-              <a:buClr>
-                <a:srgbClr val="000000"/>
-              </a:buClr>
-              <a:buSzPts val="2400"/>
-              <a:buFont typeface="Arial"/>
-              <a:buNone/>
-            </a:pPr>
-            <a:r>
-              <a:rPr lang="en-US" sz="2400" b="0" i="0" u="none" strike="noStrike" cap="none" dirty="0">
-                <a:solidFill>
-                  <a:schemeClr val="lt1"/>
-                </a:solidFill>
-                <a:latin typeface="Arial"/>
-                <a:ea typeface="Arial"/>
-                <a:cs typeface="Arial"/>
-                <a:sym typeface="Arial"/>
-              </a:rPr>
-              <a:t>Reminders</a:t>
-            </a:r>
-            <a:endParaRPr sz="2400" b="0" i="0" u="none" strike="noStrike" cap="none" dirty="0">
-              <a:solidFill>
-                <a:schemeClr val="lt1"/>
-              </a:solidFill>
-              <a:latin typeface="Arial"/>
-              <a:ea typeface="Arial"/>
-              <a:cs typeface="Arial"/>
-              <a:sym typeface="Arial"/>
-            </a:endParaRPr>
-          </a:p>
-        </p:txBody>
-      </p:sp>
-      <p:pic>
-        <p:nvPicPr>
-          <p:cNvPr id="121" name="Google Shape;121;p29">
-            <a:extLst>
-              <a:ext uri="{FF2B5EF4-FFF2-40B4-BE49-F238E27FC236}">
-                <a16:creationId xmlns:a16="http://schemas.microsoft.com/office/drawing/2014/main" id="{28CCE647-4D9B-354D-A2E9-718CA28CD750}"/>
-              </a:ext>
-            </a:extLst>
-          </p:cNvPr>
-          <p:cNvPicPr preferRelativeResize="0"/>
-          <p:nvPr/>
-        </p:nvPicPr>
-        <p:blipFill rotWithShape="1">
-          <a:blip r:embed="rId5">
-            <a:alphaModFix/>
-          </a:blip>
-          <a:srcRect/>
-          <a:stretch/>
-        </p:blipFill>
-        <p:spPr>
-          <a:xfrm>
-            <a:off x="11557509" y="233819"/>
-            <a:ext cx="271308" cy="389810"/>
-          </a:xfrm>
-          <a:prstGeom prst="rect">
-            <a:avLst/>
-          </a:prstGeom>
-          <a:noFill/>
-          <a:ln>
-            <a:noFill/>
-          </a:ln>
-        </p:spPr>
-      </p:pic>
-      <p:sp>
-        <p:nvSpPr>
-          <p:cNvPr id="122" name="Google Shape;122;p29">
-            <a:extLst>
-              <a:ext uri="{FF2B5EF4-FFF2-40B4-BE49-F238E27FC236}">
-                <a16:creationId xmlns:a16="http://schemas.microsoft.com/office/drawing/2014/main" id="{FAC87A64-580A-4863-38B3-4D1504C83F5F}"/>
-              </a:ext>
-            </a:extLst>
-          </p:cNvPr>
-          <p:cNvSpPr txBox="1"/>
-          <p:nvPr/>
-        </p:nvSpPr>
-        <p:spPr>
-          <a:xfrm>
-            <a:off x="9335597" y="6524381"/>
-            <a:ext cx="2473415" cy="230792"/>
-          </a:xfrm>
-          <a:prstGeom prst="rect">
-            <a:avLst/>
-          </a:prstGeom>
-          <a:noFill/>
-          <a:ln>
-            <a:noFill/>
-          </a:ln>
-        </p:spPr>
-        <p:txBody>
-          <a:bodyPr spcFirstLastPara="1" wrap="square" lIns="91425" tIns="45700" rIns="91425" bIns="45700" anchor="t" anchorCtr="0">
-            <a:spAutoFit/>
-          </a:bodyPr>
-          <a:lstStyle/>
-          <a:p>
-            <a:pPr marL="0" marR="0" lvl="0" indent="0" algn="r" rtl="0">
-              <a:lnSpc>
-                <a:spcPct val="100000"/>
-              </a:lnSpc>
-              <a:spcBef>
-                <a:spcPts val="0"/>
-              </a:spcBef>
-              <a:spcAft>
-                <a:spcPts val="0"/>
-              </a:spcAft>
-              <a:buNone/>
-            </a:pPr>
-            <a:r>
-              <a:rPr lang="en-US" sz="900" b="0" i="0" u="none" strike="noStrike" cap="none">
-                <a:solidFill>
-                  <a:srgbClr val="13294B"/>
-                </a:solidFill>
-                <a:latin typeface="Arial"/>
-                <a:ea typeface="Arial"/>
-                <a:cs typeface="Arial"/>
-                <a:sym typeface="Arial"/>
-              </a:rPr>
-              <a:t>GRAINGER ENGINEERING</a:t>
-            </a:r>
-            <a:endParaRPr/>
-          </a:p>
-        </p:txBody>
-      </p:sp>
-      <p:sp>
-        <p:nvSpPr>
-          <p:cNvPr id="123" name="Google Shape;123;p29">
-            <a:extLst>
-              <a:ext uri="{FF2B5EF4-FFF2-40B4-BE49-F238E27FC236}">
-                <a16:creationId xmlns:a16="http://schemas.microsoft.com/office/drawing/2014/main" id="{23649EAB-2DB3-2DA4-9AD9-5D94AEE695E1}"/>
-              </a:ext>
-            </a:extLst>
-          </p:cNvPr>
-          <p:cNvSpPr txBox="1"/>
-          <p:nvPr/>
-        </p:nvSpPr>
-        <p:spPr>
-          <a:xfrm>
-            <a:off x="376807" y="6524381"/>
-            <a:ext cx="7991337" cy="230792"/>
-          </a:xfrm>
-          <a:prstGeom prst="rect">
-            <a:avLst/>
-          </a:prstGeom>
-          <a:noFill/>
-          <a:ln>
-            <a:noFill/>
-          </a:ln>
-        </p:spPr>
-        <p:txBody>
-          <a:bodyPr spcFirstLastPara="1" wrap="square" lIns="91425" tIns="45700" rIns="91425" bIns="45700" anchor="t" anchorCtr="0">
-            <a:spAutoFit/>
-          </a:bodyPr>
-          <a:lstStyle/>
-          <a:p>
-            <a:pPr marL="0" marR="0" lvl="0" indent="0" algn="l" rtl="0">
-              <a:lnSpc>
-                <a:spcPct val="100000"/>
-              </a:lnSpc>
-              <a:spcBef>
-                <a:spcPts val="0"/>
-              </a:spcBef>
-              <a:spcAft>
-                <a:spcPts val="0"/>
-              </a:spcAft>
-              <a:buNone/>
-            </a:pPr>
-            <a:r>
-              <a:rPr lang="en-US" sz="900" dirty="0">
-                <a:solidFill>
-                  <a:srgbClr val="13294B"/>
-                </a:solidFill>
-              </a:rPr>
-              <a:t>SYSTEMS ENGINEERING </a:t>
-            </a:r>
-            <a:endParaRPr dirty="0"/>
-          </a:p>
-        </p:txBody>
-      </p:sp>
-      <p:grpSp>
-        <p:nvGrpSpPr>
-          <p:cNvPr id="124" name="Google Shape;124;p29">
-            <a:extLst>
-              <a:ext uri="{FF2B5EF4-FFF2-40B4-BE49-F238E27FC236}">
-                <a16:creationId xmlns:a16="http://schemas.microsoft.com/office/drawing/2014/main" id="{D41F8E2C-2780-2776-E8ED-542B082247FE}"/>
-              </a:ext>
-            </a:extLst>
-          </p:cNvPr>
-          <p:cNvGrpSpPr/>
-          <p:nvPr/>
-        </p:nvGrpSpPr>
-        <p:grpSpPr>
-          <a:xfrm>
-            <a:off x="4066674" y="6601537"/>
-            <a:ext cx="5233412" cy="70446"/>
-            <a:chOff x="4033424" y="6601537"/>
-            <a:chExt cx="5233412" cy="70446"/>
-          </a:xfrm>
-        </p:grpSpPr>
-        <p:cxnSp>
-          <p:nvCxnSpPr>
-            <p:cNvPr id="125" name="Google Shape;125;p29">
-              <a:extLst>
-                <a:ext uri="{FF2B5EF4-FFF2-40B4-BE49-F238E27FC236}">
-                  <a16:creationId xmlns:a16="http://schemas.microsoft.com/office/drawing/2014/main" id="{1D628D6E-10A9-03E9-659C-F8F2D0023C66}"/>
-                </a:ext>
-              </a:extLst>
-            </p:cNvPr>
-            <p:cNvCxnSpPr/>
-            <p:nvPr/>
-          </p:nvCxnSpPr>
-          <p:spPr>
-            <a:xfrm rot="10800000">
-              <a:off x="4033424" y="6639606"/>
-              <a:ext cx="5164651" cy="0"/>
-            </a:xfrm>
-            <a:prstGeom prst="straightConnector1">
-              <a:avLst/>
-            </a:prstGeom>
-            <a:noFill/>
-            <a:ln w="9525" cap="flat" cmpd="sng">
-              <a:solidFill>
-                <a:srgbClr val="13294B"/>
-              </a:solidFill>
-              <a:prstDash val="solid"/>
-              <a:round/>
-              <a:headEnd type="none" w="sm" len="sm"/>
-              <a:tailEnd type="none" w="sm" len="sm"/>
-            </a:ln>
-          </p:spPr>
-        </p:cxnSp>
-        <p:sp>
-          <p:nvSpPr>
-            <p:cNvPr id="126" name="Google Shape;126;p29">
-              <a:extLst>
-                <a:ext uri="{FF2B5EF4-FFF2-40B4-BE49-F238E27FC236}">
-                  <a16:creationId xmlns:a16="http://schemas.microsoft.com/office/drawing/2014/main" id="{7BEB3CD3-0F72-FD08-8FA5-00AD37965F20}"/>
-                </a:ext>
-              </a:extLst>
-            </p:cNvPr>
-            <p:cNvSpPr/>
-            <p:nvPr/>
-          </p:nvSpPr>
-          <p:spPr>
-            <a:xfrm>
-              <a:off x="9196390" y="6601537"/>
-              <a:ext cx="70446" cy="70446"/>
-            </a:xfrm>
-            <a:prstGeom prst="ellipse">
-              <a:avLst/>
-            </a:prstGeom>
-            <a:solidFill>
-              <a:srgbClr val="13294B"/>
-            </a:solidFill>
-            <a:ln>
-              <a:noFill/>
-            </a:ln>
-          </p:spPr>
-          <p:txBody>
-            <a:bodyPr spcFirstLastPara="1" wrap="square" lIns="91425" tIns="45700" rIns="91425" bIns="45700" anchor="ctr" anchorCtr="0">
-              <a:noAutofit/>
-            </a:bodyPr>
-            <a:lstStyle/>
-            <a:p>
-              <a:pPr marL="0" marR="0" lvl="0" indent="0" algn="ctr" rtl="0">
-                <a:lnSpc>
-                  <a:spcPct val="100000"/>
-                </a:lnSpc>
-                <a:spcBef>
-                  <a:spcPts val="0"/>
-                </a:spcBef>
-                <a:spcAft>
-                  <a:spcPts val="0"/>
-                </a:spcAft>
-                <a:buNone/>
-              </a:pPr>
-              <a:endParaRPr sz="1400" b="0" i="0" u="none" strike="noStrike" cap="none">
-                <a:solidFill>
-                  <a:srgbClr val="13294B"/>
-                </a:solidFill>
-                <a:latin typeface="Arial"/>
-                <a:ea typeface="Arial"/>
-                <a:cs typeface="Arial"/>
-                <a:sym typeface="Arial"/>
-              </a:endParaRPr>
-            </a:p>
-          </p:txBody>
-        </p:sp>
-      </p:grpSp>
-    </p:spTree>
-    <p:extLst>
-      <p:ext uri="{BB962C8B-B14F-4D97-AF65-F5344CB8AC3E}">
-        <p14:creationId xmlns:p14="http://schemas.microsoft.com/office/powerpoint/2010/main" val="3795841031"/>
-      </p:ext>
-    </p:extLst>
   </p:cSld>
   <p:clrMapOvr>
     <a:masterClrMapping/>
@@ -23475,8 +25795,8 @@
         </p:nvSpPr>
         <p:spPr>
           <a:xfrm>
-            <a:off x="1295400" y="3225489"/>
-            <a:ext cx="9601200" cy="784790"/>
+            <a:off x="1295400" y="2879241"/>
+            <a:ext cx="9601200" cy="1477287"/>
           </a:xfrm>
           <a:prstGeom prst="rect">
             <a:avLst/>
@@ -23520,6 +25840,33 @@
                 <a:sym typeface="Arial"/>
               </a:rPr>
               <a:t>Fourier Transforms &amp; FFT</a:t>
+            </a:r>
+          </a:p>
+          <a:p>
+            <a:pPr marL="0" marR="0" lvl="0" indent="0" algn="ctr" rtl="0">
+              <a:lnSpc>
+                <a:spcPct val="100000"/>
+              </a:lnSpc>
+              <a:spcBef>
+                <a:spcPts val="0"/>
+              </a:spcBef>
+              <a:spcAft>
+                <a:spcPts val="0"/>
+              </a:spcAft>
+              <a:buClr>
+                <a:srgbClr val="000000"/>
+              </a:buClr>
+              <a:buSzPts val="4500"/>
+              <a:buFont typeface="Arial"/>
+              <a:buNone/>
+            </a:pPr>
+            <a:r>
+              <a:rPr lang="en-US" sz="4500" b="1" dirty="0">
+                <a:solidFill>
+                  <a:srgbClr val="15264B"/>
+                </a:solidFill>
+              </a:rPr>
+              <a:t>Background</a:t>
             </a:r>
             <a:endParaRPr sz="1800" b="0" i="0" u="none" strike="noStrike" cap="none" dirty="0">
               <a:solidFill>
@@ -24268,14 +26615,56 @@
         </p:blipFill>
         <p:spPr>
           <a:xfrm>
-            <a:off x="1188498" y="943099"/>
-            <a:ext cx="9815005" cy="5545491"/>
+            <a:off x="1240790" y="953101"/>
+            <a:ext cx="9710420" cy="5486400"/>
           </a:xfrm>
           <a:prstGeom prst="rect">
             <a:avLst/>
           </a:prstGeom>
         </p:spPr>
       </p:pic>
+      <p:sp>
+        <p:nvSpPr>
+          <p:cNvPr id="2" name="TextBox 1">
+            <a:extLst>
+              <a:ext uri="{FF2B5EF4-FFF2-40B4-BE49-F238E27FC236}">
+                <a16:creationId xmlns:a16="http://schemas.microsoft.com/office/drawing/2014/main" id="{2DC780DA-D429-0F83-6F59-0EFE3A19F66F}"/>
+              </a:ext>
+            </a:extLst>
+          </p:cNvPr>
+          <p:cNvSpPr txBox="1"/>
+          <p:nvPr/>
+        </p:nvSpPr>
+        <p:spPr>
+          <a:xfrm>
+            <a:off x="4495800" y="6379854"/>
+            <a:ext cx="3200400" cy="261610"/>
+          </a:xfrm>
+          <a:prstGeom prst="rect">
+            <a:avLst/>
+          </a:prstGeom>
+          <a:noFill/>
+        </p:spPr>
+        <p:txBody>
+          <a:bodyPr wrap="square" rtlCol="0">
+            <a:spAutoFit/>
+          </a:bodyPr>
+          <a:lstStyle/>
+          <a:p>
+            <a:pPr algn="ctr"/>
+            <a:r>
+              <a:rPr lang="en-US" sz="1050" dirty="0">
+                <a:hlinkClick r:id="rId6"/>
+              </a:rPr>
+              <a:t>https://www.youtube.com/watch?v=spUNpyF58BY</a:t>
+            </a:r>
+            <a:r>
+              <a:rPr lang="en-US" sz="1050" dirty="0"/>
+              <a:t> </a:t>
+            </a:r>
+          </a:p>
+        </p:txBody>
+      </p:sp>
     </p:spTree>
     <p:extLst>
       <p:ext uri="{BB962C8B-B14F-4D97-AF65-F5344CB8AC3E}">
@@ -24863,14 +27252,53 @@
         </p:blipFill>
         <p:spPr>
           <a:xfrm>
-            <a:off x="1303496" y="983446"/>
-            <a:ext cx="9585008" cy="5415542"/>
+            <a:off x="1240790" y="950660"/>
+            <a:ext cx="9710420" cy="5486400"/>
           </a:xfrm>
           <a:prstGeom prst="rect">
             <a:avLst/>
           </a:prstGeom>
         </p:spPr>
       </p:pic>
+      <p:sp>
+        <p:nvSpPr>
+          <p:cNvPr id="3" name="TextBox 2">
+            <a:extLst>
+              <a:ext uri="{FF2B5EF4-FFF2-40B4-BE49-F238E27FC236}">
+                <a16:creationId xmlns:a16="http://schemas.microsoft.com/office/drawing/2014/main" id="{77AC954C-475A-2D9E-75DC-A335B4C4696C}"/>
+              </a:ext>
+            </a:extLst>
+          </p:cNvPr>
+          <p:cNvSpPr txBox="1"/>
+          <p:nvPr/>
+        </p:nvSpPr>
+        <p:spPr>
+          <a:xfrm>
+            <a:off x="4495800" y="6379854"/>
+            <a:ext cx="3200400" cy="261610"/>
+          </a:xfrm>
+          <a:prstGeom prst="rect">
+            <a:avLst/>
+          </a:prstGeom>
+          <a:noFill/>
+        </p:spPr>
+        <p:txBody>
+          <a:bodyPr wrap="square" rtlCol="0">
+            <a:spAutoFit/>
+          </a:bodyPr>
+          <a:lstStyle/>
+          <a:p>
+            <a:pPr algn="ctr"/>
+            <a:r>
+              <a:rPr lang="en-US" sz="1050" dirty="0">
+                <a:hlinkClick r:id="rId6"/>
+              </a:rPr>
+              <a:t>https://www.youtube.com/watch?v=h7apO7q16V0</a:t>
+            </a:r>
+            <a:endParaRPr lang="en-US" sz="1050" dirty="0"/>
+          </a:p>
+        </p:txBody>
+      </p:sp>
     </p:spTree>
     <p:extLst>
       <p:ext uri="{BB962C8B-B14F-4D97-AF65-F5344CB8AC3E}">
@@ -25022,9 +27450,28 @@
 <file path=ppt/slides/slide7.xml><?xml version="1.0" encoding="utf-8"?>
 <p:sld xmlns:a="http://schemas.openxmlformats.org/drawingml/2006/main" xmlns:r="http://schemas.openxmlformats.org/officeDocument/2006/relationships" xmlns:p="http://schemas.openxmlformats.org/presentationml/2006/main">
   <p:cSld>
+    <p:bg>
+      <p:bgPr>
+        <a:blipFill>
+          <a:blip r:embed="rId3">
+            <a:alphaModFix/>
+          </a:blip>
+          <a:stretch>
+            <a:fillRect/>
+          </a:stretch>
+        </a:blipFill>
+        <a:effectLst/>
+      </p:bgPr>
+    </p:bg>
     <p:spTree>
       <p:nvGrpSpPr>
-        <p:cNvPr id="1" name="Shape 117"/>
+        <p:cNvPr id="1" name="Shape 103">
+          <a:extLst>
+            <a:ext uri="{FF2B5EF4-FFF2-40B4-BE49-F238E27FC236}">
+              <a16:creationId xmlns:a16="http://schemas.microsoft.com/office/drawing/2014/main" id="{CF9460F4-D27C-43BD-B6BF-D24B65D7D6A2}"/>
+            </a:ext>
+          </a:extLst>
+        </p:cNvPr>
         <p:cNvGrpSpPr/>
         <p:nvPr/>
       </p:nvGrpSpPr>
@@ -25038,18 +27485,20 @@
       </p:grpSpPr>
       <p:sp>
         <p:nvSpPr>
-          <p:cNvPr id="118" name="Google Shape;118;p29"/>
-          <p:cNvSpPr txBox="1">
-            <a:spLocks noGrp="1"/>
-          </p:cNvSpPr>
-          <p:nvPr>
-            <p:ph type="body" idx="1"/>
-          </p:nvPr>
+          <p:cNvPr id="104" name="Google Shape;104;p28">
+            <a:extLst>
+              <a:ext uri="{FF2B5EF4-FFF2-40B4-BE49-F238E27FC236}">
+                <a16:creationId xmlns:a16="http://schemas.microsoft.com/office/drawing/2014/main" id="{116C1B29-AB65-363F-A940-54B8C6D5C162}"/>
+              </a:ext>
+            </a:extLst>
+          </p:cNvPr>
+          <p:cNvSpPr txBox="1"/>
+          <p:nvPr/>
         </p:nvSpPr>
         <p:spPr>
           <a:xfrm>
-            <a:off x="376809" y="1334279"/>
-            <a:ext cx="11177401" cy="4821102"/>
+            <a:off x="1295400" y="2879241"/>
+            <a:ext cx="9601200" cy="1477287"/>
           </a:xfrm>
           <a:prstGeom prst="rect">
             <a:avLst/>
@@ -25060,146 +27509,68 @@
           </a:ln>
         </p:spPr>
         <p:txBody>
-          <a:bodyPr spcFirstLastPara="1" wrap="square" lIns="91425" tIns="45700" rIns="91425" bIns="45700" anchor="t" anchorCtr="0">
-            <a:noAutofit/>
+          <a:bodyPr spcFirstLastPara="1" wrap="square" lIns="91425" tIns="45700" rIns="91425" bIns="45700" anchor="ctr" anchorCtr="0">
+            <a:spAutoFit/>
           </a:bodyPr>
           <a:lstStyle/>
           <a:p>
-            <a:pPr marL="0" lvl="0" indent="0" algn="l" rtl="0">
-              <a:lnSpc>
-                <a:spcPct val="100000"/>
-              </a:lnSpc>
-              <a:spcBef>
-                <a:spcPts val="0"/>
-              </a:spcBef>
-              <a:spcAft>
-                <a:spcPts val="0"/>
-              </a:spcAft>
-              <a:buSzPts val="3000"/>
+            <a:pPr marL="0" marR="0" lvl="0" indent="0" algn="ctr" rtl="0">
+              <a:lnSpc>
+                <a:spcPct val="100000"/>
+              </a:lnSpc>
+              <a:spcBef>
+                <a:spcPts val="0"/>
+              </a:spcBef>
+              <a:spcAft>
+                <a:spcPts val="0"/>
+              </a:spcAft>
+              <a:buClr>
+                <a:srgbClr val="000000"/>
+              </a:buClr>
+              <a:buSzPts val="4500"/>
+              <a:buFont typeface="Arial"/>
               <a:buNone/>
             </a:pPr>
             <a:r>
-              <a:rPr lang="en-US" sz="2600" b="1">
-                <a:solidFill>
-                  <a:srgbClr val="E84B36"/>
+              <a:rPr lang="en-US" sz="4500" b="1" i="0" u="none" strike="noStrike" cap="none" dirty="0">
+                <a:solidFill>
+                  <a:srgbClr val="15264B"/>
                 </a:solidFill>
                 <a:latin typeface="Arial"/>
                 <a:ea typeface="Arial"/>
                 <a:cs typeface="Arial"/>
                 <a:sym typeface="Arial"/>
               </a:rPr>
-              <a:t>Lorem Ipsum Dolor Sit Amet Consectetur Adipiscing</a:t>
+              <a:t>Fourier Transforms &amp; FFT</a:t>
             </a:r>
-            <a:endParaRPr sz="2600" b="1">
-              <a:solidFill>
-                <a:srgbClr val="E84B36"/>
-              </a:solidFill>
-              <a:latin typeface="Arial"/>
-              <a:ea typeface="Arial"/>
-              <a:cs typeface="Arial"/>
-              <a:sym typeface="Arial"/>
-            </a:endParaRPr>
           </a:p>
           <a:p>
-            <a:pPr marL="0" lvl="0" indent="0" algn="l" rtl="0">
-              <a:lnSpc>
-                <a:spcPct val="100000"/>
-              </a:lnSpc>
-              <a:spcBef>
-                <a:spcPts val="0"/>
-              </a:spcBef>
-              <a:spcAft>
-                <a:spcPts val="0"/>
-              </a:spcAft>
-              <a:buSzPts val="2000"/>
-              <a:buNone/>
-            </a:pPr>
-            <a:endParaRPr sz="1800">
-              <a:solidFill>
-                <a:schemeClr val="dk1"/>
-              </a:solidFill>
-              <a:latin typeface="Arial"/>
-              <a:ea typeface="Arial"/>
-              <a:cs typeface="Arial"/>
-              <a:sym typeface="Arial"/>
-            </a:endParaRPr>
-          </a:p>
-          <a:p>
-            <a:pPr marL="0" lvl="0" indent="0" algn="l" rtl="0">
-              <a:lnSpc>
-                <a:spcPct val="100000"/>
-              </a:lnSpc>
-              <a:spcBef>
-                <a:spcPts val="0"/>
-              </a:spcBef>
-              <a:spcAft>
-                <a:spcPts val="0"/>
-              </a:spcAft>
-              <a:buSzPts val="2000"/>
+            <a:pPr marL="0" marR="0" lvl="0" indent="0" algn="ctr" rtl="0">
+              <a:lnSpc>
+                <a:spcPct val="100000"/>
+              </a:lnSpc>
+              <a:spcBef>
+                <a:spcPts val="0"/>
+              </a:spcBef>
+              <a:spcAft>
+                <a:spcPts val="0"/>
+              </a:spcAft>
+              <a:buClr>
+                <a:srgbClr val="000000"/>
+              </a:buClr>
+              <a:buSzPts val="4500"/>
+              <a:buFont typeface="Arial"/>
               <a:buNone/>
             </a:pPr>
             <a:r>
-              <a:rPr lang="en-US" sz="1800">
-                <a:latin typeface="Arial"/>
-                <a:ea typeface="Arial"/>
-                <a:cs typeface="Arial"/>
-                <a:sym typeface="Arial"/>
+              <a:rPr lang="en-US" sz="4500" b="1" dirty="0">
+                <a:solidFill>
+                  <a:srgbClr val="15264B"/>
+                </a:solidFill>
               </a:rPr>
-              <a:t>Lorem ipsum dolor sit amet, consectetur adipiscing elit, sed do eiusmod tempor incididunt ut labore et dolore magna aliqua. Ut enim ad minim veniam, quis nostrud exercitation ullamco laboris nisi ut aliquip ex ea commodo consequat. Duis aute irure dolor in reprehenderit in voluptate velit esse cillum dolore eu fugiat nulla pariatur. Excepteur sint occaecat cupidatat non proident, sunt in culpa qui officia deserunt mollit anim id est laborum.</a:t>
+              <a:t>Code</a:t>
             </a:r>
-            <a:endParaRPr/>
-          </a:p>
-          <a:p>
-            <a:pPr marL="0" lvl="0" indent="0" algn="l" rtl="0">
-              <a:lnSpc>
-                <a:spcPct val="100000"/>
-              </a:lnSpc>
-              <a:spcBef>
-                <a:spcPts val="0"/>
-              </a:spcBef>
-              <a:spcAft>
-                <a:spcPts val="0"/>
-              </a:spcAft>
-              <a:buSzPts val="2000"/>
-              <a:buNone/>
-            </a:pPr>
-            <a:endParaRPr sz="1800">
-              <a:solidFill>
-                <a:schemeClr val="dk1"/>
-              </a:solidFill>
-              <a:latin typeface="Arial"/>
-              <a:ea typeface="Arial"/>
-              <a:cs typeface="Arial"/>
-              <a:sym typeface="Arial"/>
-            </a:endParaRPr>
-          </a:p>
-          <a:p>
-            <a:pPr marL="0" lvl="0" indent="0" algn="l" rtl="0">
-              <a:lnSpc>
-                <a:spcPct val="100000"/>
-              </a:lnSpc>
-              <a:spcBef>
-                <a:spcPts val="0"/>
-              </a:spcBef>
-              <a:spcAft>
-                <a:spcPts val="0"/>
-              </a:spcAft>
-              <a:buSzPts val="3000"/>
-              <a:buNone/>
-            </a:pPr>
-            <a:r>
-              <a:rPr lang="en-US" sz="2000" b="1">
-                <a:solidFill>
-                  <a:srgbClr val="15264B"/>
-                </a:solidFill>
-                <a:latin typeface="Arial"/>
-                <a:ea typeface="Arial"/>
-                <a:cs typeface="Arial"/>
-                <a:sym typeface="Arial"/>
-              </a:rPr>
-              <a:t>Lorem Ipsum Dolor Sit Amet Consectetur Adipiscing</a:t>
-            </a:r>
-            <a:endParaRPr sz="2000" b="1">
+            <a:endParaRPr sz="1800" b="0" i="0" u="none" strike="noStrike" cap="none" dirty="0">
               <a:solidFill>
                 <a:srgbClr val="15264B"/>
               </a:solidFill>
@@ -25209,195 +27580,107 @@
               <a:sym typeface="Arial"/>
             </a:endParaRPr>
           </a:p>
-          <a:p>
-            <a:pPr marL="0" lvl="0" indent="0" algn="l" rtl="0">
-              <a:lnSpc>
-                <a:spcPct val="100000"/>
-              </a:lnSpc>
-              <a:spcBef>
-                <a:spcPts val="0"/>
-              </a:spcBef>
-              <a:spcAft>
-                <a:spcPts val="0"/>
-              </a:spcAft>
-              <a:buSzPts val="3000"/>
-              <a:buNone/>
-            </a:pPr>
-            <a:endParaRPr sz="1800" b="1">
-              <a:solidFill>
-                <a:schemeClr val="dk1"/>
-              </a:solidFill>
-              <a:latin typeface="Arial"/>
-              <a:ea typeface="Arial"/>
-              <a:cs typeface="Arial"/>
-              <a:sym typeface="Arial"/>
-            </a:endParaRPr>
-          </a:p>
-          <a:p>
-            <a:pPr marL="0" lvl="0" indent="0" algn="l" rtl="0">
-              <a:lnSpc>
-                <a:spcPct val="100000"/>
-              </a:lnSpc>
-              <a:spcBef>
-                <a:spcPts val="0"/>
-              </a:spcBef>
-              <a:spcAft>
-                <a:spcPts val="0"/>
-              </a:spcAft>
-              <a:buSzPts val="3000"/>
-              <a:buNone/>
-            </a:pPr>
-            <a:r>
-              <a:rPr lang="en-US" sz="1800">
-                <a:latin typeface="Arial"/>
-                <a:ea typeface="Arial"/>
-                <a:cs typeface="Arial"/>
-                <a:sym typeface="Arial"/>
-              </a:rPr>
-              <a:t>Lorem ipsum dolor sit amet, consectetur adipiscing elit, sed do eiusmod tempor incididunt ut labore et dolore magna aliqua.</a:t>
-            </a:r>
-            <a:endParaRPr sz="1800" b="1">
-              <a:solidFill>
-                <a:schemeClr val="dk1"/>
-              </a:solidFill>
-              <a:latin typeface="Arial"/>
-              <a:ea typeface="Arial"/>
-              <a:cs typeface="Arial"/>
-              <a:sym typeface="Arial"/>
-            </a:endParaRPr>
-          </a:p>
         </p:txBody>
       </p:sp>
-      <p:sp>
-        <p:nvSpPr>
-          <p:cNvPr id="119" name="Google Shape;119;p29"/>
-          <p:cNvSpPr/>
+      <p:grpSp>
+        <p:nvGrpSpPr>
+          <p:cNvPr id="105" name="Google Shape;105;p28">
+            <a:extLst>
+              <a:ext uri="{FF2B5EF4-FFF2-40B4-BE49-F238E27FC236}">
+                <a16:creationId xmlns:a16="http://schemas.microsoft.com/office/drawing/2014/main" id="{6A025648-97C5-FC37-44BC-46109A437640}"/>
+              </a:ext>
+            </a:extLst>
+          </p:cNvPr>
+          <p:cNvGrpSpPr/>
           <p:nvPr/>
-        </p:nvSpPr>
-        <p:spPr>
-          <a:xfrm rot="10800000" flipH="1">
-            <a:off x="0" y="0"/>
-            <a:ext cx="12192000" cy="868220"/>
+        </p:nvGrpSpPr>
+        <p:grpSpPr>
+          <a:xfrm>
+            <a:off x="3943790" y="2676939"/>
+            <a:ext cx="3861740" cy="322845"/>
+            <a:chOff x="3943790" y="2676939"/>
+            <a:chExt cx="3861740" cy="322845"/>
           </a:xfrm>
-          <a:prstGeom prst="rect">
-            <a:avLst/>
-          </a:prstGeom>
-          <a:solidFill>
-            <a:srgbClr val="13294B"/>
-          </a:solidFill>
-          <a:ln>
+        </p:grpSpPr>
+        <p:cxnSp>
+          <p:nvCxnSpPr>
+            <p:cNvPr id="106" name="Google Shape;106;p28">
+              <a:extLst>
+                <a:ext uri="{FF2B5EF4-FFF2-40B4-BE49-F238E27FC236}">
+                  <a16:creationId xmlns:a16="http://schemas.microsoft.com/office/drawing/2014/main" id="{FCB2293F-513D-1ED6-B527-E0D2D626C620}"/>
+                </a:ext>
+              </a:extLst>
+            </p:cNvPr>
+            <p:cNvCxnSpPr/>
+            <p:nvPr/>
+          </p:nvCxnSpPr>
+          <p:spPr>
+            <a:xfrm>
+              <a:off x="4426226" y="2676939"/>
+              <a:ext cx="3379304" cy="0"/>
+            </a:xfrm>
+            <a:prstGeom prst="straightConnector1">
+              <a:avLst/>
+            </a:prstGeom>
             <a:noFill/>
-          </a:ln>
-        </p:spPr>
-        <p:txBody>
-          <a:bodyPr spcFirstLastPara="1" wrap="square" lIns="91425" tIns="45700" rIns="91425" bIns="45700" anchor="ctr" anchorCtr="0">
-            <a:noAutofit/>
-          </a:bodyPr>
-          <a:lstStyle/>
-          <a:p>
-            <a:pPr marL="0" marR="0" lvl="0" indent="0" algn="ctr" rtl="0">
-              <a:lnSpc>
-                <a:spcPct val="100000"/>
-              </a:lnSpc>
-              <a:spcBef>
-                <a:spcPts val="0"/>
-              </a:spcBef>
-              <a:spcAft>
-                <a:spcPts val="0"/>
-              </a:spcAft>
-              <a:buClr>
-                <a:schemeClr val="lt1"/>
-              </a:buClr>
-              <a:buSzPts val="1800"/>
-              <a:buFont typeface="Calibri"/>
-              <a:buNone/>
-            </a:pPr>
-            <a:endParaRPr sz="1800" b="0" i="0" u="none" strike="noStrike" cap="none">
-              <a:solidFill>
-                <a:srgbClr val="13294B"/>
-              </a:solidFill>
-              <a:latin typeface="Calibri"/>
-              <a:ea typeface="Calibri"/>
-              <a:cs typeface="Calibri"/>
-              <a:sym typeface="Calibri"/>
-            </a:endParaRPr>
-          </a:p>
-        </p:txBody>
-      </p:sp>
-      <p:sp>
-        <p:nvSpPr>
-          <p:cNvPr id="120" name="Google Shape;120;p29"/>
-          <p:cNvSpPr txBox="1"/>
-          <p:nvPr/>
-        </p:nvSpPr>
-        <p:spPr>
-          <a:xfrm>
-            <a:off x="376810" y="204051"/>
-            <a:ext cx="10910026" cy="461624"/>
-          </a:xfrm>
-          <a:prstGeom prst="rect">
-            <a:avLst/>
-          </a:prstGeom>
-          <a:noFill/>
-          <a:ln>
-            <a:noFill/>
-          </a:ln>
-        </p:spPr>
-        <p:txBody>
-          <a:bodyPr spcFirstLastPara="1" wrap="square" lIns="91425" tIns="45700" rIns="91425" bIns="45700" anchor="t" anchorCtr="0">
-            <a:spAutoFit/>
-          </a:bodyPr>
-          <a:lstStyle/>
-          <a:p>
-            <a:pPr marL="0" marR="0" lvl="0" indent="0" algn="l" rtl="0">
-              <a:lnSpc>
-                <a:spcPct val="100000"/>
-              </a:lnSpc>
-              <a:spcBef>
-                <a:spcPts val="0"/>
-              </a:spcBef>
-              <a:spcAft>
-                <a:spcPts val="0"/>
-              </a:spcAft>
-              <a:buClr>
-                <a:srgbClr val="000000"/>
-              </a:buClr>
-              <a:buSzPts val="2400"/>
-              <a:buFont typeface="Arial"/>
-              <a:buNone/>
-            </a:pPr>
-            <a:r>
-              <a:rPr lang="en-US" sz="2400" b="0" i="0" u="none" strike="noStrike" cap="none">
-                <a:solidFill>
-                  <a:schemeClr val="lt1"/>
-                </a:solidFill>
-                <a:latin typeface="Arial"/>
-                <a:ea typeface="Arial"/>
-                <a:cs typeface="Arial"/>
-                <a:sym typeface="Arial"/>
-              </a:rPr>
-              <a:t>Slide Title</a:t>
-            </a:r>
-            <a:endParaRPr sz="2400" b="0" i="0" u="none" strike="noStrike" cap="none">
+            <a:ln w="19050" cap="flat" cmpd="sng">
               <a:solidFill>
                 <a:schemeClr val="lt1"/>
               </a:solidFill>
-              <a:latin typeface="Arial"/>
-              <a:ea typeface="Arial"/>
-              <a:cs typeface="Arial"/>
-              <a:sym typeface="Arial"/>
-            </a:endParaRPr>
-          </a:p>
-        </p:txBody>
-      </p:sp>
+              <a:prstDash val="solid"/>
+              <a:round/>
+              <a:headEnd type="none" w="sm" len="sm"/>
+              <a:tailEnd type="none" w="sm" len="sm"/>
+            </a:ln>
+          </p:spPr>
+        </p:cxnSp>
+        <p:cxnSp>
+          <p:nvCxnSpPr>
+            <p:cNvPr id="107" name="Google Shape;107;p28">
+              <a:extLst>
+                <a:ext uri="{FF2B5EF4-FFF2-40B4-BE49-F238E27FC236}">
+                  <a16:creationId xmlns:a16="http://schemas.microsoft.com/office/drawing/2014/main" id="{FDC14660-92E6-6E0D-B9BE-E1A56A49DC47}"/>
+                </a:ext>
+              </a:extLst>
+            </p:cNvPr>
+            <p:cNvCxnSpPr/>
+            <p:nvPr/>
+          </p:nvCxnSpPr>
+          <p:spPr>
+            <a:xfrm rot="10800000" flipH="1">
+              <a:off x="3943790" y="2676939"/>
+              <a:ext cx="482436" cy="322845"/>
+            </a:xfrm>
+            <a:prstGeom prst="straightConnector1">
+              <a:avLst/>
+            </a:prstGeom>
+            <a:noFill/>
+            <a:ln w="19050" cap="flat" cmpd="sng">
+              <a:solidFill>
+                <a:schemeClr val="lt1"/>
+              </a:solidFill>
+              <a:prstDash val="solid"/>
+              <a:round/>
+              <a:headEnd type="none" w="sm" len="sm"/>
+              <a:tailEnd type="none" w="sm" len="sm"/>
+            </a:ln>
+          </p:spPr>
+        </p:cxnSp>
+      </p:grpSp>
       <p:pic>
         <p:nvPicPr>
-          <p:cNvPr id="121" name="Google Shape;121;p29"/>
+          <p:cNvPr id="108" name="Google Shape;108;p28">
+            <a:extLst>
+              <a:ext uri="{FF2B5EF4-FFF2-40B4-BE49-F238E27FC236}">
+                <a16:creationId xmlns:a16="http://schemas.microsoft.com/office/drawing/2014/main" id="{DE6BC663-3A69-F081-6202-70254534BE17}"/>
+              </a:ext>
+            </a:extLst>
+          </p:cNvPr>
           <p:cNvPicPr preferRelativeResize="0"/>
           <p:nvPr/>
         </p:nvPicPr>
         <p:blipFill rotWithShape="1">
-          <a:blip r:embed="rId3">
+          <a:blip r:embed="rId4">
             <a:alphaModFix/>
           </a:blip>
           <a:srcRect/>
@@ -25406,7 +27689,7 @@
         <p:spPr>
           <a:xfrm>
             <a:off x="11557509" y="233819"/>
-            <a:ext cx="271308" cy="389810"/>
+            <a:ext cx="271308" cy="389811"/>
           </a:xfrm>
           <a:prstGeom prst="rect">
             <a:avLst/>
@@ -25419,7 +27702,13 @@
       </p:pic>
       <p:sp>
         <p:nvSpPr>
-          <p:cNvPr id="122" name="Google Shape;122;p29"/>
+          <p:cNvPr id="109" name="Google Shape;109;p28">
+            <a:extLst>
+              <a:ext uri="{FF2B5EF4-FFF2-40B4-BE49-F238E27FC236}">
+                <a16:creationId xmlns:a16="http://schemas.microsoft.com/office/drawing/2014/main" id="{9F7B5DE6-8E3C-E4B3-F44B-D3917CECF71F}"/>
+              </a:ext>
+            </a:extLst>
+          </p:cNvPr>
           <p:cNvSpPr txBox="1"/>
           <p:nvPr/>
         </p:nvSpPr>
@@ -25472,14 +27761,20 @@
       </p:sp>
       <p:sp>
         <p:nvSpPr>
-          <p:cNvPr id="123" name="Google Shape;123;p29"/>
+          <p:cNvPr id="110" name="Google Shape;110;p28">
+            <a:extLst>
+              <a:ext uri="{FF2B5EF4-FFF2-40B4-BE49-F238E27FC236}">
+                <a16:creationId xmlns:a16="http://schemas.microsoft.com/office/drawing/2014/main" id="{46112376-7AB1-A2F0-9889-11A0CAEC4FEA}"/>
+              </a:ext>
+            </a:extLst>
+          </p:cNvPr>
           <p:cNvSpPr txBox="1"/>
           <p:nvPr/>
         </p:nvSpPr>
         <p:spPr>
           <a:xfrm>
             <a:off x="376807" y="6524381"/>
-            <a:ext cx="7991337" cy="230792"/>
+            <a:ext cx="7991400" cy="230700"/>
           </a:xfrm>
           <a:prstGeom prst="rect">
             <a:avLst/>
@@ -25513,7 +27808,7 @@
                   <a:srgbClr val="13294B"/>
                 </a:solidFill>
               </a:rPr>
-              <a:t>SYSTEMS ENGINEERING </a:t>
+              <a:t>SYSTEMS ENGINEERING</a:t>
             </a:r>
             <a:endParaRPr dirty="0"/>
           </a:p>
@@ -25521,7 +27816,13 @@
       </p:sp>
       <p:grpSp>
         <p:nvGrpSpPr>
-          <p:cNvPr id="124" name="Google Shape;124;p29"/>
+          <p:cNvPr id="111" name="Google Shape;111;p28">
+            <a:extLst>
+              <a:ext uri="{FF2B5EF4-FFF2-40B4-BE49-F238E27FC236}">
+                <a16:creationId xmlns:a16="http://schemas.microsoft.com/office/drawing/2014/main" id="{19C13250-5B7D-B5A4-75BB-743650F5004F}"/>
+              </a:ext>
+            </a:extLst>
+          </p:cNvPr>
           <p:cNvGrpSpPr/>
           <p:nvPr/>
         </p:nvGrpSpPr>
@@ -25535,7 +27836,13 @@
         </p:grpSpPr>
         <p:cxnSp>
           <p:nvCxnSpPr>
-            <p:cNvPr id="125" name="Google Shape;125;p29"/>
+            <p:cNvPr id="112" name="Google Shape;112;p28">
+              <a:extLst>
+                <a:ext uri="{FF2B5EF4-FFF2-40B4-BE49-F238E27FC236}">
+                  <a16:creationId xmlns:a16="http://schemas.microsoft.com/office/drawing/2014/main" id="{16180856-B6E3-D359-5A41-2FEDE0186362}"/>
+                </a:ext>
+              </a:extLst>
+            </p:cNvPr>
             <p:cNvCxnSpPr/>
             <p:nvPr/>
           </p:nvCxnSpPr>
@@ -25561,7 +27868,13 @@
         </p:cxnSp>
         <p:sp>
           <p:nvSpPr>
-            <p:cNvPr id="126" name="Google Shape;126;p29"/>
+            <p:cNvPr id="113" name="Google Shape;113;p28">
+              <a:extLst>
+                <a:ext uri="{FF2B5EF4-FFF2-40B4-BE49-F238E27FC236}">
+                  <a16:creationId xmlns:a16="http://schemas.microsoft.com/office/drawing/2014/main" id="{525E4714-6589-78EA-B2B5-9C91B72D270A}"/>
+                </a:ext>
+              </a:extLst>
+            </p:cNvPr>
             <p:cNvSpPr/>
             <p:nvPr/>
           </p:nvSpPr>
@@ -25612,6 +27925,11 @@
         </p:sp>
       </p:grpSp>
     </p:spTree>
+    <p:extLst>
+      <p:ext uri="{BB962C8B-B14F-4D97-AF65-F5344CB8AC3E}">
+        <p14:creationId xmlns:p14="http://schemas.microsoft.com/office/powerpoint/2010/main" val="1590904303"/>
+      </p:ext>
+    </p:extLst>
   </p:cSld>
   <p:clrMapOvr>
     <a:masterClrMapping/>
@@ -25624,7 +27942,13 @@
   <p:cSld>
     <p:spTree>
       <p:nvGrpSpPr>
-        <p:cNvPr id="1" name="Shape 130"/>
+        <p:cNvPr id="1" name="Shape 117">
+          <a:extLst>
+            <a:ext uri="{FF2B5EF4-FFF2-40B4-BE49-F238E27FC236}">
+              <a16:creationId xmlns:a16="http://schemas.microsoft.com/office/drawing/2014/main" id="{976DE42A-F20F-C1A1-C618-722C23195F2A}"/>
+            </a:ext>
+          </a:extLst>
+        </p:cNvPr>
         <p:cNvGrpSpPr/>
         <p:nvPr/>
       </p:nvGrpSpPr>
@@ -25638,7 +27962,304 @@
       </p:grpSpPr>
       <p:sp>
         <p:nvSpPr>
-          <p:cNvPr id="131" name="Google Shape;131;p30"/>
+          <p:cNvPr id="118" name="Google Shape;118;p29">
+            <a:extLst>
+              <a:ext uri="{FF2B5EF4-FFF2-40B4-BE49-F238E27FC236}">
+                <a16:creationId xmlns:a16="http://schemas.microsoft.com/office/drawing/2014/main" id="{07BE4398-DABB-154A-33E7-9AF4925D2D74}"/>
+              </a:ext>
+            </a:extLst>
+          </p:cNvPr>
+          <p:cNvSpPr txBox="1">
+            <a:spLocks noGrp="1"/>
+          </p:cNvSpPr>
+          <p:nvPr>
+            <p:ph type="body" idx="1"/>
+          </p:nvPr>
+        </p:nvSpPr>
+        <p:spPr>
+          <a:xfrm>
+            <a:off x="376809" y="1334279"/>
+            <a:ext cx="11177401" cy="4821102"/>
+          </a:xfrm>
+          <a:prstGeom prst="rect">
+            <a:avLst/>
+          </a:prstGeom>
+          <a:noFill/>
+          <a:ln>
+            <a:noFill/>
+          </a:ln>
+        </p:spPr>
+        <p:txBody>
+          <a:bodyPr spcFirstLastPara="1" wrap="square" lIns="91425" tIns="45700" rIns="91425" bIns="45700" anchor="t" anchorCtr="0">
+            <a:noAutofit/>
+          </a:bodyPr>
+          <a:lstStyle/>
+          <a:p>
+            <a:pPr marL="0" lvl="0" indent="0">
+              <a:lnSpc>
+                <a:spcPct val="100000"/>
+              </a:lnSpc>
+              <a:spcBef>
+                <a:spcPts val="0"/>
+              </a:spcBef>
+              <a:buSzPts val="2000"/>
+              <a:buNone/>
+            </a:pPr>
+            <a:r>
+              <a:rPr lang="en-US" dirty="0">
+                <a:latin typeface="Arial"/>
+                <a:ea typeface="Arial"/>
+                <a:cs typeface="Arial"/>
+                <a:sym typeface="Arial"/>
+              </a:rPr>
+              <a:t>You just watched a couple of videos all about what a Fourier transform is, and what the FFT is…</a:t>
+            </a:r>
+          </a:p>
+          <a:p>
+            <a:pPr marL="0" lvl="0" indent="0">
+              <a:lnSpc>
+                <a:spcPct val="100000"/>
+              </a:lnSpc>
+              <a:spcBef>
+                <a:spcPts val="0"/>
+              </a:spcBef>
+              <a:buSzPts val="2000"/>
+              <a:buNone/>
+            </a:pPr>
+            <a:endParaRPr lang="en-US" sz="2400" dirty="0">
+              <a:latin typeface="Arial"/>
+              <a:cs typeface="Arial"/>
+              <a:sym typeface="Arial"/>
+            </a:endParaRPr>
+          </a:p>
+          <a:p>
+            <a:pPr marL="0" lvl="0" indent="0">
+              <a:lnSpc>
+                <a:spcPct val="100000"/>
+              </a:lnSpc>
+              <a:spcBef>
+                <a:spcPts val="0"/>
+              </a:spcBef>
+              <a:buSzPts val="2000"/>
+              <a:buNone/>
+            </a:pPr>
+            <a:r>
+              <a:rPr lang="en-US" sz="2400" dirty="0">
+                <a:latin typeface="Arial"/>
+                <a:cs typeface="Arial"/>
+                <a:sym typeface="Arial"/>
+              </a:rPr>
+              <a:t>Time to implement it!</a:t>
+            </a:r>
+          </a:p>
+          <a:p>
+            <a:pPr marL="0" lvl="0" indent="0">
+              <a:lnSpc>
+                <a:spcPct val="100000"/>
+              </a:lnSpc>
+              <a:spcBef>
+                <a:spcPts val="0"/>
+              </a:spcBef>
+              <a:buSzPts val="2000"/>
+              <a:buNone/>
+            </a:pPr>
+            <a:endParaRPr lang="en-US" sz="2400" dirty="0">
+              <a:latin typeface="Arial"/>
+              <a:cs typeface="Arial"/>
+              <a:sym typeface="Arial"/>
+            </a:endParaRPr>
+          </a:p>
+          <a:p>
+            <a:pPr marL="0" lvl="0" indent="0">
+              <a:lnSpc>
+                <a:spcPct val="100000"/>
+              </a:lnSpc>
+              <a:spcBef>
+                <a:spcPts val="0"/>
+              </a:spcBef>
+              <a:buSzPts val="2000"/>
+              <a:buNone/>
+            </a:pPr>
+            <a:endParaRPr lang="en-US" sz="2400" dirty="0">
+              <a:latin typeface="Arial"/>
+              <a:cs typeface="Arial"/>
+              <a:sym typeface="Arial"/>
+            </a:endParaRPr>
+          </a:p>
+          <a:p>
+            <a:pPr marL="0" lvl="0" indent="0">
+              <a:lnSpc>
+                <a:spcPct val="100000"/>
+              </a:lnSpc>
+              <a:spcBef>
+                <a:spcPts val="0"/>
+              </a:spcBef>
+              <a:buSzPts val="2000"/>
+              <a:buNone/>
+            </a:pPr>
+            <a:r>
+              <a:rPr lang="en-US" sz="2400" dirty="0">
+                <a:latin typeface="Arial"/>
+                <a:cs typeface="Arial"/>
+                <a:sym typeface="Arial"/>
+              </a:rPr>
+              <a:t>Just joking, smart people have already implemented the algorithms and optimized it to work with this.</a:t>
+            </a:r>
+          </a:p>
+          <a:p>
+            <a:pPr marL="0" lvl="0" indent="0">
+              <a:lnSpc>
+                <a:spcPct val="100000"/>
+              </a:lnSpc>
+              <a:spcBef>
+                <a:spcPts val="0"/>
+              </a:spcBef>
+              <a:buSzPts val="2000"/>
+              <a:buNone/>
+            </a:pPr>
+            <a:r>
+              <a:rPr lang="en-US" sz="2400" dirty="0">
+                <a:latin typeface="Arial"/>
+                <a:cs typeface="Arial"/>
+                <a:sym typeface="Arial"/>
+              </a:rPr>
+              <a:t>Ping </a:t>
+            </a:r>
+            <a:r>
+              <a:rPr lang="en-US" sz="2400">
+                <a:latin typeface="Arial"/>
+                <a:cs typeface="Arial"/>
+                <a:sym typeface="Arial"/>
+              </a:rPr>
+              <a:t>Pong filter</a:t>
+            </a:r>
+            <a:endParaRPr lang="en-US" sz="2400" dirty="0">
+              <a:latin typeface="Arial"/>
+              <a:cs typeface="Arial"/>
+              <a:sym typeface="Arial"/>
+            </a:endParaRPr>
+          </a:p>
+          <a:p>
+            <a:pPr marL="0" lvl="0" indent="0">
+              <a:lnSpc>
+                <a:spcPct val="100000"/>
+              </a:lnSpc>
+              <a:spcBef>
+                <a:spcPts val="0"/>
+              </a:spcBef>
+              <a:buSzPts val="2000"/>
+              <a:buNone/>
+            </a:pPr>
+            <a:endParaRPr lang="en-US" sz="2400" dirty="0">
+              <a:latin typeface="Arial"/>
+              <a:cs typeface="Arial"/>
+              <a:sym typeface="Arial"/>
+            </a:endParaRPr>
+          </a:p>
+          <a:p>
+            <a:pPr marL="0" lvl="0" indent="0">
+              <a:lnSpc>
+                <a:spcPct val="100000"/>
+              </a:lnSpc>
+              <a:spcBef>
+                <a:spcPts val="0"/>
+              </a:spcBef>
+              <a:buSzPts val="2000"/>
+              <a:buNone/>
+            </a:pPr>
+            <a:r>
+              <a:rPr lang="en-US" sz="2400" dirty="0">
+                <a:latin typeface="Arial"/>
+                <a:cs typeface="Arial"/>
+                <a:sym typeface="Arial"/>
+              </a:rPr>
+              <a:t>FIR Filters and FIR1 to design those. The Toolbox is signal processing 0-1 </a:t>
+            </a:r>
+            <a:r>
+              <a:rPr lang="en-US" sz="2400" dirty="0" err="1">
+                <a:latin typeface="Arial"/>
+                <a:cs typeface="Arial"/>
+                <a:sym typeface="Arial"/>
+              </a:rPr>
+              <a:t>niquist</a:t>
+            </a:r>
+            <a:r>
+              <a:rPr lang="en-US" sz="2400" dirty="0">
+                <a:latin typeface="Arial"/>
+                <a:cs typeface="Arial"/>
+                <a:sym typeface="Arial"/>
+              </a:rPr>
+              <a:t> frequency. Sampling at 1000Hz, cutoff frequency for half. </a:t>
+            </a:r>
+          </a:p>
+          <a:p>
+            <a:pPr marL="0" lvl="0" indent="0">
+              <a:lnSpc>
+                <a:spcPct val="100000"/>
+              </a:lnSpc>
+              <a:spcBef>
+                <a:spcPts val="0"/>
+              </a:spcBef>
+              <a:buSzPts val="2000"/>
+              <a:buNone/>
+            </a:pPr>
+            <a:r>
+              <a:rPr lang="en-US" sz="2400" dirty="0">
+                <a:latin typeface="Arial"/>
+                <a:cs typeface="Arial"/>
+                <a:sym typeface="Arial"/>
+              </a:rPr>
+              <a:t>Average filter, just average 5 points,</a:t>
+            </a:r>
+          </a:p>
+          <a:p>
+            <a:pPr marL="0" lvl="0" indent="0">
+              <a:lnSpc>
+                <a:spcPct val="100000"/>
+              </a:lnSpc>
+              <a:spcBef>
+                <a:spcPts val="0"/>
+              </a:spcBef>
+              <a:buSzPts val="2000"/>
+              <a:buNone/>
+            </a:pPr>
+            <a:r>
+              <a:rPr lang="en-US" sz="2400" dirty="0">
+                <a:latin typeface="Arial"/>
+                <a:cs typeface="Arial"/>
+                <a:sym typeface="Arial"/>
+              </a:rPr>
+              <a:t>Do FIR frequency, do 21</a:t>
+            </a:r>
+            <a:r>
+              <a:rPr lang="en-US" sz="2400" baseline="30000" dirty="0">
+                <a:latin typeface="Arial"/>
+                <a:cs typeface="Arial"/>
+                <a:sym typeface="Arial"/>
+              </a:rPr>
+              <a:t>st</a:t>
+            </a:r>
+            <a:r>
+              <a:rPr lang="en-US" sz="2400" dirty="0">
+                <a:latin typeface="Arial"/>
+                <a:cs typeface="Arial"/>
+                <a:sym typeface="Arial"/>
+              </a:rPr>
+              <a:t> order FIR filter.</a:t>
+            </a:r>
+            <a:endParaRPr lang="en-US" sz="2400" dirty="0"/>
+          </a:p>
+        </p:txBody>
+      </p:sp>
+      <p:sp>
+        <p:nvSpPr>
+          <p:cNvPr id="119" name="Google Shape;119;p29">
+            <a:extLst>
+              <a:ext uri="{FF2B5EF4-FFF2-40B4-BE49-F238E27FC236}">
+                <a16:creationId xmlns:a16="http://schemas.microsoft.com/office/drawing/2014/main" id="{54643988-F678-D425-3BD4-7585145F51BA}"/>
+              </a:ext>
+            </a:extLst>
+          </p:cNvPr>
           <p:cNvSpPr/>
           <p:nvPr/>
         </p:nvSpPr>
@@ -25694,245 +28315,13 @@
       </p:sp>
       <p:sp>
         <p:nvSpPr>
-          <p:cNvPr id="132" name="Google Shape;132;p30"/>
-          <p:cNvSpPr txBox="1"/>
-          <p:nvPr/>
-        </p:nvSpPr>
-        <p:spPr>
-          <a:xfrm>
-            <a:off x="376810" y="1334279"/>
-            <a:ext cx="5442100" cy="4821102"/>
-          </a:xfrm>
-          <a:prstGeom prst="rect">
-            <a:avLst/>
-          </a:prstGeom>
-          <a:noFill/>
-          <a:ln>
-            <a:noFill/>
-          </a:ln>
-        </p:spPr>
-        <p:txBody>
-          <a:bodyPr spcFirstLastPara="1" wrap="square" lIns="91425" tIns="45700" rIns="91425" bIns="45700" anchor="t" anchorCtr="0">
-            <a:noAutofit/>
-          </a:bodyPr>
-          <a:lstStyle/>
-          <a:p>
-            <a:pPr marL="0" marR="0" lvl="0" indent="0" algn="l" rtl="0">
-              <a:lnSpc>
-                <a:spcPct val="100000"/>
-              </a:lnSpc>
-              <a:spcBef>
-                <a:spcPts val="0"/>
-              </a:spcBef>
-              <a:spcAft>
-                <a:spcPts val="0"/>
-              </a:spcAft>
-              <a:buNone/>
-            </a:pPr>
-            <a:r>
-              <a:rPr lang="en-US" sz="2600" b="1" i="0" u="none" strike="noStrike" cap="none">
-                <a:solidFill>
-                  <a:srgbClr val="E84B36"/>
-                </a:solidFill>
-                <a:latin typeface="Arial"/>
-                <a:ea typeface="Arial"/>
-                <a:cs typeface="Arial"/>
-                <a:sym typeface="Arial"/>
-              </a:rPr>
-              <a:t>Lorem Ipsum Dolor Sit Amet Consectetur Adipiscing</a:t>
-            </a:r>
-            <a:endParaRPr sz="2600" b="1" i="0" u="none" strike="noStrike" cap="none">
-              <a:solidFill>
-                <a:srgbClr val="E84B36"/>
-              </a:solidFill>
-              <a:latin typeface="Arial"/>
-              <a:ea typeface="Arial"/>
-              <a:cs typeface="Arial"/>
-              <a:sym typeface="Arial"/>
-            </a:endParaRPr>
-          </a:p>
-          <a:p>
-            <a:pPr marL="0" marR="0" lvl="0" indent="0" algn="l" rtl="0">
-              <a:lnSpc>
-                <a:spcPct val="100000"/>
-              </a:lnSpc>
-              <a:spcBef>
-                <a:spcPts val="0"/>
-              </a:spcBef>
-              <a:spcAft>
-                <a:spcPts val="0"/>
-              </a:spcAft>
-              <a:buNone/>
-            </a:pPr>
-            <a:endParaRPr sz="1800" b="0" i="0" u="none" strike="noStrike" cap="none">
-              <a:solidFill>
-                <a:schemeClr val="dk1"/>
-              </a:solidFill>
-              <a:latin typeface="Arial"/>
-              <a:ea typeface="Arial"/>
-              <a:cs typeface="Arial"/>
-              <a:sym typeface="Arial"/>
-            </a:endParaRPr>
-          </a:p>
-          <a:p>
-            <a:pPr marL="0" marR="0" lvl="0" indent="0" algn="l" rtl="0">
-              <a:lnSpc>
-                <a:spcPct val="100000"/>
-              </a:lnSpc>
-              <a:spcBef>
-                <a:spcPts val="0"/>
-              </a:spcBef>
-              <a:spcAft>
-                <a:spcPts val="0"/>
-              </a:spcAft>
-              <a:buNone/>
-            </a:pPr>
-            <a:r>
-              <a:rPr lang="en-US" sz="1800" b="0" i="0" u="none" strike="noStrike" cap="none">
-                <a:solidFill>
-                  <a:srgbClr val="000000"/>
-                </a:solidFill>
-                <a:latin typeface="Arial"/>
-                <a:ea typeface="Arial"/>
-                <a:cs typeface="Arial"/>
-                <a:sym typeface="Arial"/>
-              </a:rPr>
-              <a:t>Lorem ipsum dolor sit amet, consectetur adipiscing elit, sed do eiusmod tempor incididunt ut labore et dolore magna aliqua. Ut enim ad minim veniam, quis nostrud exercitation ullamco laboris nisi ut aliquip ex ea commodo consequat. Duis aute irure dolor in reprehenderit in voluptate velit esse cillum dolore eu fugiat nulla pariatur. Excepteur sint occaecat cupidatat non proident, sunt in culpa qui officia deserunt mollit anim id est laborum.</a:t>
-            </a:r>
-            <a:endParaRPr sz="1800" b="1" i="0" u="none" strike="noStrike" cap="none">
-              <a:solidFill>
-                <a:schemeClr val="dk1"/>
-              </a:solidFill>
-              <a:latin typeface="Arial"/>
-              <a:ea typeface="Arial"/>
-              <a:cs typeface="Arial"/>
-              <a:sym typeface="Arial"/>
-            </a:endParaRPr>
-          </a:p>
-        </p:txBody>
-      </p:sp>
-      <p:sp>
-        <p:nvSpPr>
-          <p:cNvPr id="133" name="Google Shape;133;p30"/>
-          <p:cNvSpPr txBox="1"/>
-          <p:nvPr/>
-        </p:nvSpPr>
-        <p:spPr>
-          <a:xfrm>
-            <a:off x="6158774" y="1334279"/>
-            <a:ext cx="5442100" cy="4821102"/>
-          </a:xfrm>
-          <a:prstGeom prst="rect">
-            <a:avLst/>
-          </a:prstGeom>
-          <a:noFill/>
-          <a:ln>
-            <a:noFill/>
-          </a:ln>
-        </p:spPr>
-        <p:txBody>
-          <a:bodyPr spcFirstLastPara="1" wrap="square" lIns="91425" tIns="45700" rIns="91425" bIns="45700" anchor="t" anchorCtr="0">
-            <a:noAutofit/>
-          </a:bodyPr>
-          <a:lstStyle/>
-          <a:p>
-            <a:pPr marL="0" marR="0" lvl="0" indent="0" algn="l" rtl="0">
-              <a:lnSpc>
-                <a:spcPct val="100000"/>
-              </a:lnSpc>
-              <a:spcBef>
-                <a:spcPts val="0"/>
-              </a:spcBef>
-              <a:spcAft>
-                <a:spcPts val="0"/>
-              </a:spcAft>
-              <a:buNone/>
-            </a:pPr>
-            <a:r>
-              <a:rPr lang="en-US" sz="2000" b="1" i="0" u="none" strike="noStrike" cap="none">
-                <a:solidFill>
-                  <a:srgbClr val="15264B"/>
-                </a:solidFill>
-                <a:latin typeface="Arial"/>
-                <a:ea typeface="Arial"/>
-                <a:cs typeface="Arial"/>
-                <a:sym typeface="Arial"/>
-              </a:rPr>
-              <a:t>Lorem Ipsum Dolor Sit Amet Consectetur Adipiscing</a:t>
-            </a:r>
-            <a:endParaRPr sz="2000" b="1" i="0" u="none" strike="noStrike" cap="none">
-              <a:solidFill>
-                <a:srgbClr val="15264B"/>
-              </a:solidFill>
-              <a:latin typeface="Arial"/>
-              <a:ea typeface="Arial"/>
-              <a:cs typeface="Arial"/>
-              <a:sym typeface="Arial"/>
-            </a:endParaRPr>
-          </a:p>
-          <a:p>
-            <a:pPr marL="0" marR="0" lvl="0" indent="0" algn="l" rtl="0">
-              <a:lnSpc>
-                <a:spcPct val="100000"/>
-              </a:lnSpc>
-              <a:spcBef>
-                <a:spcPts val="0"/>
-              </a:spcBef>
-              <a:spcAft>
-                <a:spcPts val="0"/>
-              </a:spcAft>
-              <a:buNone/>
-            </a:pPr>
-            <a:endParaRPr sz="1800" b="0" i="0" u="none" strike="noStrike" cap="none">
-              <a:solidFill>
-                <a:schemeClr val="dk1"/>
-              </a:solidFill>
-              <a:latin typeface="Arial"/>
-              <a:ea typeface="Arial"/>
-              <a:cs typeface="Arial"/>
-              <a:sym typeface="Arial"/>
-            </a:endParaRPr>
-          </a:p>
-          <a:p>
-            <a:pPr marL="0" marR="0" lvl="0" indent="0" algn="l" rtl="0">
-              <a:lnSpc>
-                <a:spcPct val="100000"/>
-              </a:lnSpc>
-              <a:spcBef>
-                <a:spcPts val="0"/>
-              </a:spcBef>
-              <a:spcAft>
-                <a:spcPts val="0"/>
-              </a:spcAft>
-              <a:buNone/>
-            </a:pPr>
-            <a:r>
-              <a:rPr lang="en-US" sz="1800" b="0" i="0" u="none" strike="noStrike" cap="none">
-                <a:solidFill>
-                  <a:srgbClr val="000000"/>
-                </a:solidFill>
-                <a:latin typeface="Arial"/>
-                <a:ea typeface="Arial"/>
-                <a:cs typeface="Arial"/>
-                <a:sym typeface="Arial"/>
-              </a:rPr>
-              <a:t>Lorem ipsum dolor sit amet, consectetur adipiscing elit, sed do eiusmod tempor incididunt ut labore et dolore magna aliqua. Ut enim ad minim veniam, quis nostrud exercitation ullamco laboris nisi ut aliquip ex ea commodo consequat. Duis aute irure dolor in reprehenderit in voluptate velit esse cillum dolore eu fugiat nulla pariatur. Excepteur sint occaecat cupidatat non proident, sunt in culpa qui officia deserunt mollit anim id est laborum.</a:t>
-            </a:r>
-            <a:endParaRPr sz="1800" b="1" i="0" u="none" strike="noStrike" cap="none">
-              <a:solidFill>
-                <a:schemeClr val="dk1"/>
-              </a:solidFill>
-              <a:latin typeface="Arial"/>
-              <a:ea typeface="Arial"/>
-              <a:cs typeface="Arial"/>
-              <a:sym typeface="Arial"/>
-            </a:endParaRPr>
-          </a:p>
-        </p:txBody>
-      </p:sp>
-      <p:sp>
-        <p:nvSpPr>
-          <p:cNvPr id="134" name="Google Shape;134;p30"/>
+          <p:cNvPr id="120" name="Google Shape;120;p29">
+            <a:extLst>
+              <a:ext uri="{FF2B5EF4-FFF2-40B4-BE49-F238E27FC236}">
+                <a16:creationId xmlns:a16="http://schemas.microsoft.com/office/drawing/2014/main" id="{9DFBF429-F955-86D0-8083-A9FAB1D76372}"/>
+              </a:ext>
+            </a:extLst>
+          </p:cNvPr>
           <p:cNvSpPr txBox="1"/>
           <p:nvPr/>
         </p:nvSpPr>
@@ -25973,7 +28362,7 @@
               <a:buNone/>
             </a:pPr>
             <a:r>
-              <a:rPr lang="en-US" sz="2400" b="0" i="0" u="none" strike="noStrike" cap="none">
+              <a:rPr lang="en-US" sz="2400" b="0" i="0" u="none" strike="noStrike" cap="none" dirty="0">
                 <a:solidFill>
                   <a:schemeClr val="lt1"/>
                 </a:solidFill>
@@ -25982,9 +28371,9 @@
                 <a:cs typeface="Arial"/>
                 <a:sym typeface="Arial"/>
               </a:rPr>
-              <a:t>Slide Title</a:t>
+              <a:t>FFT Code</a:t>
             </a:r>
-            <a:endParaRPr sz="2400" b="0" i="0" u="none" strike="noStrike" cap="none">
+            <a:endParaRPr sz="2400" b="0" i="0" u="none" strike="noStrike" cap="none" dirty="0">
               <a:solidFill>
                 <a:schemeClr val="lt1"/>
               </a:solidFill>
@@ -25998,7 +28387,13 @@
       </p:sp>
       <p:pic>
         <p:nvPicPr>
-          <p:cNvPr id="135" name="Google Shape;135;p30"/>
+          <p:cNvPr id="121" name="Google Shape;121;p29">
+            <a:extLst>
+              <a:ext uri="{FF2B5EF4-FFF2-40B4-BE49-F238E27FC236}">
+                <a16:creationId xmlns:a16="http://schemas.microsoft.com/office/drawing/2014/main" id="{48159945-3D66-7903-6E66-7B9433902931}"/>
+              </a:ext>
+            </a:extLst>
+          </p:cNvPr>
           <p:cNvPicPr preferRelativeResize="0"/>
           <p:nvPr/>
         </p:nvPicPr>
@@ -26025,7 +28420,13 @@
       </p:pic>
       <p:sp>
         <p:nvSpPr>
-          <p:cNvPr id="136" name="Google Shape;136;p30"/>
+          <p:cNvPr id="122" name="Google Shape;122;p29">
+            <a:extLst>
+              <a:ext uri="{FF2B5EF4-FFF2-40B4-BE49-F238E27FC236}">
+                <a16:creationId xmlns:a16="http://schemas.microsoft.com/office/drawing/2014/main" id="{1E75CFC1-1D15-B365-A2AF-7713F8970AF0}"/>
+              </a:ext>
+            </a:extLst>
+          </p:cNvPr>
           <p:cNvSpPr txBox="1"/>
           <p:nvPr/>
         </p:nvSpPr>
@@ -26078,7 +28479,13 @@
       </p:sp>
       <p:sp>
         <p:nvSpPr>
-          <p:cNvPr id="137" name="Google Shape;137;p30"/>
+          <p:cNvPr id="123" name="Google Shape;123;p29">
+            <a:extLst>
+              <a:ext uri="{FF2B5EF4-FFF2-40B4-BE49-F238E27FC236}">
+                <a16:creationId xmlns:a16="http://schemas.microsoft.com/office/drawing/2014/main" id="{67B215CE-AEFA-8D62-F131-805B10DFE241}"/>
+              </a:ext>
+            </a:extLst>
+          </p:cNvPr>
           <p:cNvSpPr txBox="1"/>
           <p:nvPr/>
         </p:nvSpPr>
@@ -26119,7 +28526,7 @@
                   <a:srgbClr val="13294B"/>
                 </a:solidFill>
               </a:rPr>
-              <a:t>SYSTEMS ENGINEERING</a:t>
+              <a:t>SYSTEMS ENGINEERING </a:t>
             </a:r>
             <a:endParaRPr dirty="0"/>
           </a:p>
@@ -26127,7 +28534,13 @@
       </p:sp>
       <p:grpSp>
         <p:nvGrpSpPr>
-          <p:cNvPr id="138" name="Google Shape;138;p30"/>
+          <p:cNvPr id="124" name="Google Shape;124;p29">
+            <a:extLst>
+              <a:ext uri="{FF2B5EF4-FFF2-40B4-BE49-F238E27FC236}">
+                <a16:creationId xmlns:a16="http://schemas.microsoft.com/office/drawing/2014/main" id="{83A7A4ED-4E3E-015D-0BC3-6EDF5495A87E}"/>
+              </a:ext>
+            </a:extLst>
+          </p:cNvPr>
           <p:cNvGrpSpPr/>
           <p:nvPr/>
         </p:nvGrpSpPr>
@@ -26141,7 +28554,13 @@
         </p:grpSpPr>
         <p:cxnSp>
           <p:nvCxnSpPr>
-            <p:cNvPr id="139" name="Google Shape;139;p30"/>
+            <p:cNvPr id="125" name="Google Shape;125;p29">
+              <a:extLst>
+                <a:ext uri="{FF2B5EF4-FFF2-40B4-BE49-F238E27FC236}">
+                  <a16:creationId xmlns:a16="http://schemas.microsoft.com/office/drawing/2014/main" id="{29D3F5EC-F133-69BD-FBBD-90B47565E161}"/>
+                </a:ext>
+              </a:extLst>
+            </p:cNvPr>
             <p:cNvCxnSpPr/>
             <p:nvPr/>
           </p:nvCxnSpPr>
@@ -26167,7 +28586,13 @@
         </p:cxnSp>
         <p:sp>
           <p:nvSpPr>
-            <p:cNvPr id="140" name="Google Shape;140;p30"/>
+            <p:cNvPr id="126" name="Google Shape;126;p29">
+              <a:extLst>
+                <a:ext uri="{FF2B5EF4-FFF2-40B4-BE49-F238E27FC236}">
+                  <a16:creationId xmlns:a16="http://schemas.microsoft.com/office/drawing/2014/main" id="{B21F260F-D310-6BC5-AC97-769799A63985}"/>
+                </a:ext>
+              </a:extLst>
+            </p:cNvPr>
             <p:cNvSpPr/>
             <p:nvPr/>
           </p:nvSpPr>
@@ -26218,6 +28643,11 @@
         </p:sp>
       </p:grpSp>
     </p:spTree>
+    <p:extLst>
+      <p:ext uri="{BB962C8B-B14F-4D97-AF65-F5344CB8AC3E}">
+        <p14:creationId xmlns:p14="http://schemas.microsoft.com/office/powerpoint/2010/main" val="1606909359"/>
+      </p:ext>
+    </p:extLst>
   </p:cSld>
   <p:clrMapOvr>
     <a:masterClrMapping/>
@@ -26228,9 +28658,28 @@
 <file path=ppt/slides/slide9.xml><?xml version="1.0" encoding="utf-8"?>
 <p:sld xmlns:a="http://schemas.openxmlformats.org/drawingml/2006/main" xmlns:r="http://schemas.openxmlformats.org/officeDocument/2006/relationships" xmlns:p="http://schemas.openxmlformats.org/presentationml/2006/main">
   <p:cSld>
+    <p:bg>
+      <p:bgPr>
+        <a:blipFill>
+          <a:blip r:embed="rId3">
+            <a:alphaModFix/>
+          </a:blip>
+          <a:stretch>
+            <a:fillRect/>
+          </a:stretch>
+        </a:blipFill>
+        <a:effectLst/>
+      </p:bgPr>
+    </p:bg>
     <p:spTree>
       <p:nvGrpSpPr>
-        <p:cNvPr id="1" name="Shape 144"/>
+        <p:cNvPr id="1" name="Shape 103">
+          <a:extLst>
+            <a:ext uri="{FF2B5EF4-FFF2-40B4-BE49-F238E27FC236}">
+              <a16:creationId xmlns:a16="http://schemas.microsoft.com/office/drawing/2014/main" id="{7EC638A4-F765-FEFC-3482-D8326604041C}"/>
+            </a:ext>
+          </a:extLst>
+        </p:cNvPr>
         <p:cNvGrpSpPr/>
         <p:nvPr/>
       </p:nvGrpSpPr>
@@ -26244,70 +28693,20 @@
       </p:grpSpPr>
       <p:sp>
         <p:nvSpPr>
-          <p:cNvPr id="145" name="Google Shape;145;p31"/>
-          <p:cNvSpPr/>
-          <p:nvPr/>
-        </p:nvSpPr>
-        <p:spPr>
-          <a:xfrm>
-            <a:off x="475566" y="1263717"/>
-            <a:ext cx="4356660" cy="2315647"/>
-          </a:xfrm>
-          <a:prstGeom prst="rect">
-            <a:avLst/>
-          </a:prstGeom>
-          <a:solidFill>
-            <a:srgbClr val="D8D8D8"/>
-          </a:solidFill>
-          <a:ln>
-            <a:noFill/>
-          </a:ln>
-        </p:spPr>
-        <p:txBody>
-          <a:bodyPr spcFirstLastPara="1" wrap="square" lIns="91425" tIns="45700" rIns="91425" bIns="45700" anchor="ctr" anchorCtr="0">
-            <a:noAutofit/>
-          </a:bodyPr>
-          <a:lstStyle/>
-          <a:p>
-            <a:pPr marL="0" marR="0" lvl="0" indent="0" algn="ctr" rtl="0">
-              <a:lnSpc>
-                <a:spcPct val="100000"/>
-              </a:lnSpc>
-              <a:spcBef>
-                <a:spcPts val="0"/>
-              </a:spcBef>
-              <a:spcAft>
-                <a:spcPts val="0"/>
-              </a:spcAft>
-              <a:buClr>
-                <a:srgbClr val="000000"/>
-              </a:buClr>
-              <a:buSzPts val="1800"/>
-              <a:buFont typeface="Arial"/>
-              <a:buNone/>
-            </a:pPr>
-            <a:endParaRPr sz="1800" b="0" i="0" u="none" strike="noStrike" cap="none">
-              <a:solidFill>
-                <a:schemeClr val="lt1"/>
-              </a:solidFill>
-              <a:latin typeface="Calibri"/>
-              <a:ea typeface="Calibri"/>
-              <a:cs typeface="Calibri"/>
-              <a:sym typeface="Calibri"/>
-            </a:endParaRPr>
-          </a:p>
-        </p:txBody>
-      </p:sp>
-      <p:sp>
-        <p:nvSpPr>
-          <p:cNvPr id="146" name="Google Shape;146;p31"/>
+          <p:cNvPr id="104" name="Google Shape;104;p28">
+            <a:extLst>
+              <a:ext uri="{FF2B5EF4-FFF2-40B4-BE49-F238E27FC236}">
+                <a16:creationId xmlns:a16="http://schemas.microsoft.com/office/drawing/2014/main" id="{F9972CC1-6DF8-C140-C0AD-26D8DDFBDAFC}"/>
+              </a:ext>
+            </a:extLst>
+          </p:cNvPr>
           <p:cNvSpPr txBox="1"/>
           <p:nvPr/>
         </p:nvSpPr>
         <p:spPr>
           <a:xfrm>
-            <a:off x="1494115" y="2239572"/>
-            <a:ext cx="2280491" cy="369332"/>
+            <a:off x="1295400" y="3225489"/>
+            <a:ext cx="9601200" cy="784790"/>
           </a:xfrm>
           <a:prstGeom prst="rect">
             <a:avLst/>
@@ -26318,7 +28717,7 @@
           </a:ln>
         </p:spPr>
         <p:txBody>
-          <a:bodyPr spcFirstLastPara="1" wrap="square" lIns="91425" tIns="45700" rIns="91425" bIns="45700" anchor="t" anchorCtr="0">
+          <a:bodyPr spcFirstLastPara="1" wrap="square" lIns="91425" tIns="45700" rIns="91425" bIns="45700" anchor="ctr" anchorCtr="0">
             <a:spAutoFit/>
           </a:bodyPr>
           <a:lstStyle/>
@@ -26336,25 +28735,25 @@
               <a:buClr>
                 <a:srgbClr val="000000"/>
               </a:buClr>
-              <a:buSzPts val="1800"/>
+              <a:buSzPts val="4500"/>
               <a:buFont typeface="Arial"/>
               <a:buNone/>
             </a:pPr>
             <a:r>
-              <a:rPr lang="en-US" sz="1800" b="0" i="0" u="none" strike="noStrike" cap="none">
-                <a:solidFill>
-                  <a:srgbClr val="A5A5A5"/>
+              <a:rPr lang="en-US" sz="4500" b="1" i="0" u="none" strike="noStrike" cap="none" dirty="0">
+                <a:solidFill>
+                  <a:srgbClr val="15264B"/>
                 </a:solidFill>
                 <a:latin typeface="Arial"/>
                 <a:ea typeface="Arial"/>
                 <a:cs typeface="Arial"/>
                 <a:sym typeface="Arial"/>
               </a:rPr>
-              <a:t>IMAGE / GRAPHIC</a:t>
+              <a:t>FIR Filters</a:t>
             </a:r>
-            <a:endParaRPr sz="1400" b="0" i="0" u="none" strike="noStrike" cap="none">
+            <a:endParaRPr sz="1800" b="0" i="0" u="none" strike="noStrike" cap="none" dirty="0">
               <a:solidFill>
-                <a:srgbClr val="000000"/>
+                <a:srgbClr val="15264B"/>
               </a:solidFill>
               <a:latin typeface="Arial"/>
               <a:ea typeface="Arial"/>
@@ -26364,485 +28763,105 @@
           </a:p>
         </p:txBody>
       </p:sp>
-      <p:sp>
-        <p:nvSpPr>
-          <p:cNvPr id="147" name="Google Shape;147;p31"/>
-          <p:cNvSpPr/>
+      <p:grpSp>
+        <p:nvGrpSpPr>
+          <p:cNvPr id="105" name="Google Shape;105;p28">
+            <a:extLst>
+              <a:ext uri="{FF2B5EF4-FFF2-40B4-BE49-F238E27FC236}">
+                <a16:creationId xmlns:a16="http://schemas.microsoft.com/office/drawing/2014/main" id="{F31B6DEE-FD88-5270-5207-5AD806407B09}"/>
+              </a:ext>
+            </a:extLst>
+          </p:cNvPr>
+          <p:cNvGrpSpPr/>
           <p:nvPr/>
-        </p:nvSpPr>
-        <p:spPr>
+        </p:nvGrpSpPr>
+        <p:grpSpPr>
           <a:xfrm>
-            <a:off x="475566" y="3774068"/>
-            <a:ext cx="4356660" cy="2315647"/>
+            <a:off x="3943790" y="2676939"/>
+            <a:ext cx="3861740" cy="322845"/>
+            <a:chOff x="3943790" y="2676939"/>
+            <a:chExt cx="3861740" cy="322845"/>
           </a:xfrm>
-          <a:prstGeom prst="rect">
-            <a:avLst/>
-          </a:prstGeom>
-          <a:solidFill>
-            <a:srgbClr val="D8D8D8"/>
-          </a:solidFill>
-          <a:ln>
+        </p:grpSpPr>
+        <p:cxnSp>
+          <p:nvCxnSpPr>
+            <p:cNvPr id="106" name="Google Shape;106;p28">
+              <a:extLst>
+                <a:ext uri="{FF2B5EF4-FFF2-40B4-BE49-F238E27FC236}">
+                  <a16:creationId xmlns:a16="http://schemas.microsoft.com/office/drawing/2014/main" id="{09AA2069-069B-2F17-657B-BFFDDABFF01A}"/>
+                </a:ext>
+              </a:extLst>
+            </p:cNvPr>
+            <p:cNvCxnSpPr/>
+            <p:nvPr/>
+          </p:nvCxnSpPr>
+          <p:spPr>
+            <a:xfrm>
+              <a:off x="4426226" y="2676939"/>
+              <a:ext cx="3379304" cy="0"/>
+            </a:xfrm>
+            <a:prstGeom prst="straightConnector1">
+              <a:avLst/>
+            </a:prstGeom>
             <a:noFill/>
-          </a:ln>
-        </p:spPr>
-        <p:txBody>
-          <a:bodyPr spcFirstLastPara="1" wrap="square" lIns="91425" tIns="45700" rIns="91425" bIns="45700" anchor="ctr" anchorCtr="0">
-            <a:noAutofit/>
-          </a:bodyPr>
-          <a:lstStyle/>
-          <a:p>
-            <a:pPr marL="0" marR="0" lvl="0" indent="0" algn="ctr" rtl="0">
-              <a:lnSpc>
-                <a:spcPct val="100000"/>
-              </a:lnSpc>
-              <a:spcBef>
-                <a:spcPts val="0"/>
-              </a:spcBef>
-              <a:spcAft>
-                <a:spcPts val="0"/>
-              </a:spcAft>
-              <a:buClr>
-                <a:srgbClr val="000000"/>
-              </a:buClr>
-              <a:buSzPts val="1800"/>
-              <a:buFont typeface="Arial"/>
-              <a:buNone/>
-            </a:pPr>
-            <a:endParaRPr sz="1800" b="0" i="0" u="none" strike="noStrike" cap="none">
+            <a:ln w="19050" cap="flat" cmpd="sng">
               <a:solidFill>
                 <a:schemeClr val="lt1"/>
               </a:solidFill>
-              <a:latin typeface="Calibri"/>
-              <a:ea typeface="Calibri"/>
-              <a:cs typeface="Calibri"/>
-              <a:sym typeface="Calibri"/>
-            </a:endParaRPr>
-          </a:p>
-        </p:txBody>
-      </p:sp>
-      <p:sp>
-        <p:nvSpPr>
-          <p:cNvPr id="148" name="Google Shape;148;p31"/>
-          <p:cNvSpPr txBox="1"/>
-          <p:nvPr/>
-        </p:nvSpPr>
-        <p:spPr>
-          <a:xfrm>
-            <a:off x="1494115" y="4747225"/>
-            <a:ext cx="2280491" cy="369332"/>
-          </a:xfrm>
-          <a:prstGeom prst="rect">
-            <a:avLst/>
-          </a:prstGeom>
-          <a:noFill/>
-          <a:ln>
+              <a:prstDash val="solid"/>
+              <a:round/>
+              <a:headEnd type="none" w="sm" len="sm"/>
+              <a:tailEnd type="none" w="sm" len="sm"/>
+            </a:ln>
+          </p:spPr>
+        </p:cxnSp>
+        <p:cxnSp>
+          <p:nvCxnSpPr>
+            <p:cNvPr id="107" name="Google Shape;107;p28">
+              <a:extLst>
+                <a:ext uri="{FF2B5EF4-FFF2-40B4-BE49-F238E27FC236}">
+                  <a16:creationId xmlns:a16="http://schemas.microsoft.com/office/drawing/2014/main" id="{A681EE2C-173F-9BE0-497A-96F0E114B9E6}"/>
+                </a:ext>
+              </a:extLst>
+            </p:cNvPr>
+            <p:cNvCxnSpPr/>
+            <p:nvPr/>
+          </p:nvCxnSpPr>
+          <p:spPr>
+            <a:xfrm rot="10800000" flipH="1">
+              <a:off x="3943790" y="2676939"/>
+              <a:ext cx="482436" cy="322845"/>
+            </a:xfrm>
+            <a:prstGeom prst="straightConnector1">
+              <a:avLst/>
+            </a:prstGeom>
             <a:noFill/>
-          </a:ln>
-        </p:spPr>
-        <p:txBody>
-          <a:bodyPr spcFirstLastPara="1" wrap="square" lIns="91425" tIns="45700" rIns="91425" bIns="45700" anchor="t" anchorCtr="0">
-            <a:spAutoFit/>
-          </a:bodyPr>
-          <a:lstStyle/>
-          <a:p>
-            <a:pPr marL="0" marR="0" lvl="0" indent="0" algn="ctr" rtl="0">
-              <a:lnSpc>
-                <a:spcPct val="100000"/>
-              </a:lnSpc>
-              <a:spcBef>
-                <a:spcPts val="0"/>
-              </a:spcBef>
-              <a:spcAft>
-                <a:spcPts val="0"/>
-              </a:spcAft>
-              <a:buClr>
-                <a:srgbClr val="000000"/>
-              </a:buClr>
-              <a:buSzPts val="1800"/>
-              <a:buFont typeface="Arial"/>
-              <a:buNone/>
-            </a:pPr>
-            <a:r>
-              <a:rPr lang="en-US" sz="1800" b="0" i="0" u="none" strike="noStrike" cap="none">
-                <a:solidFill>
-                  <a:srgbClr val="A5A5A5"/>
-                </a:solidFill>
-                <a:latin typeface="Arial"/>
-                <a:ea typeface="Arial"/>
-                <a:cs typeface="Arial"/>
-                <a:sym typeface="Arial"/>
-              </a:rPr>
-              <a:t>IMAGE / GRAPHIC</a:t>
-            </a:r>
-            <a:endParaRPr sz="1400" b="0" i="0" u="none" strike="noStrike" cap="none">
-              <a:solidFill>
-                <a:srgbClr val="000000"/>
-              </a:solidFill>
-              <a:latin typeface="Arial"/>
-              <a:ea typeface="Arial"/>
-              <a:cs typeface="Arial"/>
-              <a:sym typeface="Arial"/>
-            </a:endParaRPr>
-          </a:p>
-        </p:txBody>
-      </p:sp>
-      <p:sp>
-        <p:nvSpPr>
-          <p:cNvPr id="149" name="Google Shape;149;p31"/>
-          <p:cNvSpPr txBox="1"/>
-          <p:nvPr/>
-        </p:nvSpPr>
-        <p:spPr>
-          <a:xfrm>
-            <a:off x="5122548" y="1334279"/>
-            <a:ext cx="6686464" cy="4821102"/>
-          </a:xfrm>
-          <a:prstGeom prst="rect">
-            <a:avLst/>
-          </a:prstGeom>
-          <a:noFill/>
-          <a:ln>
-            <a:noFill/>
-          </a:ln>
-        </p:spPr>
-        <p:txBody>
-          <a:bodyPr spcFirstLastPara="1" wrap="square" lIns="91425" tIns="45700" rIns="91425" bIns="45700" anchor="t" anchorCtr="0">
-            <a:noAutofit/>
-          </a:bodyPr>
-          <a:lstStyle/>
-          <a:p>
-            <a:pPr marL="0" marR="0" lvl="0" indent="0" algn="l" rtl="0">
-              <a:lnSpc>
-                <a:spcPct val="100000"/>
-              </a:lnSpc>
-              <a:spcBef>
-                <a:spcPts val="0"/>
-              </a:spcBef>
-              <a:spcAft>
-                <a:spcPts val="0"/>
-              </a:spcAft>
-              <a:buNone/>
-            </a:pPr>
-            <a:r>
-              <a:rPr lang="en-US" sz="2600" b="1" i="0" u="none" strike="noStrike" cap="none">
-                <a:solidFill>
-                  <a:srgbClr val="E84B36"/>
-                </a:solidFill>
-                <a:latin typeface="Arial"/>
-                <a:ea typeface="Arial"/>
-                <a:cs typeface="Arial"/>
-                <a:sym typeface="Arial"/>
-              </a:rPr>
-              <a:t>Lorem Ipsum Dolor Sit Amet Consectetur Adipiscing</a:t>
-            </a:r>
-            <a:endParaRPr sz="2600" b="1" i="0" u="none" strike="noStrike" cap="none">
-              <a:solidFill>
-                <a:srgbClr val="E84B36"/>
-              </a:solidFill>
-              <a:latin typeface="Arial"/>
-              <a:ea typeface="Arial"/>
-              <a:cs typeface="Arial"/>
-              <a:sym typeface="Arial"/>
-            </a:endParaRPr>
-          </a:p>
-          <a:p>
-            <a:pPr marL="0" marR="0" lvl="0" indent="0" algn="l" rtl="0">
-              <a:lnSpc>
-                <a:spcPct val="100000"/>
-              </a:lnSpc>
-              <a:spcBef>
-                <a:spcPts val="0"/>
-              </a:spcBef>
-              <a:spcAft>
-                <a:spcPts val="0"/>
-              </a:spcAft>
-              <a:buNone/>
-            </a:pPr>
-            <a:endParaRPr sz="1800" b="0" i="0" u="none" strike="noStrike" cap="none">
-              <a:solidFill>
-                <a:schemeClr val="dk1"/>
-              </a:solidFill>
-              <a:latin typeface="Arial"/>
-              <a:ea typeface="Arial"/>
-              <a:cs typeface="Arial"/>
-              <a:sym typeface="Arial"/>
-            </a:endParaRPr>
-          </a:p>
-          <a:p>
-            <a:pPr marL="0" marR="0" lvl="0" indent="0" algn="l" rtl="0">
-              <a:lnSpc>
-                <a:spcPct val="100000"/>
-              </a:lnSpc>
-              <a:spcBef>
-                <a:spcPts val="0"/>
-              </a:spcBef>
-              <a:spcAft>
-                <a:spcPts val="0"/>
-              </a:spcAft>
-              <a:buNone/>
-            </a:pPr>
-            <a:r>
-              <a:rPr lang="en-US" sz="1800" b="0" i="0" u="none" strike="noStrike" cap="none">
-                <a:solidFill>
-                  <a:srgbClr val="000000"/>
-                </a:solidFill>
-                <a:latin typeface="Arial"/>
-                <a:ea typeface="Arial"/>
-                <a:cs typeface="Arial"/>
-                <a:sym typeface="Arial"/>
-              </a:rPr>
-              <a:t>Lorem ipsum dolor sit amet, consectetur adipiscing elit, sed do eiusmod tempor incididunt ut labore et dolore magna aliqua. Ut enim ad minim veniam, quis nostrud exercitation ullamco laboris nisi ut aliquip ex ea commodo consequat. </a:t>
-            </a:r>
-            <a:endParaRPr/>
-          </a:p>
-          <a:p>
-            <a:pPr marL="0" marR="0" lvl="0" indent="0" algn="l" rtl="0">
-              <a:lnSpc>
-                <a:spcPct val="100000"/>
-              </a:lnSpc>
-              <a:spcBef>
-                <a:spcPts val="0"/>
-              </a:spcBef>
-              <a:spcAft>
-                <a:spcPts val="0"/>
-              </a:spcAft>
-              <a:buNone/>
-            </a:pPr>
-            <a:endParaRPr sz="1800" b="0" i="0" u="none" strike="noStrike" cap="none">
-              <a:solidFill>
-                <a:schemeClr val="dk1"/>
-              </a:solidFill>
-              <a:latin typeface="Arial"/>
-              <a:ea typeface="Arial"/>
-              <a:cs typeface="Arial"/>
-              <a:sym typeface="Arial"/>
-            </a:endParaRPr>
-          </a:p>
-          <a:p>
-            <a:pPr marL="0" marR="0" lvl="0" indent="0" algn="l" rtl="0">
-              <a:lnSpc>
-                <a:spcPct val="100000"/>
-              </a:lnSpc>
-              <a:spcBef>
-                <a:spcPts val="0"/>
-              </a:spcBef>
-              <a:spcAft>
-                <a:spcPts val="0"/>
-              </a:spcAft>
-              <a:buNone/>
-            </a:pPr>
-            <a:r>
-              <a:rPr lang="en-US" sz="2000" b="1" i="0" u="none" strike="noStrike" cap="none">
-                <a:solidFill>
-                  <a:srgbClr val="15264B"/>
-                </a:solidFill>
-                <a:latin typeface="Arial"/>
-                <a:ea typeface="Arial"/>
-                <a:cs typeface="Arial"/>
-                <a:sym typeface="Arial"/>
-              </a:rPr>
-              <a:t>Lorem Ipsum Dolor Sit Amet Consectetur Adipiscing</a:t>
-            </a:r>
-            <a:endParaRPr sz="2000" b="1" i="0" u="none" strike="noStrike" cap="none">
-              <a:solidFill>
-                <a:srgbClr val="15264B"/>
-              </a:solidFill>
-              <a:latin typeface="Arial"/>
-              <a:ea typeface="Arial"/>
-              <a:cs typeface="Arial"/>
-              <a:sym typeface="Arial"/>
-            </a:endParaRPr>
-          </a:p>
-          <a:p>
-            <a:pPr marL="0" marR="0" lvl="0" indent="0" algn="l" rtl="0">
-              <a:lnSpc>
-                <a:spcPct val="100000"/>
-              </a:lnSpc>
-              <a:spcBef>
-                <a:spcPts val="0"/>
-              </a:spcBef>
-              <a:spcAft>
-                <a:spcPts val="0"/>
-              </a:spcAft>
-              <a:buNone/>
-            </a:pPr>
-            <a:endParaRPr sz="1800" b="1" i="0" u="none" strike="noStrike" cap="none">
-              <a:solidFill>
-                <a:schemeClr val="dk1"/>
-              </a:solidFill>
-              <a:latin typeface="Arial"/>
-              <a:ea typeface="Arial"/>
-              <a:cs typeface="Arial"/>
-              <a:sym typeface="Arial"/>
-            </a:endParaRPr>
-          </a:p>
-          <a:p>
-            <a:pPr marL="0" marR="0" lvl="0" indent="0" algn="l" rtl="0">
-              <a:lnSpc>
-                <a:spcPct val="100000"/>
-              </a:lnSpc>
-              <a:spcBef>
-                <a:spcPts val="0"/>
-              </a:spcBef>
-              <a:spcAft>
-                <a:spcPts val="0"/>
-              </a:spcAft>
-              <a:buNone/>
-            </a:pPr>
-            <a:r>
-              <a:rPr lang="en-US" sz="1800" b="0" i="0" u="none" strike="noStrike" cap="none">
-                <a:solidFill>
-                  <a:srgbClr val="000000"/>
-                </a:solidFill>
-                <a:latin typeface="Arial"/>
-                <a:ea typeface="Arial"/>
-                <a:cs typeface="Arial"/>
-                <a:sym typeface="Arial"/>
-              </a:rPr>
-              <a:t>Lorem ipsum dolor sit amet, consectetur adipiscing elit, sed do eiusmod tempor incididunt ut labore et dolore magna aliqua.</a:t>
-            </a:r>
-            <a:endParaRPr sz="1800" b="1" i="0" u="none" strike="noStrike" cap="none">
-              <a:solidFill>
-                <a:schemeClr val="dk1"/>
-              </a:solidFill>
-              <a:latin typeface="Arial"/>
-              <a:ea typeface="Arial"/>
-              <a:cs typeface="Arial"/>
-              <a:sym typeface="Arial"/>
-            </a:endParaRPr>
-          </a:p>
-        </p:txBody>
-      </p:sp>
-      <p:sp>
-        <p:nvSpPr>
-          <p:cNvPr id="150" name="Google Shape;150;p31"/>
-          <p:cNvSpPr/>
-          <p:nvPr/>
-        </p:nvSpPr>
-        <p:spPr>
-          <a:xfrm rot="10800000" flipH="1">
-            <a:off x="0" y="0"/>
-            <a:ext cx="12192000" cy="868220"/>
-          </a:xfrm>
-          <a:prstGeom prst="rect">
-            <a:avLst/>
-          </a:prstGeom>
-          <a:solidFill>
-            <a:srgbClr val="13294B"/>
-          </a:solidFill>
-          <a:ln>
-            <a:noFill/>
-          </a:ln>
-        </p:spPr>
-        <p:txBody>
-          <a:bodyPr spcFirstLastPara="1" wrap="square" lIns="91425" tIns="45700" rIns="91425" bIns="45700" anchor="ctr" anchorCtr="0">
-            <a:noAutofit/>
-          </a:bodyPr>
-          <a:lstStyle/>
-          <a:p>
-            <a:pPr marL="0" marR="0" lvl="0" indent="0" algn="ctr" rtl="0">
-              <a:lnSpc>
-                <a:spcPct val="100000"/>
-              </a:lnSpc>
-              <a:spcBef>
-                <a:spcPts val="0"/>
-              </a:spcBef>
-              <a:spcAft>
-                <a:spcPts val="0"/>
-              </a:spcAft>
-              <a:buClr>
-                <a:schemeClr val="lt1"/>
-              </a:buClr>
-              <a:buSzPts val="1800"/>
-              <a:buFont typeface="Calibri"/>
-              <a:buNone/>
-            </a:pPr>
-            <a:endParaRPr sz="1800" b="0" i="0" u="none" strike="noStrike" cap="none">
-              <a:solidFill>
-                <a:srgbClr val="13294B"/>
-              </a:solidFill>
-              <a:latin typeface="Calibri"/>
-              <a:ea typeface="Calibri"/>
-              <a:cs typeface="Calibri"/>
-              <a:sym typeface="Calibri"/>
-            </a:endParaRPr>
-          </a:p>
-        </p:txBody>
-      </p:sp>
-      <p:sp>
-        <p:nvSpPr>
-          <p:cNvPr id="151" name="Google Shape;151;p31"/>
-          <p:cNvSpPr txBox="1"/>
-          <p:nvPr/>
-        </p:nvSpPr>
-        <p:spPr>
-          <a:xfrm>
-            <a:off x="376810" y="204051"/>
-            <a:ext cx="10910026" cy="461624"/>
-          </a:xfrm>
-          <a:prstGeom prst="rect">
-            <a:avLst/>
-          </a:prstGeom>
-          <a:noFill/>
-          <a:ln>
-            <a:noFill/>
-          </a:ln>
-        </p:spPr>
-        <p:txBody>
-          <a:bodyPr spcFirstLastPara="1" wrap="square" lIns="91425" tIns="45700" rIns="91425" bIns="45700" anchor="t" anchorCtr="0">
-            <a:spAutoFit/>
-          </a:bodyPr>
-          <a:lstStyle/>
-          <a:p>
-            <a:pPr marL="0" marR="0" lvl="0" indent="0" algn="l" rtl="0">
-              <a:lnSpc>
-                <a:spcPct val="100000"/>
-              </a:lnSpc>
-              <a:spcBef>
-                <a:spcPts val="0"/>
-              </a:spcBef>
-              <a:spcAft>
-                <a:spcPts val="0"/>
-              </a:spcAft>
-              <a:buClr>
-                <a:srgbClr val="000000"/>
-              </a:buClr>
-              <a:buSzPts val="2400"/>
-              <a:buFont typeface="Arial"/>
-              <a:buNone/>
-            </a:pPr>
-            <a:r>
-              <a:rPr lang="en-US" sz="2400" b="0" i="0" u="none" strike="noStrike" cap="none">
-                <a:solidFill>
-                  <a:schemeClr val="lt1"/>
-                </a:solidFill>
-                <a:latin typeface="Arial"/>
-                <a:ea typeface="Arial"/>
-                <a:cs typeface="Arial"/>
-                <a:sym typeface="Arial"/>
-              </a:rPr>
-              <a:t>Slide Title</a:t>
-            </a:r>
-            <a:endParaRPr sz="2400" b="0" i="0" u="none" strike="noStrike" cap="none">
+            <a:ln w="19050" cap="flat" cmpd="sng">
               <a:solidFill>
                 <a:schemeClr val="lt1"/>
               </a:solidFill>
-              <a:latin typeface="Arial"/>
-              <a:ea typeface="Arial"/>
-              <a:cs typeface="Arial"/>
-              <a:sym typeface="Arial"/>
-            </a:endParaRPr>
-          </a:p>
-        </p:txBody>
-      </p:sp>
+              <a:prstDash val="solid"/>
+              <a:round/>
+              <a:headEnd type="none" w="sm" len="sm"/>
+              <a:tailEnd type="none" w="sm" len="sm"/>
+            </a:ln>
+          </p:spPr>
+        </p:cxnSp>
+      </p:grpSp>
       <p:pic>
         <p:nvPicPr>
-          <p:cNvPr id="152" name="Google Shape;152;p31"/>
+          <p:cNvPr id="108" name="Google Shape;108;p28">
+            <a:extLst>
+              <a:ext uri="{FF2B5EF4-FFF2-40B4-BE49-F238E27FC236}">
+                <a16:creationId xmlns:a16="http://schemas.microsoft.com/office/drawing/2014/main" id="{741B976F-231B-489E-9CEF-714084DB8B3E}"/>
+              </a:ext>
+            </a:extLst>
+          </p:cNvPr>
           <p:cNvPicPr preferRelativeResize="0"/>
           <p:nvPr/>
         </p:nvPicPr>
         <p:blipFill rotWithShape="1">
-          <a:blip r:embed="rId3">
+          <a:blip r:embed="rId4">
             <a:alphaModFix/>
           </a:blip>
           <a:srcRect/>
@@ -26851,7 +28870,7 @@
         <p:spPr>
           <a:xfrm>
             <a:off x="11557509" y="233819"/>
-            <a:ext cx="271308" cy="389810"/>
+            <a:ext cx="271308" cy="389811"/>
           </a:xfrm>
           <a:prstGeom prst="rect">
             <a:avLst/>
@@ -26864,7 +28883,13 @@
       </p:pic>
       <p:sp>
         <p:nvSpPr>
-          <p:cNvPr id="153" name="Google Shape;153;p31"/>
+          <p:cNvPr id="109" name="Google Shape;109;p28">
+            <a:extLst>
+              <a:ext uri="{FF2B5EF4-FFF2-40B4-BE49-F238E27FC236}">
+                <a16:creationId xmlns:a16="http://schemas.microsoft.com/office/drawing/2014/main" id="{01BC63CD-BF15-40E8-7AFC-3CB305A7A1CC}"/>
+              </a:ext>
+            </a:extLst>
+          </p:cNvPr>
           <p:cNvSpPr txBox="1"/>
           <p:nvPr/>
         </p:nvSpPr>
@@ -26917,7 +28942,13 @@
       </p:sp>
       <p:sp>
         <p:nvSpPr>
-          <p:cNvPr id="154" name="Google Shape;154;p31"/>
+          <p:cNvPr id="110" name="Google Shape;110;p28">
+            <a:extLst>
+              <a:ext uri="{FF2B5EF4-FFF2-40B4-BE49-F238E27FC236}">
+                <a16:creationId xmlns:a16="http://schemas.microsoft.com/office/drawing/2014/main" id="{D1E599DF-5A3F-C139-F991-698A62675853}"/>
+              </a:ext>
+            </a:extLst>
+          </p:cNvPr>
           <p:cNvSpPr txBox="1"/>
           <p:nvPr/>
         </p:nvSpPr>
@@ -26966,7 +28997,13 @@
       </p:sp>
       <p:grpSp>
         <p:nvGrpSpPr>
-          <p:cNvPr id="155" name="Google Shape;155;p31"/>
+          <p:cNvPr id="111" name="Google Shape;111;p28">
+            <a:extLst>
+              <a:ext uri="{FF2B5EF4-FFF2-40B4-BE49-F238E27FC236}">
+                <a16:creationId xmlns:a16="http://schemas.microsoft.com/office/drawing/2014/main" id="{5F30FCCD-F8C8-7EA2-011E-BE1AD7FD4FBA}"/>
+              </a:ext>
+            </a:extLst>
+          </p:cNvPr>
           <p:cNvGrpSpPr/>
           <p:nvPr/>
         </p:nvGrpSpPr>
@@ -26980,7 +29017,13 @@
         </p:grpSpPr>
         <p:cxnSp>
           <p:nvCxnSpPr>
-            <p:cNvPr id="156" name="Google Shape;156;p31"/>
+            <p:cNvPr id="112" name="Google Shape;112;p28">
+              <a:extLst>
+                <a:ext uri="{FF2B5EF4-FFF2-40B4-BE49-F238E27FC236}">
+                  <a16:creationId xmlns:a16="http://schemas.microsoft.com/office/drawing/2014/main" id="{11D64D91-7B46-E35D-E635-66B21AF7DA1C}"/>
+                </a:ext>
+              </a:extLst>
+            </p:cNvPr>
             <p:cNvCxnSpPr/>
             <p:nvPr/>
           </p:nvCxnSpPr>
@@ -27006,7 +29049,13 @@
         </p:cxnSp>
         <p:sp>
           <p:nvSpPr>
-            <p:cNvPr id="157" name="Google Shape;157;p31"/>
+            <p:cNvPr id="113" name="Google Shape;113;p28">
+              <a:extLst>
+                <a:ext uri="{FF2B5EF4-FFF2-40B4-BE49-F238E27FC236}">
+                  <a16:creationId xmlns:a16="http://schemas.microsoft.com/office/drawing/2014/main" id="{036A8A30-1259-8DDB-B6F5-A0C284376D0A}"/>
+                </a:ext>
+              </a:extLst>
+            </p:cNvPr>
             <p:cNvSpPr/>
             <p:nvPr/>
           </p:nvSpPr>
@@ -27057,6 +29106,11 @@
         </p:sp>
       </p:grpSp>
     </p:spTree>
+    <p:extLst>
+      <p:ext uri="{BB962C8B-B14F-4D97-AF65-F5344CB8AC3E}">
+        <p14:creationId xmlns:p14="http://schemas.microsoft.com/office/powerpoint/2010/main" val="2559306291"/>
+      </p:ext>
+    </p:extLst>
   </p:cSld>
   <p:clrMapOvr>
     <a:masterClrMapping/>
